--- a/exports/pptx/lessons/middle-module-04-doshas/day-03-self-observation.pptx
+++ b/exports/pptx/lessons/middle-module-04-doshas/day-03-self-observation.pptx
@@ -16,9 +16,16 @@
     <p:sldId id="264" r:id="rId10"/>
     <p:sldId id="265" r:id="rId11"/>
     <p:sldId id="266" r:id="rId12"/>
+    <p:sldId id="267" r:id="rId13"/>
+    <p:sldId id="268" r:id="rId14"/>
+    <p:sldId id="269" r:id="rId15"/>
+    <p:sldId id="270" r:id="rId16"/>
+    <p:sldId id="271" r:id="rId17"/>
+    <p:sldId id="272" r:id="rId18"/>
+    <p:sldId id="273" r:id="rId19"/>
   </p:sldIdLst>
   <p:notesMasterIdLst>
-    <p:notesMasterId r:id="rId13"/>
+    <p:notesMasterId r:id="rId20"/>
   </p:notesMasterIdLst>
   <p:sldSz cx="9144000" cy="5143500"/>
   <p:notesSz cx="5143500" cy="9144000"/>
@@ -712,6 +719,622 @@
             <a:fld id="{F7021451-1387-4CA6-816F-3879F97B5CBC}" type="slidenum">
               <a:rPr lang="en-US"/>
               <a:t>11</a:t>
+            </a:fld>
+            <a:endParaRPr lang="en-US"/>
+          </a:p>
+        </p:txBody>
+      </p:sp>
+    </p:spTree>
+    <p:extLst>
+      <p:ext uri="{BB962C8B-B14F-4D97-AF65-F5344CB8AC3E}">
+        <p14:creationId xmlns:p14="http://schemas.microsoft.com/office/powerpoint/2010/main" val="1024086991"/>
+      </p:ext>
+    </p:extLst>
+  </p:cSld>
+  <p:clrMapOvr>
+    <a:masterClrMapping/>
+  </p:clrMapOvr>
+</p:notes>
+</file>
+
+<file path=ppt/notesSlides/notesSlide12.xml><?xml version="1.0" encoding="utf-8"?>
+<p:notes xmlns:a="http://schemas.openxmlformats.org/drawingml/2006/main" xmlns:r="http://schemas.openxmlformats.org/officeDocument/2006/relationships" xmlns:p="http://schemas.openxmlformats.org/presentationml/2006/main">
+  <p:cSld>
+    <p:spTree>
+      <p:nvGrpSpPr>
+        <p:cNvPr id="1" name=""/>
+        <p:cNvGrpSpPr/>
+        <p:nvPr/>
+      </p:nvGrpSpPr>
+      <p:grpSpPr>
+        <a:xfrm>
+          <a:off x="0" y="0"/>
+          <a:ext cx="0" cy="0"/>
+          <a:chOff x="0" y="0"/>
+          <a:chExt cx="0" cy="0"/>
+        </a:xfrm>
+      </p:grpSpPr>
+      <p:sp>
+        <p:nvSpPr>
+          <p:cNvPr id="2" name="Slide Image Placeholder 1"/>
+          <p:cNvSpPr>
+            <a:spLocks noGrp="1" noRot="1" noChangeAspect="1"/>
+          </p:cNvSpPr>
+          <p:nvPr>
+            <p:ph type="sldImg"/>
+          </p:nvPr>
+        </p:nvSpPr>
+        <p:spPr/>
+      </p:sp>
+      <p:sp>
+        <p:nvSpPr>
+          <p:cNvPr id="3" name="Notes Placeholder 2"/>
+          <p:cNvSpPr>
+            <a:spLocks noGrp="1"/>
+          </p:cNvSpPr>
+          <p:nvPr>
+            <p:ph type="body" idx="1"/>
+          </p:nvPr>
+        </p:nvSpPr>
+        <p:spPr/>
+        <p:txBody>
+          <a:bodyPr/>
+          <a:lstStyle/>
+          <a:p>
+            <a:r>
+              <a:rPr lang="en-US" dirty="0"/>
+              <a:t/>
+            </a:r>
+            <a:endParaRPr lang="en-US" dirty="0"/>
+          </a:p>
+        </p:txBody>
+      </p:sp>
+      <p:sp>
+        <p:nvSpPr>
+          <p:cNvPr id="4" name="Slide Number Placeholder 3"/>
+          <p:cNvSpPr>
+            <a:spLocks noGrp="1"/>
+          </p:cNvSpPr>
+          <p:nvPr>
+            <p:ph type="sldNum" sz="quarter" idx="10"/>
+          </p:nvPr>
+        </p:nvSpPr>
+        <p:spPr/>
+        <p:txBody>
+          <a:bodyPr/>
+          <a:lstStyle/>
+          <a:p>
+            <a:fld id="{F7021451-1387-4CA6-816F-3879F97B5CBC}" type="slidenum">
+              <a:rPr lang="en-US"/>
+              <a:t>12</a:t>
+            </a:fld>
+            <a:endParaRPr lang="en-US"/>
+          </a:p>
+        </p:txBody>
+      </p:sp>
+    </p:spTree>
+    <p:extLst>
+      <p:ext uri="{BB962C8B-B14F-4D97-AF65-F5344CB8AC3E}">
+        <p14:creationId xmlns:p14="http://schemas.microsoft.com/office/powerpoint/2010/main" val="1024086991"/>
+      </p:ext>
+    </p:extLst>
+  </p:cSld>
+  <p:clrMapOvr>
+    <a:masterClrMapping/>
+  </p:clrMapOvr>
+</p:notes>
+</file>
+
+<file path=ppt/notesSlides/notesSlide13.xml><?xml version="1.0" encoding="utf-8"?>
+<p:notes xmlns:a="http://schemas.openxmlformats.org/drawingml/2006/main" xmlns:r="http://schemas.openxmlformats.org/officeDocument/2006/relationships" xmlns:p="http://schemas.openxmlformats.org/presentationml/2006/main">
+  <p:cSld>
+    <p:spTree>
+      <p:nvGrpSpPr>
+        <p:cNvPr id="1" name=""/>
+        <p:cNvGrpSpPr/>
+        <p:nvPr/>
+      </p:nvGrpSpPr>
+      <p:grpSpPr>
+        <a:xfrm>
+          <a:off x="0" y="0"/>
+          <a:ext cx="0" cy="0"/>
+          <a:chOff x="0" y="0"/>
+          <a:chExt cx="0" cy="0"/>
+        </a:xfrm>
+      </p:grpSpPr>
+      <p:sp>
+        <p:nvSpPr>
+          <p:cNvPr id="2" name="Slide Image Placeholder 1"/>
+          <p:cNvSpPr>
+            <a:spLocks noGrp="1" noRot="1" noChangeAspect="1"/>
+          </p:cNvSpPr>
+          <p:nvPr>
+            <p:ph type="sldImg"/>
+          </p:nvPr>
+        </p:nvSpPr>
+        <p:spPr/>
+      </p:sp>
+      <p:sp>
+        <p:nvSpPr>
+          <p:cNvPr id="3" name="Notes Placeholder 2"/>
+          <p:cNvSpPr>
+            <a:spLocks noGrp="1"/>
+          </p:cNvSpPr>
+          <p:nvPr>
+            <p:ph type="body" idx="1"/>
+          </p:nvPr>
+        </p:nvSpPr>
+        <p:spPr/>
+        <p:txBody>
+          <a:bodyPr/>
+          <a:lstStyle/>
+          <a:p>
+            <a:r>
+              <a:rPr lang="en-US" dirty="0"/>
+              <a:t/>
+            </a:r>
+            <a:endParaRPr lang="en-US" dirty="0"/>
+          </a:p>
+        </p:txBody>
+      </p:sp>
+      <p:sp>
+        <p:nvSpPr>
+          <p:cNvPr id="4" name="Slide Number Placeholder 3"/>
+          <p:cNvSpPr>
+            <a:spLocks noGrp="1"/>
+          </p:cNvSpPr>
+          <p:nvPr>
+            <p:ph type="sldNum" sz="quarter" idx="10"/>
+          </p:nvPr>
+        </p:nvSpPr>
+        <p:spPr/>
+        <p:txBody>
+          <a:bodyPr/>
+          <a:lstStyle/>
+          <a:p>
+            <a:fld id="{F7021451-1387-4CA6-816F-3879F97B5CBC}" type="slidenum">
+              <a:rPr lang="en-US"/>
+              <a:t>13</a:t>
+            </a:fld>
+            <a:endParaRPr lang="en-US"/>
+          </a:p>
+        </p:txBody>
+      </p:sp>
+    </p:spTree>
+    <p:extLst>
+      <p:ext uri="{BB962C8B-B14F-4D97-AF65-F5344CB8AC3E}">
+        <p14:creationId xmlns:p14="http://schemas.microsoft.com/office/powerpoint/2010/main" val="1024086991"/>
+      </p:ext>
+    </p:extLst>
+  </p:cSld>
+  <p:clrMapOvr>
+    <a:masterClrMapping/>
+  </p:clrMapOvr>
+</p:notes>
+</file>
+
+<file path=ppt/notesSlides/notesSlide14.xml><?xml version="1.0" encoding="utf-8"?>
+<p:notes xmlns:a="http://schemas.openxmlformats.org/drawingml/2006/main" xmlns:r="http://schemas.openxmlformats.org/officeDocument/2006/relationships" xmlns:p="http://schemas.openxmlformats.org/presentationml/2006/main">
+  <p:cSld>
+    <p:spTree>
+      <p:nvGrpSpPr>
+        <p:cNvPr id="1" name=""/>
+        <p:cNvGrpSpPr/>
+        <p:nvPr/>
+      </p:nvGrpSpPr>
+      <p:grpSpPr>
+        <a:xfrm>
+          <a:off x="0" y="0"/>
+          <a:ext cx="0" cy="0"/>
+          <a:chOff x="0" y="0"/>
+          <a:chExt cx="0" cy="0"/>
+        </a:xfrm>
+      </p:grpSpPr>
+      <p:sp>
+        <p:nvSpPr>
+          <p:cNvPr id="2" name="Slide Image Placeholder 1"/>
+          <p:cNvSpPr>
+            <a:spLocks noGrp="1" noRot="1" noChangeAspect="1"/>
+          </p:cNvSpPr>
+          <p:nvPr>
+            <p:ph type="sldImg"/>
+          </p:nvPr>
+        </p:nvSpPr>
+        <p:spPr/>
+      </p:sp>
+      <p:sp>
+        <p:nvSpPr>
+          <p:cNvPr id="3" name="Notes Placeholder 2"/>
+          <p:cNvSpPr>
+            <a:spLocks noGrp="1"/>
+          </p:cNvSpPr>
+          <p:nvPr>
+            <p:ph type="body" idx="1"/>
+          </p:nvPr>
+        </p:nvSpPr>
+        <p:spPr/>
+        <p:txBody>
+          <a:bodyPr/>
+          <a:lstStyle/>
+          <a:p>
+            <a:r>
+              <a:rPr lang="en-US" dirty="0"/>
+              <a:t/>
+            </a:r>
+            <a:endParaRPr lang="en-US" dirty="0"/>
+          </a:p>
+        </p:txBody>
+      </p:sp>
+      <p:sp>
+        <p:nvSpPr>
+          <p:cNvPr id="4" name="Slide Number Placeholder 3"/>
+          <p:cNvSpPr>
+            <a:spLocks noGrp="1"/>
+          </p:cNvSpPr>
+          <p:nvPr>
+            <p:ph type="sldNum" sz="quarter" idx="10"/>
+          </p:nvPr>
+        </p:nvSpPr>
+        <p:spPr/>
+        <p:txBody>
+          <a:bodyPr/>
+          <a:lstStyle/>
+          <a:p>
+            <a:fld id="{F7021451-1387-4CA6-816F-3879F97B5CBC}" type="slidenum">
+              <a:rPr lang="en-US"/>
+              <a:t>14</a:t>
+            </a:fld>
+            <a:endParaRPr lang="en-US"/>
+          </a:p>
+        </p:txBody>
+      </p:sp>
+    </p:spTree>
+    <p:extLst>
+      <p:ext uri="{BB962C8B-B14F-4D97-AF65-F5344CB8AC3E}">
+        <p14:creationId xmlns:p14="http://schemas.microsoft.com/office/powerpoint/2010/main" val="1024086991"/>
+      </p:ext>
+    </p:extLst>
+  </p:cSld>
+  <p:clrMapOvr>
+    <a:masterClrMapping/>
+  </p:clrMapOvr>
+</p:notes>
+</file>
+
+<file path=ppt/notesSlides/notesSlide15.xml><?xml version="1.0" encoding="utf-8"?>
+<p:notes xmlns:a="http://schemas.openxmlformats.org/drawingml/2006/main" xmlns:r="http://schemas.openxmlformats.org/officeDocument/2006/relationships" xmlns:p="http://schemas.openxmlformats.org/presentationml/2006/main">
+  <p:cSld>
+    <p:spTree>
+      <p:nvGrpSpPr>
+        <p:cNvPr id="1" name=""/>
+        <p:cNvGrpSpPr/>
+        <p:nvPr/>
+      </p:nvGrpSpPr>
+      <p:grpSpPr>
+        <a:xfrm>
+          <a:off x="0" y="0"/>
+          <a:ext cx="0" cy="0"/>
+          <a:chOff x="0" y="0"/>
+          <a:chExt cx="0" cy="0"/>
+        </a:xfrm>
+      </p:grpSpPr>
+      <p:sp>
+        <p:nvSpPr>
+          <p:cNvPr id="2" name="Slide Image Placeholder 1"/>
+          <p:cNvSpPr>
+            <a:spLocks noGrp="1" noRot="1" noChangeAspect="1"/>
+          </p:cNvSpPr>
+          <p:nvPr>
+            <p:ph type="sldImg"/>
+          </p:nvPr>
+        </p:nvSpPr>
+        <p:spPr/>
+      </p:sp>
+      <p:sp>
+        <p:nvSpPr>
+          <p:cNvPr id="3" name="Notes Placeholder 2"/>
+          <p:cNvSpPr>
+            <a:spLocks noGrp="1"/>
+          </p:cNvSpPr>
+          <p:nvPr>
+            <p:ph type="body" idx="1"/>
+          </p:nvPr>
+        </p:nvSpPr>
+        <p:spPr/>
+        <p:txBody>
+          <a:bodyPr/>
+          <a:lstStyle/>
+          <a:p>
+            <a:r>
+              <a:rPr lang="en-US" dirty="0"/>
+              <a:t/>
+            </a:r>
+            <a:endParaRPr lang="en-US" dirty="0"/>
+          </a:p>
+        </p:txBody>
+      </p:sp>
+      <p:sp>
+        <p:nvSpPr>
+          <p:cNvPr id="4" name="Slide Number Placeholder 3"/>
+          <p:cNvSpPr>
+            <a:spLocks noGrp="1"/>
+          </p:cNvSpPr>
+          <p:nvPr>
+            <p:ph type="sldNum" sz="quarter" idx="10"/>
+          </p:nvPr>
+        </p:nvSpPr>
+        <p:spPr/>
+        <p:txBody>
+          <a:bodyPr/>
+          <a:lstStyle/>
+          <a:p>
+            <a:fld id="{F7021451-1387-4CA6-816F-3879F97B5CBC}" type="slidenum">
+              <a:rPr lang="en-US"/>
+              <a:t>15</a:t>
+            </a:fld>
+            <a:endParaRPr lang="en-US"/>
+          </a:p>
+        </p:txBody>
+      </p:sp>
+    </p:spTree>
+    <p:extLst>
+      <p:ext uri="{BB962C8B-B14F-4D97-AF65-F5344CB8AC3E}">
+        <p14:creationId xmlns:p14="http://schemas.microsoft.com/office/powerpoint/2010/main" val="1024086991"/>
+      </p:ext>
+    </p:extLst>
+  </p:cSld>
+  <p:clrMapOvr>
+    <a:masterClrMapping/>
+  </p:clrMapOvr>
+</p:notes>
+</file>
+
+<file path=ppt/notesSlides/notesSlide16.xml><?xml version="1.0" encoding="utf-8"?>
+<p:notes xmlns:a="http://schemas.openxmlformats.org/drawingml/2006/main" xmlns:r="http://schemas.openxmlformats.org/officeDocument/2006/relationships" xmlns:p="http://schemas.openxmlformats.org/presentationml/2006/main">
+  <p:cSld>
+    <p:spTree>
+      <p:nvGrpSpPr>
+        <p:cNvPr id="1" name=""/>
+        <p:cNvGrpSpPr/>
+        <p:nvPr/>
+      </p:nvGrpSpPr>
+      <p:grpSpPr>
+        <a:xfrm>
+          <a:off x="0" y="0"/>
+          <a:ext cx="0" cy="0"/>
+          <a:chOff x="0" y="0"/>
+          <a:chExt cx="0" cy="0"/>
+        </a:xfrm>
+      </p:grpSpPr>
+      <p:sp>
+        <p:nvSpPr>
+          <p:cNvPr id="2" name="Slide Image Placeholder 1"/>
+          <p:cNvSpPr>
+            <a:spLocks noGrp="1" noRot="1" noChangeAspect="1"/>
+          </p:cNvSpPr>
+          <p:nvPr>
+            <p:ph type="sldImg"/>
+          </p:nvPr>
+        </p:nvSpPr>
+        <p:spPr/>
+      </p:sp>
+      <p:sp>
+        <p:nvSpPr>
+          <p:cNvPr id="3" name="Notes Placeholder 2"/>
+          <p:cNvSpPr>
+            <a:spLocks noGrp="1"/>
+          </p:cNvSpPr>
+          <p:nvPr>
+            <p:ph type="body" idx="1"/>
+          </p:nvPr>
+        </p:nvSpPr>
+        <p:spPr/>
+        <p:txBody>
+          <a:bodyPr/>
+          <a:lstStyle/>
+          <a:p>
+            <a:r>
+              <a:rPr lang="en-US" dirty="0"/>
+              <a:t/>
+            </a:r>
+            <a:endParaRPr lang="en-US" dirty="0"/>
+          </a:p>
+        </p:txBody>
+      </p:sp>
+      <p:sp>
+        <p:nvSpPr>
+          <p:cNvPr id="4" name="Slide Number Placeholder 3"/>
+          <p:cNvSpPr>
+            <a:spLocks noGrp="1"/>
+          </p:cNvSpPr>
+          <p:nvPr>
+            <p:ph type="sldNum" sz="quarter" idx="10"/>
+          </p:nvPr>
+        </p:nvSpPr>
+        <p:spPr/>
+        <p:txBody>
+          <a:bodyPr/>
+          <a:lstStyle/>
+          <a:p>
+            <a:fld id="{F7021451-1387-4CA6-816F-3879F97B5CBC}" type="slidenum">
+              <a:rPr lang="en-US"/>
+              <a:t>16</a:t>
+            </a:fld>
+            <a:endParaRPr lang="en-US"/>
+          </a:p>
+        </p:txBody>
+      </p:sp>
+    </p:spTree>
+    <p:extLst>
+      <p:ext uri="{BB962C8B-B14F-4D97-AF65-F5344CB8AC3E}">
+        <p14:creationId xmlns:p14="http://schemas.microsoft.com/office/powerpoint/2010/main" val="1024086991"/>
+      </p:ext>
+    </p:extLst>
+  </p:cSld>
+  <p:clrMapOvr>
+    <a:masterClrMapping/>
+  </p:clrMapOvr>
+</p:notes>
+</file>
+
+<file path=ppt/notesSlides/notesSlide17.xml><?xml version="1.0" encoding="utf-8"?>
+<p:notes xmlns:a="http://schemas.openxmlformats.org/drawingml/2006/main" xmlns:r="http://schemas.openxmlformats.org/officeDocument/2006/relationships" xmlns:p="http://schemas.openxmlformats.org/presentationml/2006/main">
+  <p:cSld>
+    <p:spTree>
+      <p:nvGrpSpPr>
+        <p:cNvPr id="1" name=""/>
+        <p:cNvGrpSpPr/>
+        <p:nvPr/>
+      </p:nvGrpSpPr>
+      <p:grpSpPr>
+        <a:xfrm>
+          <a:off x="0" y="0"/>
+          <a:ext cx="0" cy="0"/>
+          <a:chOff x="0" y="0"/>
+          <a:chExt cx="0" cy="0"/>
+        </a:xfrm>
+      </p:grpSpPr>
+      <p:sp>
+        <p:nvSpPr>
+          <p:cNvPr id="2" name="Slide Image Placeholder 1"/>
+          <p:cNvSpPr>
+            <a:spLocks noGrp="1" noRot="1" noChangeAspect="1"/>
+          </p:cNvSpPr>
+          <p:nvPr>
+            <p:ph type="sldImg"/>
+          </p:nvPr>
+        </p:nvSpPr>
+        <p:spPr/>
+      </p:sp>
+      <p:sp>
+        <p:nvSpPr>
+          <p:cNvPr id="3" name="Notes Placeholder 2"/>
+          <p:cNvSpPr>
+            <a:spLocks noGrp="1"/>
+          </p:cNvSpPr>
+          <p:nvPr>
+            <p:ph type="body" idx="1"/>
+          </p:nvPr>
+        </p:nvSpPr>
+        <p:spPr/>
+        <p:txBody>
+          <a:bodyPr/>
+          <a:lstStyle/>
+          <a:p>
+            <a:r>
+              <a:rPr lang="en-US" dirty="0"/>
+              <a:t/>
+            </a:r>
+            <a:endParaRPr lang="en-US" dirty="0"/>
+          </a:p>
+        </p:txBody>
+      </p:sp>
+      <p:sp>
+        <p:nvSpPr>
+          <p:cNvPr id="4" name="Slide Number Placeholder 3"/>
+          <p:cNvSpPr>
+            <a:spLocks noGrp="1"/>
+          </p:cNvSpPr>
+          <p:nvPr>
+            <p:ph type="sldNum" sz="quarter" idx="10"/>
+          </p:nvPr>
+        </p:nvSpPr>
+        <p:spPr/>
+        <p:txBody>
+          <a:bodyPr/>
+          <a:lstStyle/>
+          <a:p>
+            <a:fld id="{F7021451-1387-4CA6-816F-3879F97B5CBC}" type="slidenum">
+              <a:rPr lang="en-US"/>
+              <a:t>17</a:t>
+            </a:fld>
+            <a:endParaRPr lang="en-US"/>
+          </a:p>
+        </p:txBody>
+      </p:sp>
+    </p:spTree>
+    <p:extLst>
+      <p:ext uri="{BB962C8B-B14F-4D97-AF65-F5344CB8AC3E}">
+        <p14:creationId xmlns:p14="http://schemas.microsoft.com/office/powerpoint/2010/main" val="1024086991"/>
+      </p:ext>
+    </p:extLst>
+  </p:cSld>
+  <p:clrMapOvr>
+    <a:masterClrMapping/>
+  </p:clrMapOvr>
+</p:notes>
+</file>
+
+<file path=ppt/notesSlides/notesSlide18.xml><?xml version="1.0" encoding="utf-8"?>
+<p:notes xmlns:a="http://schemas.openxmlformats.org/drawingml/2006/main" xmlns:r="http://schemas.openxmlformats.org/officeDocument/2006/relationships" xmlns:p="http://schemas.openxmlformats.org/presentationml/2006/main">
+  <p:cSld>
+    <p:spTree>
+      <p:nvGrpSpPr>
+        <p:cNvPr id="1" name=""/>
+        <p:cNvGrpSpPr/>
+        <p:nvPr/>
+      </p:nvGrpSpPr>
+      <p:grpSpPr>
+        <a:xfrm>
+          <a:off x="0" y="0"/>
+          <a:ext cx="0" cy="0"/>
+          <a:chOff x="0" y="0"/>
+          <a:chExt cx="0" cy="0"/>
+        </a:xfrm>
+      </p:grpSpPr>
+      <p:sp>
+        <p:nvSpPr>
+          <p:cNvPr id="2" name="Slide Image Placeholder 1"/>
+          <p:cNvSpPr>
+            <a:spLocks noGrp="1" noRot="1" noChangeAspect="1"/>
+          </p:cNvSpPr>
+          <p:nvPr>
+            <p:ph type="sldImg"/>
+          </p:nvPr>
+        </p:nvSpPr>
+        <p:spPr/>
+      </p:sp>
+      <p:sp>
+        <p:nvSpPr>
+          <p:cNvPr id="3" name="Notes Placeholder 2"/>
+          <p:cNvSpPr>
+            <a:spLocks noGrp="1"/>
+          </p:cNvSpPr>
+          <p:nvPr>
+            <p:ph type="body" idx="1"/>
+          </p:nvPr>
+        </p:nvSpPr>
+        <p:spPr/>
+        <p:txBody>
+          <a:bodyPr/>
+          <a:lstStyle/>
+          <a:p>
+            <a:r>
+              <a:rPr lang="en-US" dirty="0"/>
+              <a:t/>
+            </a:r>
+            <a:endParaRPr lang="en-US" dirty="0"/>
+          </a:p>
+        </p:txBody>
+      </p:sp>
+      <p:sp>
+        <p:nvSpPr>
+          <p:cNvPr id="4" name="Slide Number Placeholder 3"/>
+          <p:cNvSpPr>
+            <a:spLocks noGrp="1"/>
+          </p:cNvSpPr>
+          <p:nvPr>
+            <p:ph type="sldNum" sz="quarter" idx="10"/>
+          </p:nvPr>
+        </p:nvSpPr>
+        <p:spPr/>
+        <p:txBody>
+          <a:bodyPr/>
+          <a:lstStyle/>
+          <a:p>
+            <a:fld id="{F7021451-1387-4CA6-816F-3879F97B5CBC}" type="slidenum">
+              <a:rPr lang="en-US"/>
+              <a:t>18</a:t>
             </a:fld>
             <a:endParaRPr lang="en-US"/>
           </a:p>
@@ -2011,194 +2634,6 @@
         </p:nvSpPr>
         <p:spPr>
           <a:xfrm>
-            <a:off x="406301" y="1223963"/>
-            <a:ext cx="8498026" cy="274290"/>
-          </a:xfrm>
-          <a:prstGeom prst="rect">
-            <a:avLst/>
-          </a:prstGeom>
-          <a:noFill/>
-          <a:ln/>
-        </p:spPr>
-        <p:txBody>
-          <a:bodyPr wrap="square" lIns="0" tIns="0" rIns="0" bIns="0" rtlCol="0" anchor="t"/>
-          <a:lstStyle/>
-          <a:p>
-            <a:pPr algn="l" indent="0" marL="0">
-              <a:lnSpc>
-                <a:spcPts val="2160"/>
-              </a:lnSpc>
-              <a:spcBef>
-                <a:spcPts val="600"/>
-              </a:spcBef>
-              <a:spcAft>
-                <a:spcPts val="800"/>
-              </a:spcAft>
-              <a:buNone/>
-            </a:pPr>
-            <a:r>
-              <a:rPr lang="en-US" sz="1800" b="1" dirty="0">
-                <a:solidFill>
-                  <a:srgbClr val="FE4447"/>
-                </a:solidFill>
-                <a:latin typeface="Georgia" pitchFamily="34" charset="0"/>
-                <a:ea typeface="Georgia" pitchFamily="34" charset="-122"/>
-                <a:cs typeface="Georgia" pitchFamily="34" charset="-120"/>
-              </a:rPr>
-              <a:t>Learning objective</a:t>
-            </a:r>
-            <a:endParaRPr lang="en-US" sz="1800" dirty="0"/>
-          </a:p>
-        </p:txBody>
-      </p:sp>
-      <p:sp>
-        <p:nvSpPr>
-          <p:cNvPr id="6" name="Text 4"/>
-          <p:cNvSpPr/>
-          <p:nvPr/>
-        </p:nvSpPr>
-        <p:spPr>
-          <a:xfrm>
-            <a:off x="406301" y="1637854"/>
-            <a:ext cx="8498026" cy="426541"/>
-          </a:xfrm>
-          <a:prstGeom prst="rect">
-            <a:avLst/>
-          </a:prstGeom>
-          <a:noFill/>
-          <a:ln/>
-        </p:spPr>
-        <p:txBody>
-          <a:bodyPr wrap="square" lIns="0" tIns="0" rIns="0" bIns="0" rtlCol="0" anchor="t"/>
-          <a:lstStyle/>
-          <a:p>
-            <a:pPr algn="l" indent="0" marL="0">
-              <a:lnSpc>
-                <a:spcPts val="1680"/>
-              </a:lnSpc>
-              <a:spcBef>
-                <a:spcPts val="300"/>
-              </a:spcBef>
-              <a:spcAft>
-                <a:spcPts val="300"/>
-              </a:spcAft>
-              <a:buNone/>
-            </a:pPr>
-            <a:r>
-              <a:rPr lang="en-US" sz="1200" dirty="0">
-                <a:solidFill>
-                  <a:srgbClr val="1C2833"/>
-                </a:solidFill>
-                <a:latin typeface="Arial" pitchFamily="34" charset="0"/>
-                <a:ea typeface="Arial" pitchFamily="34" charset="-122"/>
-                <a:cs typeface="Arial" pitchFamily="34" charset="-120"/>
-              </a:rPr>
-              <a:t>By the end of this lesson, students explain the distinction between </a:t>
-            </a:r>
-            <a:pPr algn="l" indent="0" marL="0">
-              <a:lnSpc>
-                <a:spcPts val="1680"/>
-              </a:lnSpc>
-              <a:spcBef>
-                <a:spcPts val="300"/>
-              </a:spcBef>
-              <a:spcAft>
-                <a:spcPts val="300"/>
-              </a:spcAft>
-              <a:buNone/>
-            </a:pPr>
-            <a:r>
-              <a:rPr lang="en-US" sz="1200" i="1" dirty="0">
-                <a:solidFill>
-                  <a:srgbClr val="1C2833"/>
-                </a:solidFill>
-                <a:latin typeface="Arial" pitchFamily="34" charset="0"/>
-                <a:ea typeface="Arial" pitchFamily="34" charset="-122"/>
-                <a:cs typeface="Arial" pitchFamily="34" charset="-120"/>
-              </a:rPr>
-              <a:t>prakṛti</a:t>
-            </a:r>
-            <a:pPr algn="l" indent="0" marL="0">
-              <a:lnSpc>
-                <a:spcPts val="1680"/>
-              </a:lnSpc>
-              <a:spcBef>
-                <a:spcPts val="300"/>
-              </a:spcBef>
-              <a:spcAft>
-                <a:spcPts val="300"/>
-              </a:spcAft>
-              <a:buNone/>
-            </a:pPr>
-            <a:r>
-              <a:rPr lang="en-US" sz="1200" dirty="0">
-                <a:solidFill>
-                  <a:srgbClr val="1C2833"/>
-                </a:solidFill>
-                <a:latin typeface="Arial" pitchFamily="34" charset="0"/>
-                <a:ea typeface="Arial" pitchFamily="34" charset="-122"/>
-                <a:cs typeface="Arial" pitchFamily="34" charset="-120"/>
-              </a:rPr>
-              <a:t> (constitutional baseline) and </a:t>
-            </a:r>
-            <a:pPr algn="l" indent="0" marL="0">
-              <a:lnSpc>
-                <a:spcPts val="1680"/>
-              </a:lnSpc>
-              <a:spcBef>
-                <a:spcPts val="300"/>
-              </a:spcBef>
-              <a:spcAft>
-                <a:spcPts val="300"/>
-              </a:spcAft>
-              <a:buNone/>
-            </a:pPr>
-            <a:r>
-              <a:rPr lang="en-US" sz="1200" i="1" dirty="0">
-                <a:solidFill>
-                  <a:srgbClr val="1C2833"/>
-                </a:solidFill>
-                <a:latin typeface="Arial" pitchFamily="34" charset="0"/>
-                <a:ea typeface="Arial" pitchFamily="34" charset="-122"/>
-                <a:cs typeface="Arial" pitchFamily="34" charset="-120"/>
-              </a:rPr>
-              <a:t>vikṛti</a:t>
-            </a:r>
-            <a:pPr algn="l" indent="0" marL="0">
-              <a:lnSpc>
-                <a:spcPts val="1680"/>
-              </a:lnSpc>
-              <a:spcBef>
-                <a:spcPts val="300"/>
-              </a:spcBef>
-              <a:spcAft>
-                <a:spcPts val="300"/>
-              </a:spcAft>
-              <a:buNone/>
-            </a:pPr>
-            <a:r>
-              <a:rPr lang="en-US" sz="1200" dirty="0">
-                <a:solidFill>
-                  <a:srgbClr val="1C2833"/>
-                </a:solidFill>
-                <a:latin typeface="Arial" pitchFamily="34" charset="0"/>
-                <a:ea typeface="Arial" pitchFamily="34" charset="-122"/>
-                <a:cs typeface="Arial" pitchFamily="34" charset="-120"/>
-              </a:rPr>
-              <a:t> (current state), complete a non-diagnostic self-observation worksheet, and articulate why the framework should be held lightly.</a:t>
-            </a:r>
-            <a:endParaRPr lang="en-US" sz="1200" dirty="0"/>
-          </a:p>
-        </p:txBody>
-      </p:sp>
-      <p:sp>
-        <p:nvSpPr>
-          <p:cNvPr id="7" name="Text 5"/>
-          <p:cNvSpPr/>
-          <p:nvPr/>
-        </p:nvSpPr>
-        <p:spPr>
-          <a:xfrm>
             <a:off x="406301" y="4434929"/>
             <a:ext cx="8498026" cy="213271"/>
           </a:xfrm>
@@ -2343,7 +2778,7 @@
                 <a:ea typeface="Georgia" pitchFamily="34" charset="-122"/>
                 <a:cs typeface="Georgia" pitchFamily="34" charset="-120"/>
               </a:rPr>
-              <a:t>Teacher notes</a:t>
+              <a:t>Core (15 min) (cont.)</a:t>
             </a:r>
             <a:endParaRPr lang="en-US" sz="1800" dirty="0"/>
           </a:p>
@@ -2357,8 +2792,8 @@
         </p:nvSpPr>
         <p:spPr>
           <a:xfrm>
-            <a:off x="406301" y="870942"/>
-            <a:ext cx="8498026" cy="639812"/>
+            <a:off x="634901" y="883593"/>
+            <a:ext cx="8102798" cy="281880"/>
           </a:xfrm>
           <a:prstGeom prst="rect">
             <a:avLst/>
@@ -2370,13 +2805,31 @@
           <a:bodyPr wrap="square" lIns="0" tIns="0" rIns="0" bIns="0" rtlCol="0" anchor="t"/>
           <a:lstStyle/>
           <a:p>
-            <a:pPr algn="l" indent="0" marL="0">
-              <a:lnSpc>
-                <a:spcPts val="1680"/>
-              </a:lnSpc>
-              <a:spcBef>
-                <a:spcPts val="300"/>
-              </a:spcBef>
+            <a:pPr algn="l" marL="342900" indent="-342900">
+              <a:lnSpc>
+                <a:spcPts val="1620"/>
+              </a:lnSpc>
+              <a:spcAft>
+                <a:spcPts val="300"/>
+              </a:spcAft>
+              <a:buSzPct val="100000"/>
+              <a:buChar char="•"/>
+            </a:pPr>
+            <a:r>
+              <a:rPr lang="en-US" sz="1200" b="1" dirty="0">
+                <a:solidFill>
+                  <a:srgbClr val="1C2833"/>
+                </a:solidFill>
+                <a:latin typeface="Arial" pitchFamily="34" charset="0"/>
+                <a:ea typeface="Arial" pitchFamily="34" charset="-122"/>
+                <a:cs typeface="Arial" pitchFamily="34" charset="-120"/>
+              </a:rPr>
+              <a:t>The safety statement</a:t>
+            </a:r>
+            <a:pPr algn="l" indent="0" marL="0">
+              <a:lnSpc>
+                <a:spcPts val="1620"/>
+              </a:lnSpc>
               <a:spcAft>
                 <a:spcPts val="300"/>
               </a:spcAft>
@@ -2391,7 +2844,7 @@
                 <a:ea typeface="Arial" pitchFamily="34" charset="-122"/>
                 <a:cs typeface="Arial" pitchFamily="34" charset="-120"/>
               </a:rPr>
-              <a:t>– This is the most ethically sensitive day in the module. Watch for:   – Students writing "I am Vāta" or "I am stupid because Kapha is slow" — interrupt these gently.   – Students who score heavily on one column and seem distressed — pull aside privately.   – Students who refuse to complete the worksheet — accept, no questions asked.</a:t>
+              <a:t> (read aloud, every student copies into notebook):</a:t>
             </a:r>
             <a:endParaRPr lang="en-US" sz="1200" dirty="0"/>
           </a:p>
@@ -2405,8 +2858,61 @@
         </p:nvSpPr>
         <p:spPr>
           <a:xfrm>
-            <a:off x="634901" y="1599605"/>
-            <a:ext cx="8102798" cy="281880"/>
+            <a:off x="406301" y="1266974"/>
+            <a:ext cx="8331398" cy="842963"/>
+          </a:xfrm>
+          <a:prstGeom prst="rect">
+            <a:avLst/>
+          </a:prstGeom>
+          <a:solidFill>
+            <a:srgbClr val="F4F8F9"/>
+          </a:solidFill>
+          <a:ln/>
+        </p:spPr>
+        <p:txBody>
+          <a:bodyPr wrap="square" rtlCol="0" anchor="ctr"/>
+          <a:lstStyle/>
+          <a:p>
+            <a:pPr indent="0" marL="0">
+              <a:buNone/>
+            </a:pPr>
+            <a:endParaRPr lang="en-US" dirty="0"/>
+          </a:p>
+        </p:txBody>
+      </p:sp>
+      <p:sp>
+        <p:nvSpPr>
+          <p:cNvPr id="6" name="Shape 4"/>
+          <p:cNvSpPr/>
+          <p:nvPr/>
+        </p:nvSpPr>
+        <p:spPr>
+          <a:xfrm>
+            <a:off x="434876" y="1266974"/>
+            <a:ext cx="0" cy="842962"/>
+          </a:xfrm>
+          <a:prstGeom prst="line">
+            <a:avLst/>
+          </a:prstGeom>
+          <a:noFill/>
+          <a:ln w="57150">
+            <a:solidFill>
+              <a:srgbClr val="FE4447"/>
+            </a:solidFill>
+            <a:prstDash val="solid"/>
+          </a:ln>
+        </p:spPr>
+      </p:sp>
+      <p:sp>
+        <p:nvSpPr>
+          <p:cNvPr id="7" name="Text 5"/>
+          <p:cNvSpPr/>
+          <p:nvPr/>
+        </p:nvSpPr>
+        <p:spPr>
+          <a:xfrm>
+            <a:off x="692051" y="1457474"/>
+            <a:ext cx="7973389" cy="461963"/>
           </a:xfrm>
           <a:prstGeom prst="rect">
             <a:avLst/>
@@ -2418,75 +2924,9 @@
           <a:bodyPr wrap="square" lIns="0" tIns="0" rIns="0" bIns="0" rtlCol="0" anchor="t"/>
           <a:lstStyle/>
           <a:p>
-            <a:pPr algn="l" marL="342900" indent="-342900">
-              <a:lnSpc>
-                <a:spcPts val="1620"/>
-              </a:lnSpc>
-              <a:spcAft>
-                <a:spcPts val="300"/>
-              </a:spcAft>
-              <a:buSzPct val="100000"/>
-              <a:buChar char="•"/>
-            </a:pPr>
-            <a:r>
-              <a:rPr lang="en-US" sz="1200" b="1" dirty="0">
-                <a:solidFill>
-                  <a:srgbClr val="1C2833"/>
-                </a:solidFill>
-                <a:latin typeface="Arial" pitchFamily="34" charset="0"/>
-                <a:ea typeface="Arial" pitchFamily="34" charset="-122"/>
-                <a:cs typeface="Arial" pitchFamily="34" charset="-120"/>
-              </a:rPr>
-              <a:t>Do NOT collect or grade</a:t>
-            </a:r>
-            <a:pPr algn="l" indent="0" marL="0">
-              <a:lnSpc>
-                <a:spcPts val="1620"/>
-              </a:lnSpc>
-              <a:spcAft>
-                <a:spcPts val="300"/>
-              </a:spcAft>
-              <a:buNone/>
-            </a:pPr>
-            <a:r>
-              <a:rPr lang="en-US" sz="1200" dirty="0">
-                <a:solidFill>
-                  <a:srgbClr val="1C2833"/>
-                </a:solidFill>
-                <a:latin typeface="Arial" pitchFamily="34" charset="0"/>
-                <a:ea typeface="Arial" pitchFamily="34" charset="-122"/>
-                <a:cs typeface="Arial" pitchFamily="34" charset="-120"/>
-              </a:rPr>
-              <a:t> the worksheets. They stay in the student's notebook, private.</a:t>
-            </a:r>
-            <a:endParaRPr lang="en-US" sz="1200" dirty="0"/>
-          </a:p>
-        </p:txBody>
-      </p:sp>
-      <p:sp>
-        <p:nvSpPr>
-          <p:cNvPr id="6" name="Text 4"/>
-          <p:cNvSpPr/>
-          <p:nvPr/>
-        </p:nvSpPr>
-        <p:spPr>
-          <a:xfrm>
-            <a:off x="406301" y="1970336"/>
-            <a:ext cx="8498026" cy="213271"/>
-          </a:xfrm>
-          <a:prstGeom prst="rect">
-            <a:avLst/>
-          </a:prstGeom>
-          <a:noFill/>
-          <a:ln/>
-        </p:spPr>
-        <p:txBody>
-          <a:bodyPr wrap="square" lIns="0" tIns="0" rIns="0" bIns="0" rtlCol="0" anchor="t"/>
-          <a:lstStyle/>
-          <a:p>
-            <a:pPr algn="l" indent="0" marL="0">
-              <a:lnSpc>
-                <a:spcPts val="1680"/>
+            <a:pPr algn="l" indent="0" marL="0">
+              <a:lnSpc>
+                <a:spcPts val="1820"/>
               </a:lnSpc>
               <a:spcBef>
                 <a:spcPts val="300"/>
@@ -2497,69 +2937,23 @@
               <a:buNone/>
             </a:pPr>
             <a:r>
-              <a:rPr lang="en-US" sz="1200" dirty="0">
-                <a:solidFill>
-                  <a:srgbClr val="1C2833"/>
-                </a:solidFill>
-                <a:latin typeface="Arial" pitchFamily="34" charset="0"/>
-                <a:ea typeface="Arial" pitchFamily="34" charset="-122"/>
-                <a:cs typeface="Arial" pitchFamily="34" charset="-120"/>
-              </a:rPr>
-              <a:t>– The formative quiz is on the </a:t>
-            </a:r>
-            <a:pPr algn="l" indent="0" marL="0">
-              <a:lnSpc>
-                <a:spcPts val="1680"/>
-              </a:lnSpc>
-              <a:spcBef>
-                <a:spcPts val="300"/>
-              </a:spcBef>
-              <a:spcAft>
-                <a:spcPts val="300"/>
-              </a:spcAft>
-              <a:buNone/>
-            </a:pPr>
-            <a:r>
-              <a:rPr lang="en-US" sz="1200" i="1" dirty="0">
-                <a:solidFill>
-                  <a:srgbClr val="1C2833"/>
-                </a:solidFill>
-                <a:latin typeface="Arial" pitchFamily="34" charset="0"/>
-                <a:ea typeface="Arial" pitchFamily="34" charset="-122"/>
-                <a:cs typeface="Arial" pitchFamily="34" charset="-120"/>
-              </a:rPr>
-              <a:t>framework concepts</a:t>
-            </a:r>
-            <a:pPr algn="l" indent="0" marL="0">
-              <a:lnSpc>
-                <a:spcPts val="1680"/>
-              </a:lnSpc>
-              <a:spcBef>
-                <a:spcPts val="300"/>
-              </a:spcBef>
-              <a:spcAft>
-                <a:spcPts val="300"/>
-              </a:spcAft>
-              <a:buNone/>
-            </a:pPr>
-            <a:r>
-              <a:rPr lang="en-US" sz="1200" dirty="0">
-                <a:solidFill>
-                  <a:srgbClr val="1C2833"/>
-                </a:solidFill>
-                <a:latin typeface="Arial" pitchFamily="34" charset="0"/>
-                <a:ea typeface="Arial" pitchFamily="34" charset="-122"/>
-                <a:cs typeface="Arial" pitchFamily="34" charset="-120"/>
-              </a:rPr>
-              <a:t> — not on the worksheet's content.</a:t>
-            </a:r>
-            <a:endParaRPr lang="en-US" sz="1200" dirty="0"/>
-          </a:p>
-        </p:txBody>
-      </p:sp>
-      <p:sp>
-        <p:nvSpPr>
-          <p:cNvPr id="7" name="Text 5"/>
+              <a:rPr lang="en-US" sz="1300" b="1" i="1" dirty="0">
+                <a:solidFill>
+                  <a:srgbClr val="1C2833"/>
+                </a:solidFill>
+                <a:latin typeface="Georgia" pitchFamily="34" charset="0"/>
+                <a:ea typeface="Georgia" pitchFamily="34" charset="-122"/>
+                <a:cs typeface="Georgia" pitchFamily="34" charset="-120"/>
+              </a:rPr>
+              <a:t>This worksheet is for noticing, not diagnosis. I am not "a Vāta" or "a Pitta." I have tendencies. If I have a medical concern, I will see a doctor — not my notebook.</a:t>
+            </a:r>
+            <a:endParaRPr lang="en-US" sz="1300" dirty="0"/>
+          </a:p>
+        </p:txBody>
+      </p:sp>
+      <p:sp>
+        <p:nvSpPr>
+          <p:cNvPr id="8" name="Text 6"/>
           <p:cNvSpPr/>
           <p:nvPr/>
         </p:nvSpPr>
@@ -2709,7 +3103,7 @@
                 <a:ea typeface="Georgia" pitchFamily="34" charset="-122"/>
                 <a:cs typeface="Georgia" pitchFamily="34" charset="-120"/>
               </a:rPr>
-              <a:t>Citation(s) used in this lesson</a:t>
+              <a:t>Activity (20 min) — Self-observation worksheet</a:t>
             </a:r>
             <a:endParaRPr lang="en-US" sz="1800" dirty="0"/>
           </a:p>
@@ -2724,7 +3118,7 @@
         <p:spPr>
           <a:xfrm>
             <a:off x="406301" y="870942"/>
-            <a:ext cx="8498026" cy="426541"/>
+            <a:ext cx="8498026" cy="213271"/>
           </a:xfrm>
           <a:prstGeom prst="rect">
             <a:avLst/>
@@ -2757,7 +3151,7 @@
                 <a:ea typeface="Arial" pitchFamily="34" charset="-122"/>
                 <a:cs typeface="Arial" pitchFamily="34" charset="-120"/>
               </a:rPr>
-              <a:t>– Caraka Saṁhitā, </a:t>
+              <a:t>Hand out the worksheet (template below). Students fill it in privately. They are </a:t>
             </a:r>
             <a:pPr algn="l" indent="0" marL="0">
               <a:lnSpc>
@@ -2772,6 +3166,326 @@
               <a:buNone/>
             </a:pPr>
             <a:r>
+              <a:rPr lang="en-US" sz="1200" b="1" dirty="0">
+                <a:solidFill>
+                  <a:srgbClr val="1C2833"/>
+                </a:solidFill>
+                <a:latin typeface="Arial" pitchFamily="34" charset="0"/>
+                <a:ea typeface="Arial" pitchFamily="34" charset="-122"/>
+                <a:cs typeface="Arial" pitchFamily="34" charset="-120"/>
+              </a:rPr>
+              <a:t>not</a:t>
+            </a:r>
+            <a:pPr algn="l" indent="0" marL="0">
+              <a:lnSpc>
+                <a:spcPts val="1680"/>
+              </a:lnSpc>
+              <a:spcBef>
+                <a:spcPts val="300"/>
+              </a:spcBef>
+              <a:spcAft>
+                <a:spcPts val="300"/>
+              </a:spcAft>
+              <a:buNone/>
+            </a:pPr>
+            <a:r>
+              <a:rPr lang="en-US" sz="1200" dirty="0">
+                <a:solidFill>
+                  <a:srgbClr val="1C2833"/>
+                </a:solidFill>
+                <a:latin typeface="Arial" pitchFamily="34" charset="0"/>
+                <a:ea typeface="Arial" pitchFamily="34" charset="-122"/>
+                <a:cs typeface="Arial" pitchFamily="34" charset="-120"/>
+              </a:rPr>
+              <a:t> asked to share the results.</a:t>
+            </a:r>
+            <a:endParaRPr lang="en-US" sz="1200" dirty="0"/>
+          </a:p>
+        </p:txBody>
+      </p:sp>
+      <p:sp>
+        <p:nvSpPr>
+          <p:cNvPr id="5" name="Text 3"/>
+          <p:cNvSpPr/>
+          <p:nvPr/>
+        </p:nvSpPr>
+        <p:spPr>
+          <a:xfrm>
+            <a:off x="406301" y="1198513"/>
+            <a:ext cx="8498026" cy="209550"/>
+          </a:xfrm>
+          <a:prstGeom prst="rect">
+            <a:avLst/>
+          </a:prstGeom>
+          <a:noFill/>
+          <a:ln/>
+        </p:spPr>
+        <p:txBody>
+          <a:bodyPr wrap="square" lIns="0" tIns="0" rIns="0" bIns="0" rtlCol="0" anchor="t"/>
+          <a:lstStyle/>
+          <a:p>
+            <a:pPr algn="l" indent="0" marL="0">
+              <a:spcBef>
+                <a:spcPts val="600"/>
+              </a:spcBef>
+              <a:spcAft>
+                <a:spcPts val="400"/>
+              </a:spcAft>
+              <a:buNone/>
+            </a:pPr>
+            <a:r>
+              <a:rPr lang="en-US" sz="1400" b="1" dirty="0">
+                <a:solidFill>
+                  <a:srgbClr val="1C2833"/>
+                </a:solidFill>
+                <a:latin typeface="Arial" pitchFamily="34" charset="0"/>
+                <a:ea typeface="Arial" pitchFamily="34" charset="-122"/>
+                <a:cs typeface="Arial" pitchFamily="34" charset="-120"/>
+              </a:rPr>
+              <a:t>Worksheet</a:t>
+            </a:r>
+            <a:endParaRPr lang="en-US" sz="1400" dirty="0"/>
+          </a:p>
+        </p:txBody>
+      </p:sp>
+      <p:sp>
+        <p:nvSpPr>
+          <p:cNvPr id="6" name="Text 4"/>
+          <p:cNvSpPr/>
+          <p:nvPr/>
+        </p:nvSpPr>
+        <p:spPr>
+          <a:xfrm>
+            <a:off x="406301" y="4434929"/>
+            <a:ext cx="8498026" cy="213271"/>
+          </a:xfrm>
+          <a:prstGeom prst="rect">
+            <a:avLst/>
+          </a:prstGeom>
+          <a:noFill/>
+          <a:ln/>
+        </p:spPr>
+        <p:txBody>
+          <a:bodyPr wrap="square" lIns="0" tIns="0" rIns="0" bIns="0" rtlCol="0" anchor="t"/>
+          <a:lstStyle/>
+          <a:p>
+            <a:pPr algn="l" indent="0" marL="0">
+              <a:lnSpc>
+                <a:spcPts val="1680"/>
+              </a:lnSpc>
+              <a:spcBef>
+                <a:spcPts val="300"/>
+              </a:spcBef>
+              <a:spcAft>
+                <a:spcPts val="300"/>
+              </a:spcAft>
+              <a:buNone/>
+            </a:pPr>
+            <a:r>
+              <a:rPr lang="en-US" sz="1200" dirty="0">
+                <a:solidFill>
+                  <a:srgbClr val="1C2833"/>
+                </a:solidFill>
+                <a:latin typeface="Arial" pitchFamily="34" charset="0"/>
+                <a:ea typeface="Arial" pitchFamily="34" charset="-122"/>
+                <a:cs typeface="Arial" pitchFamily="34" charset="-120"/>
+              </a:rPr>
+              <a:t>Middle ·  · IKS Curriculum</a:t>
+            </a:r>
+            <a:endParaRPr lang="en-US" sz="1200" dirty="0"/>
+          </a:p>
+        </p:txBody>
+      </p:sp>
+    </p:spTree>
+  </p:cSld>
+  <p:clrMapOvr>
+    <a:masterClrMapping/>
+  </p:clrMapOvr>
+</p:sld>
+</file>
+
+<file path=ppt/slides/slide12.xml><?xml version="1.0" encoding="utf-8"?>
+<p:sld xmlns:a="http://schemas.openxmlformats.org/drawingml/2006/main" xmlns:r="http://schemas.openxmlformats.org/officeDocument/2006/relationships" xmlns:p="http://schemas.openxmlformats.org/presentationml/2006/main">
+  <p:cSld name="Slide 12">
+    <p:bg>
+      <p:bgPr>
+        <a:solidFill>
+          <a:srgbClr val="FFFFFF"/>
+        </a:solidFill>
+      </p:bgPr>
+    </p:bg>
+    <p:spTree>
+      <p:nvGrpSpPr>
+        <p:cNvPr id="1" name=""/>
+        <p:cNvGrpSpPr/>
+        <p:nvPr/>
+      </p:nvGrpSpPr>
+      <p:grpSpPr>
+        <a:xfrm>
+          <a:off x="0" y="0"/>
+          <a:ext cx="0" cy="0"/>
+          <a:chOff x="0" y="0"/>
+          <a:chExt cx="0" cy="0"/>
+        </a:xfrm>
+      </p:grpSpPr>
+      <p:sp>
+        <p:nvSpPr>
+          <p:cNvPr id="2" name="Text 0"/>
+          <p:cNvSpPr/>
+          <p:nvPr/>
+        </p:nvSpPr>
+        <p:spPr>
+          <a:xfrm>
+            <a:off x="0" y="0"/>
+            <a:ext cx="9144000" cy="101501"/>
+          </a:xfrm>
+          <a:prstGeom prst="rect">
+            <a:avLst/>
+          </a:prstGeom>
+          <a:solidFill>
+            <a:srgbClr val="277884"/>
+          </a:solidFill>
+          <a:ln/>
+        </p:spPr>
+        <p:txBody>
+          <a:bodyPr wrap="square" rtlCol="0" anchor="ctr"/>
+          <a:lstStyle/>
+          <a:p>
+            <a:pPr indent="0" marL="0">
+              <a:buNone/>
+            </a:pPr>
+            <a:endParaRPr lang="en-US" dirty="0"/>
+          </a:p>
+        </p:txBody>
+      </p:sp>
+      <p:sp>
+        <p:nvSpPr>
+          <p:cNvPr id="3" name="Text 1"/>
+          <p:cNvSpPr/>
+          <p:nvPr/>
+        </p:nvSpPr>
+        <p:spPr>
+          <a:xfrm>
+            <a:off x="406301" y="457051"/>
+            <a:ext cx="8498026" cy="274290"/>
+          </a:xfrm>
+          <a:prstGeom prst="rect">
+            <a:avLst/>
+          </a:prstGeom>
+          <a:noFill/>
+          <a:ln/>
+        </p:spPr>
+        <p:txBody>
+          <a:bodyPr wrap="square" lIns="0" tIns="0" rIns="0" bIns="0" rtlCol="0" anchor="t"/>
+          <a:lstStyle/>
+          <a:p>
+            <a:pPr algn="l" indent="0" marL="0">
+              <a:lnSpc>
+                <a:spcPts val="2160"/>
+              </a:lnSpc>
+              <a:spcBef>
+                <a:spcPts val="600"/>
+              </a:spcBef>
+              <a:spcAft>
+                <a:spcPts val="800"/>
+              </a:spcAft>
+              <a:buNone/>
+            </a:pPr>
+            <a:r>
+              <a:rPr lang="en-US" sz="1800" b="1" dirty="0">
+                <a:solidFill>
+                  <a:srgbClr val="FE4447"/>
+                </a:solidFill>
+                <a:latin typeface="Georgia" pitchFamily="34" charset="0"/>
+                <a:ea typeface="Georgia" pitchFamily="34" charset="-122"/>
+                <a:cs typeface="Georgia" pitchFamily="34" charset="-120"/>
+              </a:rPr>
+              <a:t>Activity (20 min) — Self-observation worksheet (cont.)</a:t>
+            </a:r>
+            <a:endParaRPr lang="en-US" sz="1800" dirty="0"/>
+          </a:p>
+        </p:txBody>
+      </p:sp>
+      <p:sp>
+        <p:nvSpPr>
+          <p:cNvPr id="4" name="Text 2"/>
+          <p:cNvSpPr/>
+          <p:nvPr/>
+        </p:nvSpPr>
+        <p:spPr>
+          <a:xfrm>
+            <a:off x="406301" y="870942"/>
+            <a:ext cx="8498026" cy="213271"/>
+          </a:xfrm>
+          <a:prstGeom prst="rect">
+            <a:avLst/>
+          </a:prstGeom>
+          <a:noFill/>
+          <a:ln/>
+        </p:spPr>
+        <p:txBody>
+          <a:bodyPr wrap="square" lIns="0" tIns="0" rIns="0" bIns="0" rtlCol="0" anchor="t"/>
+          <a:lstStyle/>
+          <a:p>
+            <a:pPr algn="l" indent="0" marL="0">
+              <a:lnSpc>
+                <a:spcPts val="1680"/>
+              </a:lnSpc>
+              <a:spcBef>
+                <a:spcPts val="300"/>
+              </a:spcBef>
+              <a:spcAft>
+                <a:spcPts val="300"/>
+              </a:spcAft>
+              <a:buNone/>
+            </a:pPr>
+            <a:r>
+              <a:rPr lang="en-US" sz="1200" dirty="0">
+                <a:solidFill>
+                  <a:srgbClr val="1C2833"/>
+                </a:solidFill>
+                <a:latin typeface="Arial" pitchFamily="34" charset="0"/>
+                <a:ea typeface="Arial" pitchFamily="34" charset="-122"/>
+                <a:cs typeface="Arial" pitchFamily="34" charset="-120"/>
+              </a:rPr>
+              <a:t>After completion (10 min), discussion (10 min):</a:t>
+            </a:r>
+            <a:endParaRPr lang="en-US" sz="1200" dirty="0"/>
+          </a:p>
+        </p:txBody>
+      </p:sp>
+      <p:sp>
+        <p:nvSpPr>
+          <p:cNvPr id="5" name="Text 3"/>
+          <p:cNvSpPr/>
+          <p:nvPr/>
+        </p:nvSpPr>
+        <p:spPr>
+          <a:xfrm>
+            <a:off x="634901" y="1173063"/>
+            <a:ext cx="8102798" cy="975122"/>
+          </a:xfrm>
+          <a:prstGeom prst="rect">
+            <a:avLst/>
+          </a:prstGeom>
+          <a:noFill/>
+          <a:ln/>
+        </p:spPr>
+        <p:txBody>
+          <a:bodyPr wrap="square" lIns="0" tIns="0" rIns="0" bIns="0" rtlCol="0" anchor="t"/>
+          <a:lstStyle/>
+          <a:p>
+            <a:pPr algn="l" marL="342900" indent="-342900">
+              <a:lnSpc>
+                <a:spcPts val="1620"/>
+              </a:lnSpc>
+              <a:spcAft>
+                <a:spcPts val="300"/>
+              </a:spcAft>
+              <a:buSzPct val="100000"/>
+              <a:buChar char="•"/>
+            </a:pPr>
+            <a:r>
               <a:rPr lang="en-US" sz="1200" i="1" dirty="0">
                 <a:solidFill>
                   <a:srgbClr val="1C2833"/>
@@ -2780,15 +3494,2290 @@
                 <a:ea typeface="Arial" pitchFamily="34" charset="-122"/>
                 <a:cs typeface="Arial" pitchFamily="34" charset="-120"/>
               </a:rPr>
+              <a:t>"Show of hands — who came out roughly balanced across two of the three?"</a:t>
+            </a:r>
+            <a:pPr algn="l" indent="0" marL="0">
+              <a:lnSpc>
+                <a:spcPts val="1620"/>
+              </a:lnSpc>
+              <a:spcAft>
+                <a:spcPts val="300"/>
+              </a:spcAft>
+              <a:buNone/>
+            </a:pPr>
+            <a:r>
+              <a:rPr lang="en-US" sz="1200" dirty="0">
+                <a:solidFill>
+                  <a:srgbClr val="1C2833"/>
+                </a:solidFill>
+                <a:latin typeface="Arial" pitchFamily="34" charset="0"/>
+                <a:ea typeface="Arial" pitchFamily="34" charset="-122"/>
+                <a:cs typeface="Arial" pitchFamily="34" charset="-120"/>
+              </a:rPr>
+              <a:t> Most.</a:t>
+            </a:r>
+            <a:endParaRPr lang="en-US" sz="1200" dirty="0"/>
+          </a:p>
+          <a:p>
+            <a:pPr algn="l" marL="342900" indent="-342900">
+              <a:lnSpc>
+                <a:spcPts val="1620"/>
+              </a:lnSpc>
+              <a:spcAft>
+                <a:spcPts val="300"/>
+              </a:spcAft>
+              <a:buSzPct val="100000"/>
+              <a:buChar char="•"/>
+            </a:pPr>
+            <a:r>
+              <a:rPr lang="en-US" sz="1200" i="1" dirty="0">
+                <a:solidFill>
+                  <a:srgbClr val="1C2833"/>
+                </a:solidFill>
+                <a:latin typeface="Arial" pitchFamily="34" charset="0"/>
+                <a:ea typeface="Arial" pitchFamily="34" charset="-122"/>
+                <a:cs typeface="Arial" pitchFamily="34" charset="-120"/>
+              </a:rPr>
+              <a:t>"Who came out heavily one-sided?"</a:t>
+            </a:r>
+            <a:pPr algn="l" indent="0" marL="0">
+              <a:lnSpc>
+                <a:spcPts val="1620"/>
+              </a:lnSpc>
+              <a:spcAft>
+                <a:spcPts val="300"/>
+              </a:spcAft>
+              <a:buNone/>
+            </a:pPr>
+            <a:r>
+              <a:rPr lang="en-US" sz="1200" dirty="0">
+                <a:solidFill>
+                  <a:srgbClr val="1C2833"/>
+                </a:solidFill>
+                <a:latin typeface="Arial" pitchFamily="34" charset="0"/>
+                <a:ea typeface="Arial" pitchFamily="34" charset="-122"/>
+                <a:cs typeface="Arial" pitchFamily="34" charset="-120"/>
+              </a:rPr>
+              <a:t> Some.</a:t>
+            </a:r>
+            <a:endParaRPr lang="en-US" sz="1200" dirty="0"/>
+          </a:p>
+          <a:p>
+            <a:pPr algn="l" marL="342900" indent="-342900">
+              <a:lnSpc>
+                <a:spcPts val="1620"/>
+              </a:lnSpc>
+              <a:spcAft>
+                <a:spcPts val="300"/>
+              </a:spcAft>
+              <a:buSzPct val="100000"/>
+              <a:buChar char="•"/>
+            </a:pPr>
+            <a:r>
+              <a:rPr lang="en-US" sz="1200" i="1" dirty="0">
+                <a:solidFill>
+                  <a:srgbClr val="1C2833"/>
+                </a:solidFill>
+                <a:latin typeface="Arial" pitchFamily="34" charset="0"/>
+                <a:ea typeface="Arial" pitchFamily="34" charset="-122"/>
+                <a:cs typeface="Arial" pitchFamily="34" charset="-120"/>
+              </a:rPr>
+              <a:t>"Now the important question — does today's tendency match your usual? Or are you currently in a vikṛti state — recently slept poorly, eaten different food, exam stress?"</a:t>
+            </a:r>
+            <a:endParaRPr lang="en-US" sz="1200" dirty="0"/>
+          </a:p>
+        </p:txBody>
+      </p:sp>
+      <p:sp>
+        <p:nvSpPr>
+          <p:cNvPr id="6" name="Text 4"/>
+          <p:cNvSpPr/>
+          <p:nvPr/>
+        </p:nvSpPr>
+        <p:spPr>
+          <a:xfrm>
+            <a:off x="406301" y="4434929"/>
+            <a:ext cx="8498026" cy="213271"/>
+          </a:xfrm>
+          <a:prstGeom prst="rect">
+            <a:avLst/>
+          </a:prstGeom>
+          <a:noFill/>
+          <a:ln/>
+        </p:spPr>
+        <p:txBody>
+          <a:bodyPr wrap="square" lIns="0" tIns="0" rIns="0" bIns="0" rtlCol="0" anchor="t"/>
+          <a:lstStyle/>
+          <a:p>
+            <a:pPr algn="l" indent="0" marL="0">
+              <a:lnSpc>
+                <a:spcPts val="1680"/>
+              </a:lnSpc>
+              <a:spcBef>
+                <a:spcPts val="300"/>
+              </a:spcBef>
+              <a:spcAft>
+                <a:spcPts val="300"/>
+              </a:spcAft>
+              <a:buNone/>
+            </a:pPr>
+            <a:r>
+              <a:rPr lang="en-US" sz="1200" dirty="0">
+                <a:solidFill>
+                  <a:srgbClr val="1C2833"/>
+                </a:solidFill>
+                <a:latin typeface="Arial" pitchFamily="34" charset="0"/>
+                <a:ea typeface="Arial" pitchFamily="34" charset="-122"/>
+                <a:cs typeface="Arial" pitchFamily="34" charset="-120"/>
+              </a:rPr>
+              <a:t>Middle ·  · IKS Curriculum</a:t>
+            </a:r>
+            <a:endParaRPr lang="en-US" sz="1200" dirty="0"/>
+          </a:p>
+        </p:txBody>
+      </p:sp>
+    </p:spTree>
+  </p:cSld>
+  <p:clrMapOvr>
+    <a:masterClrMapping/>
+  </p:clrMapOvr>
+</p:sld>
+</file>
+
+<file path=ppt/slides/slide13.xml><?xml version="1.0" encoding="utf-8"?>
+<p:sld xmlns:a="http://schemas.openxmlformats.org/drawingml/2006/main" xmlns:r="http://schemas.openxmlformats.org/officeDocument/2006/relationships" xmlns:p="http://schemas.openxmlformats.org/presentationml/2006/main">
+  <p:cSld name="Slide 13">
+    <p:bg>
+      <p:bgPr>
+        <a:solidFill>
+          <a:srgbClr val="FFFFFF"/>
+        </a:solidFill>
+      </p:bgPr>
+    </p:bg>
+    <p:spTree>
+      <p:nvGrpSpPr>
+        <p:cNvPr id="1" name=""/>
+        <p:cNvGrpSpPr/>
+        <p:nvPr/>
+      </p:nvGrpSpPr>
+      <p:grpSpPr>
+        <a:xfrm>
+          <a:off x="0" y="0"/>
+          <a:ext cx="0" cy="0"/>
+          <a:chOff x="0" y="0"/>
+          <a:chExt cx="0" cy="0"/>
+        </a:xfrm>
+      </p:grpSpPr>
+      <p:sp>
+        <p:nvSpPr>
+          <p:cNvPr id="2" name="Text 0"/>
+          <p:cNvSpPr/>
+          <p:nvPr/>
+        </p:nvSpPr>
+        <p:spPr>
+          <a:xfrm>
+            <a:off x="0" y="0"/>
+            <a:ext cx="9144000" cy="101501"/>
+          </a:xfrm>
+          <a:prstGeom prst="rect">
+            <a:avLst/>
+          </a:prstGeom>
+          <a:solidFill>
+            <a:srgbClr val="277884"/>
+          </a:solidFill>
+          <a:ln/>
+        </p:spPr>
+        <p:txBody>
+          <a:bodyPr wrap="square" rtlCol="0" anchor="ctr"/>
+          <a:lstStyle/>
+          <a:p>
+            <a:pPr indent="0" marL="0">
+              <a:buNone/>
+            </a:pPr>
+            <a:endParaRPr lang="en-US" dirty="0"/>
+          </a:p>
+        </p:txBody>
+      </p:sp>
+      <p:sp>
+        <p:nvSpPr>
+          <p:cNvPr id="3" name="Text 1"/>
+          <p:cNvSpPr/>
+          <p:nvPr/>
+        </p:nvSpPr>
+        <p:spPr>
+          <a:xfrm>
+            <a:off x="406301" y="457051"/>
+            <a:ext cx="8498026" cy="274290"/>
+          </a:xfrm>
+          <a:prstGeom prst="rect">
+            <a:avLst/>
+          </a:prstGeom>
+          <a:noFill/>
+          <a:ln/>
+        </p:spPr>
+        <p:txBody>
+          <a:bodyPr wrap="square" lIns="0" tIns="0" rIns="0" bIns="0" rtlCol="0" anchor="t"/>
+          <a:lstStyle/>
+          <a:p>
+            <a:pPr algn="l" indent="0" marL="0">
+              <a:lnSpc>
+                <a:spcPts val="2160"/>
+              </a:lnSpc>
+              <a:spcBef>
+                <a:spcPts val="600"/>
+              </a:spcBef>
+              <a:spcAft>
+                <a:spcPts val="800"/>
+              </a:spcAft>
+              <a:buNone/>
+            </a:pPr>
+            <a:r>
+              <a:rPr lang="en-US" sz="1800" b="1" dirty="0">
+                <a:solidFill>
+                  <a:srgbClr val="FE4447"/>
+                </a:solidFill>
+                <a:latin typeface="Georgia" pitchFamily="34" charset="0"/>
+                <a:ea typeface="Georgia" pitchFamily="34" charset="-122"/>
+                <a:cs typeface="Georgia" pitchFamily="34" charset="-120"/>
+              </a:rPr>
+              <a:t>Wrap-up (5 min)</a:t>
+            </a:r>
+            <a:endParaRPr lang="en-US" sz="1800" dirty="0"/>
+          </a:p>
+        </p:txBody>
+      </p:sp>
+      <p:sp>
+        <p:nvSpPr>
+          <p:cNvPr id="4" name="Text 2"/>
+          <p:cNvSpPr/>
+          <p:nvPr/>
+        </p:nvSpPr>
+        <p:spPr>
+          <a:xfrm>
+            <a:off x="634901" y="883593"/>
+            <a:ext cx="8102798" cy="788491"/>
+          </a:xfrm>
+          <a:prstGeom prst="rect">
+            <a:avLst/>
+          </a:prstGeom>
+          <a:noFill/>
+          <a:ln/>
+        </p:spPr>
+        <p:txBody>
+          <a:bodyPr wrap="square" lIns="0" tIns="0" rIns="0" bIns="0" rtlCol="0" anchor="t"/>
+          <a:lstStyle/>
+          <a:p>
+            <a:pPr algn="l" marL="342900" indent="-342900">
+              <a:lnSpc>
+                <a:spcPts val="1620"/>
+              </a:lnSpc>
+              <a:spcAft>
+                <a:spcPts val="300"/>
+              </a:spcAft>
+              <a:buSzPct val="100000"/>
+              <a:buChar char="•"/>
+            </a:pPr>
+            <a:r>
+              <a:rPr lang="en-US" sz="1200" b="1" dirty="0">
+                <a:solidFill>
+                  <a:srgbClr val="1C2833"/>
+                </a:solidFill>
+                <a:latin typeface="Arial" pitchFamily="34" charset="0"/>
+                <a:ea typeface="Arial" pitchFamily="34" charset="-122"/>
+                <a:cs typeface="Arial" pitchFamily="34" charset="-120"/>
+              </a:rPr>
+              <a:t>Formative quiz on a slip of paper (5 questions, 3 min)</a:t>
+            </a:r>
+            <a:pPr algn="l" indent="0" marL="0">
+              <a:lnSpc>
+                <a:spcPts val="1620"/>
+              </a:lnSpc>
+              <a:spcAft>
+                <a:spcPts val="300"/>
+              </a:spcAft>
+              <a:buNone/>
+            </a:pPr>
+            <a:r>
+              <a:rPr lang="en-US" sz="1200" dirty="0">
+                <a:solidFill>
+                  <a:srgbClr val="1C2833"/>
+                </a:solidFill>
+                <a:latin typeface="Arial" pitchFamily="34" charset="0"/>
+                <a:ea typeface="Arial" pitchFamily="34" charset="-122"/>
+                <a:cs typeface="Arial" pitchFamily="34" charset="-120"/>
+              </a:rPr>
+              <a:t> — see </a:t>
+            </a:r>
+            <a:pPr algn="l" indent="0" marL="0">
+              <a:lnSpc>
+                <a:spcPts val="1620"/>
+              </a:lnSpc>
+              <a:spcAft>
+                <a:spcPts val="300"/>
+              </a:spcAft>
+              <a:buNone/>
+            </a:pPr>
+            <a:r>
+              <a:rPr lang="en-US" sz="1200" dirty="0">
+                <a:solidFill>
+                  <a:srgbClr val="1C2833"/>
+                </a:solidFill>
+                <a:latin typeface="Arial" pitchFamily="34" charset="0"/>
+                <a:ea typeface="Arial" pitchFamily="34" charset="-122"/>
+                <a:cs typeface="Arial" pitchFamily="34" charset="-120"/>
+              </a:rPr>
+              <a:t>quizzes/formative.md</a:t>
+            </a:r>
+            <a:pPr algn="l" indent="0" marL="0">
+              <a:lnSpc>
+                <a:spcPts val="1620"/>
+              </a:lnSpc>
+              <a:spcAft>
+                <a:spcPts val="300"/>
+              </a:spcAft>
+              <a:buNone/>
+            </a:pPr>
+            <a:r>
+              <a:rPr lang="en-US" sz="1200" dirty="0">
+                <a:solidFill>
+                  <a:srgbClr val="1C2833"/>
+                </a:solidFill>
+                <a:latin typeface="Arial" pitchFamily="34" charset="0"/>
+                <a:ea typeface="Arial" pitchFamily="34" charset="-122"/>
+                <a:cs typeface="Arial" pitchFamily="34" charset="-120"/>
+              </a:rPr>
+              <a:t> Part A.</a:t>
+            </a:r>
+            <a:endParaRPr lang="en-US" sz="1200" dirty="0"/>
+          </a:p>
+          <a:p>
+            <a:pPr algn="l" marL="342900" indent="-342900">
+              <a:lnSpc>
+                <a:spcPts val="1620"/>
+              </a:lnSpc>
+              <a:spcAft>
+                <a:spcPts val="300"/>
+              </a:spcAft>
+              <a:buSzPct val="100000"/>
+              <a:buChar char="•"/>
+            </a:pPr>
+            <a:r>
+              <a:rPr lang="en-US" sz="1200" dirty="0">
+                <a:solidFill>
+                  <a:srgbClr val="1C2833"/>
+                </a:solidFill>
+                <a:latin typeface="Arial" pitchFamily="34" charset="0"/>
+                <a:ea typeface="Arial" pitchFamily="34" charset="-122"/>
+                <a:cs typeface="Arial" pitchFamily="34" charset="-120"/>
+              </a:rPr>
+              <a:t>Collect.</a:t>
+            </a:r>
+            <a:endParaRPr lang="en-US" sz="1200" dirty="0"/>
+          </a:p>
+          <a:p>
+            <a:pPr algn="l" marL="342900" indent="-342900">
+              <a:lnSpc>
+                <a:spcPts val="1620"/>
+              </a:lnSpc>
+              <a:spcAft>
+                <a:spcPts val="300"/>
+              </a:spcAft>
+              <a:buSzPct val="100000"/>
+              <a:buChar char="•"/>
+            </a:pPr>
+            <a:r>
+              <a:rPr lang="en-US" sz="1200" dirty="0">
+                <a:solidFill>
+                  <a:srgbClr val="1C2833"/>
+                </a:solidFill>
+                <a:latin typeface="Arial" pitchFamily="34" charset="0"/>
+                <a:ea typeface="Arial" pitchFamily="34" charset="-122"/>
+                <a:cs typeface="Arial" pitchFamily="34" charset="-120"/>
+              </a:rPr>
+              <a:t>Preview Day 4: </a:t>
+            </a:r>
+            <a:pPr algn="l" indent="0" marL="0">
+              <a:lnSpc>
+                <a:spcPts val="1620"/>
+              </a:lnSpc>
+              <a:spcAft>
+                <a:spcPts val="300"/>
+              </a:spcAft>
+              <a:buNone/>
+            </a:pPr>
+            <a:r>
+              <a:rPr lang="en-US" sz="1200" i="1" dirty="0">
+                <a:solidFill>
+                  <a:srgbClr val="1C2833"/>
+                </a:solidFill>
+                <a:latin typeface="Arial" pitchFamily="34" charset="0"/>
+                <a:ea typeface="Arial" pitchFamily="34" charset="-122"/>
+                <a:cs typeface="Arial" pitchFamily="34" charset="-120"/>
+              </a:rPr>
+              <a:t>"Tomorrow — sort 30 qualities into three buckets in a hands-on game."</a:t>
+            </a:r>
+            <a:endParaRPr lang="en-US" sz="1200" dirty="0"/>
+          </a:p>
+        </p:txBody>
+      </p:sp>
+      <p:sp>
+        <p:nvSpPr>
+          <p:cNvPr id="5" name="Text 3"/>
+          <p:cNvSpPr/>
+          <p:nvPr/>
+        </p:nvSpPr>
+        <p:spPr>
+          <a:xfrm>
+            <a:off x="406301" y="4434929"/>
+            <a:ext cx="8498026" cy="213271"/>
+          </a:xfrm>
+          <a:prstGeom prst="rect">
+            <a:avLst/>
+          </a:prstGeom>
+          <a:noFill/>
+          <a:ln/>
+        </p:spPr>
+        <p:txBody>
+          <a:bodyPr wrap="square" lIns="0" tIns="0" rIns="0" bIns="0" rtlCol="0" anchor="t"/>
+          <a:lstStyle/>
+          <a:p>
+            <a:pPr algn="l" indent="0" marL="0">
+              <a:lnSpc>
+                <a:spcPts val="1680"/>
+              </a:lnSpc>
+              <a:spcBef>
+                <a:spcPts val="300"/>
+              </a:spcBef>
+              <a:spcAft>
+                <a:spcPts val="300"/>
+              </a:spcAft>
+              <a:buNone/>
+            </a:pPr>
+            <a:r>
+              <a:rPr lang="en-US" sz="1200" dirty="0">
+                <a:solidFill>
+                  <a:srgbClr val="1C2833"/>
+                </a:solidFill>
+                <a:latin typeface="Arial" pitchFamily="34" charset="0"/>
+                <a:ea typeface="Arial" pitchFamily="34" charset="-122"/>
+                <a:cs typeface="Arial" pitchFamily="34" charset="-120"/>
+              </a:rPr>
+              <a:t>Middle ·  · IKS Curriculum</a:t>
+            </a:r>
+            <a:endParaRPr lang="en-US" sz="1200" dirty="0"/>
+          </a:p>
+        </p:txBody>
+      </p:sp>
+    </p:spTree>
+  </p:cSld>
+  <p:clrMapOvr>
+    <a:masterClrMapping/>
+  </p:clrMapOvr>
+</p:sld>
+</file>
+
+<file path=ppt/slides/slide14.xml><?xml version="1.0" encoding="utf-8"?>
+<p:sld xmlns:a="http://schemas.openxmlformats.org/drawingml/2006/main" xmlns:r="http://schemas.openxmlformats.org/officeDocument/2006/relationships" xmlns:p="http://schemas.openxmlformats.org/presentationml/2006/main">
+  <p:cSld name="Slide 14">
+    <p:bg>
+      <p:bgPr>
+        <a:solidFill>
+          <a:srgbClr val="FFFFFF"/>
+        </a:solidFill>
+      </p:bgPr>
+    </p:bg>
+    <p:spTree>
+      <p:nvGrpSpPr>
+        <p:cNvPr id="1" name=""/>
+        <p:cNvGrpSpPr/>
+        <p:nvPr/>
+      </p:nvGrpSpPr>
+      <p:grpSpPr>
+        <a:xfrm>
+          <a:off x="0" y="0"/>
+          <a:ext cx="0" cy="0"/>
+          <a:chOff x="0" y="0"/>
+          <a:chExt cx="0" cy="0"/>
+        </a:xfrm>
+      </p:grpSpPr>
+      <p:sp>
+        <p:nvSpPr>
+          <p:cNvPr id="2" name="Text 0"/>
+          <p:cNvSpPr/>
+          <p:nvPr/>
+        </p:nvSpPr>
+        <p:spPr>
+          <a:xfrm>
+            <a:off x="0" y="0"/>
+            <a:ext cx="9144000" cy="101501"/>
+          </a:xfrm>
+          <a:prstGeom prst="rect">
+            <a:avLst/>
+          </a:prstGeom>
+          <a:solidFill>
+            <a:srgbClr val="277884"/>
+          </a:solidFill>
+          <a:ln/>
+        </p:spPr>
+        <p:txBody>
+          <a:bodyPr wrap="square" rtlCol="0" anchor="ctr"/>
+          <a:lstStyle/>
+          <a:p>
+            <a:pPr indent="0" marL="0">
+              <a:buNone/>
+            </a:pPr>
+            <a:endParaRPr lang="en-US" dirty="0"/>
+          </a:p>
+        </p:txBody>
+      </p:sp>
+      <p:sp>
+        <p:nvSpPr>
+          <p:cNvPr id="3" name="Text 1"/>
+          <p:cNvSpPr/>
+          <p:nvPr/>
+        </p:nvSpPr>
+        <p:spPr>
+          <a:xfrm>
+            <a:off x="406301" y="457051"/>
+            <a:ext cx="8498026" cy="274290"/>
+          </a:xfrm>
+          <a:prstGeom prst="rect">
+            <a:avLst/>
+          </a:prstGeom>
+          <a:noFill/>
+          <a:ln/>
+        </p:spPr>
+        <p:txBody>
+          <a:bodyPr wrap="square" lIns="0" tIns="0" rIns="0" bIns="0" rtlCol="0" anchor="t"/>
+          <a:lstStyle/>
+          <a:p>
+            <a:pPr algn="l" indent="0" marL="0">
+              <a:lnSpc>
+                <a:spcPts val="2160"/>
+              </a:lnSpc>
+              <a:spcBef>
+                <a:spcPts val="600"/>
+              </a:spcBef>
+              <a:spcAft>
+                <a:spcPts val="800"/>
+              </a:spcAft>
+              <a:buNone/>
+            </a:pPr>
+            <a:r>
+              <a:rPr lang="en-US" sz="1800" b="1" dirty="0">
+                <a:solidFill>
+                  <a:srgbClr val="FE4447"/>
+                </a:solidFill>
+                <a:latin typeface="Georgia" pitchFamily="34" charset="0"/>
+                <a:ea typeface="Georgia" pitchFamily="34" charset="-122"/>
+                <a:cs typeface="Georgia" pitchFamily="34" charset="-120"/>
+              </a:rPr>
+              <a:t>Student-facing content</a:t>
+            </a:r>
+            <a:endParaRPr lang="en-US" sz="1800" dirty="0"/>
+          </a:p>
+        </p:txBody>
+      </p:sp>
+      <p:sp>
+        <p:nvSpPr>
+          <p:cNvPr id="4" name="Text 2"/>
+          <p:cNvSpPr/>
+          <p:nvPr/>
+        </p:nvSpPr>
+        <p:spPr>
+          <a:xfrm>
+            <a:off x="406301" y="883593"/>
+            <a:ext cx="8331398" cy="1919288"/>
+          </a:xfrm>
+          <a:prstGeom prst="rect">
+            <a:avLst/>
+          </a:prstGeom>
+          <a:solidFill>
+            <a:srgbClr val="F4F8F9"/>
+          </a:solidFill>
+          <a:ln/>
+        </p:spPr>
+        <p:txBody>
+          <a:bodyPr wrap="square" rtlCol="0" anchor="ctr"/>
+          <a:lstStyle/>
+          <a:p>
+            <a:pPr indent="0" marL="0">
+              <a:buNone/>
+            </a:pPr>
+            <a:endParaRPr lang="en-US" dirty="0"/>
+          </a:p>
+        </p:txBody>
+      </p:sp>
+      <p:sp>
+        <p:nvSpPr>
+          <p:cNvPr id="5" name="Shape 3"/>
+          <p:cNvSpPr/>
+          <p:nvPr/>
+        </p:nvSpPr>
+        <p:spPr>
+          <a:xfrm>
+            <a:off x="434876" y="883593"/>
+            <a:ext cx="0" cy="1919288"/>
+          </a:xfrm>
+          <a:prstGeom prst="line">
+            <a:avLst/>
+          </a:prstGeom>
+          <a:noFill/>
+          <a:ln w="57150">
+            <a:solidFill>
+              <a:srgbClr val="FE4447"/>
+            </a:solidFill>
+            <a:prstDash val="solid"/>
+          </a:ln>
+        </p:spPr>
+      </p:sp>
+      <p:sp>
+        <p:nvSpPr>
+          <p:cNvPr id="6" name="Text 4"/>
+          <p:cNvSpPr/>
+          <p:nvPr/>
+        </p:nvSpPr>
+        <p:spPr>
+          <a:xfrm>
+            <a:off x="692051" y="1074093"/>
+            <a:ext cx="7973389" cy="230981"/>
+          </a:xfrm>
+          <a:prstGeom prst="rect">
+            <a:avLst/>
+          </a:prstGeom>
+          <a:noFill/>
+          <a:ln/>
+        </p:spPr>
+        <p:txBody>
+          <a:bodyPr wrap="square" lIns="0" tIns="0" rIns="0" bIns="0" rtlCol="0" anchor="t"/>
+          <a:lstStyle/>
+          <a:p>
+            <a:pPr algn="l" indent="0" marL="0">
+              <a:lnSpc>
+                <a:spcPts val="1820"/>
+              </a:lnSpc>
+              <a:spcBef>
+                <a:spcPts val="300"/>
+              </a:spcBef>
+              <a:spcAft>
+                <a:spcPts val="300"/>
+              </a:spcAft>
+              <a:buNone/>
+            </a:pPr>
+            <a:r>
+              <a:rPr lang="en-US" sz="1300" b="1" i="1" dirty="0">
+                <a:solidFill>
+                  <a:srgbClr val="1C2833"/>
+                </a:solidFill>
+                <a:latin typeface="Georgia" pitchFamily="34" charset="0"/>
+                <a:ea typeface="Georgia" pitchFamily="34" charset="-122"/>
+                <a:cs typeface="Georgia" pitchFamily="34" charset="-120"/>
+              </a:rPr>
+              <a:t>Two important words:</a:t>
+            </a:r>
+            <a:endParaRPr lang="en-US" sz="1300" dirty="0"/>
+          </a:p>
+        </p:txBody>
+      </p:sp>
+      <p:sp>
+        <p:nvSpPr>
+          <p:cNvPr id="7" name="Text 5"/>
+          <p:cNvSpPr/>
+          <p:nvPr/>
+        </p:nvSpPr>
+        <p:spPr>
+          <a:xfrm>
+            <a:off x="692051" y="1343174"/>
+            <a:ext cx="7973389" cy="230981"/>
+          </a:xfrm>
+          <a:prstGeom prst="rect">
+            <a:avLst/>
+          </a:prstGeom>
+          <a:noFill/>
+          <a:ln/>
+        </p:spPr>
+        <p:txBody>
+          <a:bodyPr wrap="square" lIns="0" tIns="0" rIns="0" bIns="0" rtlCol="0" anchor="t"/>
+          <a:lstStyle/>
+          <a:p>
+            <a:pPr algn="l" indent="0" marL="0">
+              <a:lnSpc>
+                <a:spcPts val="1820"/>
+              </a:lnSpc>
+              <a:spcBef>
+                <a:spcPts val="300"/>
+              </a:spcBef>
+              <a:spcAft>
+                <a:spcPts val="300"/>
+              </a:spcAft>
+              <a:buNone/>
+            </a:pPr>
+            <a:r>
+              <a:rPr lang="en-US" sz="1300" b="1" i="1" dirty="0">
+                <a:solidFill>
+                  <a:srgbClr val="1C2833"/>
+                </a:solidFill>
+                <a:latin typeface="Georgia" pitchFamily="34" charset="0"/>
+                <a:ea typeface="Georgia" pitchFamily="34" charset="-122"/>
+                <a:cs typeface="Georgia" pitchFamily="34" charset="-120"/>
+              </a:rPr>
+              <a:t>prakṛti</a:t>
+            </a:r>
+            <a:pPr algn="l" indent="0" marL="0">
+              <a:lnSpc>
+                <a:spcPts val="1820"/>
+              </a:lnSpc>
+              <a:spcBef>
+                <a:spcPts val="300"/>
+              </a:spcBef>
+              <a:spcAft>
+                <a:spcPts val="300"/>
+              </a:spcAft>
+              <a:buNone/>
+            </a:pPr>
+            <a:r>
+              <a:rPr lang="en-US" sz="1300" dirty="0">
+                <a:solidFill>
+                  <a:srgbClr val="1C2833"/>
+                </a:solidFill>
+                <a:latin typeface="Georgia" pitchFamily="34" charset="0"/>
+                <a:ea typeface="Georgia" pitchFamily="34" charset="-122"/>
+                <a:cs typeface="Georgia" pitchFamily="34" charset="-120"/>
+              </a:rPr>
+              <a:t> = your baseline — the proportion of </a:t>
+            </a:r>
+            <a:pPr algn="l" indent="0" marL="0">
+              <a:lnSpc>
+                <a:spcPts val="1820"/>
+              </a:lnSpc>
+              <a:spcBef>
+                <a:spcPts val="300"/>
+              </a:spcBef>
+              <a:spcAft>
+                <a:spcPts val="300"/>
+              </a:spcAft>
+              <a:buNone/>
+            </a:pPr>
+            <a:r>
+              <a:rPr lang="en-US" sz="1300" i="1" dirty="0">
+                <a:solidFill>
+                  <a:srgbClr val="1C2833"/>
+                </a:solidFill>
+                <a:latin typeface="Georgia" pitchFamily="34" charset="0"/>
+                <a:ea typeface="Georgia" pitchFamily="34" charset="-122"/>
+                <a:cs typeface="Georgia" pitchFamily="34" charset="-120"/>
+              </a:rPr>
+              <a:t>vāta : pitta : kapha</a:t>
+            </a:r>
+            <a:pPr algn="l" indent="0" marL="0">
+              <a:lnSpc>
+                <a:spcPts val="1820"/>
+              </a:lnSpc>
+              <a:spcBef>
+                <a:spcPts val="300"/>
+              </a:spcBef>
+              <a:spcAft>
+                <a:spcPts val="300"/>
+              </a:spcAft>
+              <a:buNone/>
+            </a:pPr>
+            <a:r>
+              <a:rPr lang="en-US" sz="1300" dirty="0">
+                <a:solidFill>
+                  <a:srgbClr val="1C2833"/>
+                </a:solidFill>
+                <a:latin typeface="Georgia" pitchFamily="34" charset="0"/>
+                <a:ea typeface="Georgia" pitchFamily="34" charset="-122"/>
+                <a:cs typeface="Georgia" pitchFamily="34" charset="-120"/>
+              </a:rPr>
+              <a:t> you are born with.</a:t>
+            </a:r>
+            <a:endParaRPr lang="en-US" sz="1300" dirty="0"/>
+          </a:p>
+        </p:txBody>
+      </p:sp>
+      <p:sp>
+        <p:nvSpPr>
+          <p:cNvPr id="8" name="Text 6"/>
+          <p:cNvSpPr/>
+          <p:nvPr/>
+        </p:nvSpPr>
+        <p:spPr>
+          <a:xfrm>
+            <a:off x="692051" y="1612255"/>
+            <a:ext cx="7973389" cy="230981"/>
+          </a:xfrm>
+          <a:prstGeom prst="rect">
+            <a:avLst/>
+          </a:prstGeom>
+          <a:noFill/>
+          <a:ln/>
+        </p:spPr>
+        <p:txBody>
+          <a:bodyPr wrap="square" lIns="0" tIns="0" rIns="0" bIns="0" rtlCol="0" anchor="t"/>
+          <a:lstStyle/>
+          <a:p>
+            <a:pPr algn="l" indent="0" marL="0">
+              <a:lnSpc>
+                <a:spcPts val="1820"/>
+              </a:lnSpc>
+              <a:spcBef>
+                <a:spcPts val="300"/>
+              </a:spcBef>
+              <a:spcAft>
+                <a:spcPts val="300"/>
+              </a:spcAft>
+              <a:buNone/>
+            </a:pPr>
+            <a:r>
+              <a:rPr lang="en-US" sz="1300" b="1" i="1" dirty="0">
+                <a:solidFill>
+                  <a:srgbClr val="1C2833"/>
+                </a:solidFill>
+                <a:latin typeface="Georgia" pitchFamily="34" charset="0"/>
+                <a:ea typeface="Georgia" pitchFamily="34" charset="-122"/>
+                <a:cs typeface="Georgia" pitchFamily="34" charset="-120"/>
+              </a:rPr>
+              <a:t>vikṛti</a:t>
+            </a:r>
+            <a:pPr algn="l" indent="0" marL="0">
+              <a:lnSpc>
+                <a:spcPts val="1820"/>
+              </a:lnSpc>
+              <a:spcBef>
+                <a:spcPts val="300"/>
+              </a:spcBef>
+              <a:spcAft>
+                <a:spcPts val="300"/>
+              </a:spcAft>
+              <a:buNone/>
+            </a:pPr>
+            <a:r>
+              <a:rPr lang="en-US" sz="1300" dirty="0">
+                <a:solidFill>
+                  <a:srgbClr val="1C2833"/>
+                </a:solidFill>
+                <a:latin typeface="Georgia" pitchFamily="34" charset="0"/>
+                <a:ea typeface="Georgia" pitchFamily="34" charset="-122"/>
+                <a:cs typeface="Georgia" pitchFamily="34" charset="-120"/>
+              </a:rPr>
+              <a:t> = your current state — which can drift due to season, food, stress, sleep.</a:t>
+            </a:r>
+            <a:endParaRPr lang="en-US" sz="1300" dirty="0"/>
+          </a:p>
+        </p:txBody>
+      </p:sp>
+      <p:sp>
+        <p:nvSpPr>
+          <p:cNvPr id="9" name="Text 7"/>
+          <p:cNvSpPr/>
+          <p:nvPr/>
+        </p:nvSpPr>
+        <p:spPr>
+          <a:xfrm>
+            <a:off x="692051" y="1881336"/>
+            <a:ext cx="7973389" cy="461963"/>
+          </a:xfrm>
+          <a:prstGeom prst="rect">
+            <a:avLst/>
+          </a:prstGeom>
+          <a:noFill/>
+          <a:ln/>
+        </p:spPr>
+        <p:txBody>
+          <a:bodyPr wrap="square" lIns="0" tIns="0" rIns="0" bIns="0" rtlCol="0" anchor="t"/>
+          <a:lstStyle/>
+          <a:p>
+            <a:pPr algn="l" indent="0" marL="0">
+              <a:lnSpc>
+                <a:spcPts val="1820"/>
+              </a:lnSpc>
+              <a:spcBef>
+                <a:spcPts val="300"/>
+              </a:spcBef>
+              <a:spcAft>
+                <a:spcPts val="300"/>
+              </a:spcAft>
+              <a:buNone/>
+            </a:pPr>
+            <a:r>
+              <a:rPr lang="en-US" sz="1300" dirty="0">
+                <a:solidFill>
+                  <a:srgbClr val="1C2833"/>
+                </a:solidFill>
+                <a:latin typeface="Georgia" pitchFamily="34" charset="0"/>
+                <a:ea typeface="Georgia" pitchFamily="34" charset="-122"/>
+                <a:cs typeface="Georgia" pitchFamily="34" charset="-120"/>
+              </a:rPr>
+              <a:t>If you scored high on a column on the worksheet today, that's your </a:t>
+            </a:r>
+            <a:pPr algn="l" indent="0" marL="0">
+              <a:lnSpc>
+                <a:spcPts val="1820"/>
+              </a:lnSpc>
+              <a:spcBef>
+                <a:spcPts val="300"/>
+              </a:spcBef>
+              <a:spcAft>
+                <a:spcPts val="300"/>
+              </a:spcAft>
+              <a:buNone/>
+            </a:pPr>
+            <a:r>
+              <a:rPr lang="en-US" sz="1300" i="1" dirty="0">
+                <a:solidFill>
+                  <a:srgbClr val="1C2833"/>
+                </a:solidFill>
+                <a:latin typeface="Georgia" pitchFamily="34" charset="0"/>
+                <a:ea typeface="Georgia" pitchFamily="34" charset="-122"/>
+                <a:cs typeface="Georgia" pitchFamily="34" charset="-120"/>
+              </a:rPr>
+              <a:t>current tendency</a:t>
+            </a:r>
+            <a:pPr algn="l" indent="0" marL="0">
+              <a:lnSpc>
+                <a:spcPts val="1820"/>
+              </a:lnSpc>
+              <a:spcBef>
+                <a:spcPts val="300"/>
+              </a:spcBef>
+              <a:spcAft>
+                <a:spcPts val="300"/>
+              </a:spcAft>
+              <a:buNone/>
+            </a:pPr>
+            <a:r>
+              <a:rPr lang="en-US" sz="1300" dirty="0">
+                <a:solidFill>
+                  <a:srgbClr val="1C2833"/>
+                </a:solidFill>
+                <a:latin typeface="Georgia" pitchFamily="34" charset="0"/>
+                <a:ea typeface="Georgia" pitchFamily="34" charset="-122"/>
+                <a:cs typeface="Georgia" pitchFamily="34" charset="-120"/>
+              </a:rPr>
+              <a:t>. It may or may not be your </a:t>
+            </a:r>
+            <a:pPr algn="l" indent="0" marL="0">
+              <a:lnSpc>
+                <a:spcPts val="1820"/>
+              </a:lnSpc>
+              <a:spcBef>
+                <a:spcPts val="300"/>
+              </a:spcBef>
+              <a:spcAft>
+                <a:spcPts val="300"/>
+              </a:spcAft>
+              <a:buNone/>
+            </a:pPr>
+            <a:r>
+              <a:rPr lang="en-US" sz="1300" i="1" dirty="0">
+                <a:solidFill>
+                  <a:srgbClr val="1C2833"/>
+                </a:solidFill>
+                <a:latin typeface="Georgia" pitchFamily="34" charset="0"/>
+                <a:ea typeface="Georgia" pitchFamily="34" charset="-122"/>
+                <a:cs typeface="Georgia" pitchFamily="34" charset="-120"/>
+              </a:rPr>
+              <a:t>prakṛti</a:t>
+            </a:r>
+            <a:pPr algn="l" indent="0" marL="0">
+              <a:lnSpc>
+                <a:spcPts val="1820"/>
+              </a:lnSpc>
+              <a:spcBef>
+                <a:spcPts val="300"/>
+              </a:spcBef>
+              <a:spcAft>
+                <a:spcPts val="300"/>
+              </a:spcAft>
+              <a:buNone/>
+            </a:pPr>
+            <a:r>
+              <a:rPr lang="en-US" sz="1300" dirty="0">
+                <a:solidFill>
+                  <a:srgbClr val="1C2833"/>
+                </a:solidFill>
+                <a:latin typeface="Georgia" pitchFamily="34" charset="0"/>
+                <a:ea typeface="Georgia" pitchFamily="34" charset="-122"/>
+                <a:cs typeface="Georgia" pitchFamily="34" charset="-120"/>
+              </a:rPr>
+              <a:t>. People shift around. That's normal.</a:t>
+            </a:r>
+            <a:endParaRPr lang="en-US" sz="1300" dirty="0"/>
+          </a:p>
+        </p:txBody>
+      </p:sp>
+      <p:sp>
+        <p:nvSpPr>
+          <p:cNvPr id="10" name="Text 8"/>
+          <p:cNvSpPr/>
+          <p:nvPr/>
+        </p:nvSpPr>
+        <p:spPr>
+          <a:xfrm>
+            <a:off x="692051" y="2381399"/>
+            <a:ext cx="7973389" cy="230981"/>
+          </a:xfrm>
+          <a:prstGeom prst="rect">
+            <a:avLst/>
+          </a:prstGeom>
+          <a:noFill/>
+          <a:ln/>
+        </p:spPr>
+        <p:txBody>
+          <a:bodyPr wrap="square" lIns="0" tIns="0" rIns="0" bIns="0" rtlCol="0" anchor="t"/>
+          <a:lstStyle/>
+          <a:p>
+            <a:pPr algn="l" indent="0" marL="0">
+              <a:lnSpc>
+                <a:spcPts val="1820"/>
+              </a:lnSpc>
+              <a:spcBef>
+                <a:spcPts val="300"/>
+              </a:spcBef>
+              <a:spcAft>
+                <a:spcPts val="300"/>
+              </a:spcAft>
+              <a:buNone/>
+            </a:pPr>
+            <a:r>
+              <a:rPr lang="en-US" sz="1300" b="1" i="1" dirty="0">
+                <a:solidFill>
+                  <a:srgbClr val="1C2833"/>
+                </a:solidFill>
+                <a:latin typeface="Georgia" pitchFamily="34" charset="0"/>
+                <a:ea typeface="Georgia" pitchFamily="34" charset="-122"/>
+                <a:cs typeface="Georgia" pitchFamily="34" charset="-120"/>
+              </a:rPr>
+              <a:t>You are not a doṣa. You have a tendency.</a:t>
+            </a:r>
+            <a:pPr algn="l" indent="0" marL="0">
+              <a:lnSpc>
+                <a:spcPts val="1820"/>
+              </a:lnSpc>
+              <a:spcBef>
+                <a:spcPts val="300"/>
+              </a:spcBef>
+              <a:spcAft>
+                <a:spcPts val="300"/>
+              </a:spcAft>
+              <a:buNone/>
+            </a:pPr>
+            <a:r>
+              <a:rPr lang="en-US" sz="1300" dirty="0">
+                <a:solidFill>
+                  <a:srgbClr val="1C2833"/>
+                </a:solidFill>
+                <a:latin typeface="Georgia" pitchFamily="34" charset="0"/>
+                <a:ea typeface="Georgia" pitchFamily="34" charset="-122"/>
+                <a:cs typeface="Georgia" pitchFamily="34" charset="-120"/>
+              </a:rPr>
+              <a:t> The framework is a lens, not a label.</a:t>
+            </a:r>
+            <a:endParaRPr lang="en-US" sz="1300" dirty="0"/>
+          </a:p>
+        </p:txBody>
+      </p:sp>
+      <p:sp>
+        <p:nvSpPr>
+          <p:cNvPr id="11" name="Text 9"/>
+          <p:cNvSpPr/>
+          <p:nvPr/>
+        </p:nvSpPr>
+        <p:spPr>
+          <a:xfrm>
+            <a:off x="406301" y="4434929"/>
+            <a:ext cx="8498026" cy="213271"/>
+          </a:xfrm>
+          <a:prstGeom prst="rect">
+            <a:avLst/>
+          </a:prstGeom>
+          <a:noFill/>
+          <a:ln/>
+        </p:spPr>
+        <p:txBody>
+          <a:bodyPr wrap="square" lIns="0" tIns="0" rIns="0" bIns="0" rtlCol="0" anchor="t"/>
+          <a:lstStyle/>
+          <a:p>
+            <a:pPr algn="l" indent="0" marL="0">
+              <a:lnSpc>
+                <a:spcPts val="1680"/>
+              </a:lnSpc>
+              <a:spcBef>
+                <a:spcPts val="300"/>
+              </a:spcBef>
+              <a:spcAft>
+                <a:spcPts val="300"/>
+              </a:spcAft>
+              <a:buNone/>
+            </a:pPr>
+            <a:r>
+              <a:rPr lang="en-US" sz="1200" dirty="0">
+                <a:solidFill>
+                  <a:srgbClr val="1C2833"/>
+                </a:solidFill>
+                <a:latin typeface="Arial" pitchFamily="34" charset="0"/>
+                <a:ea typeface="Arial" pitchFamily="34" charset="-122"/>
+                <a:cs typeface="Arial" pitchFamily="34" charset="-120"/>
+              </a:rPr>
+              <a:t>Middle ·  · IKS Curriculum</a:t>
+            </a:r>
+            <a:endParaRPr lang="en-US" sz="1200" dirty="0"/>
+          </a:p>
+        </p:txBody>
+      </p:sp>
+    </p:spTree>
+  </p:cSld>
+  <p:clrMapOvr>
+    <a:masterClrMapping/>
+  </p:clrMapOvr>
+</p:sld>
+</file>
+
+<file path=ppt/slides/slide15.xml><?xml version="1.0" encoding="utf-8"?>
+<p:sld xmlns:a="http://schemas.openxmlformats.org/drawingml/2006/main" xmlns:r="http://schemas.openxmlformats.org/officeDocument/2006/relationships" xmlns:p="http://schemas.openxmlformats.org/presentationml/2006/main">
+  <p:cSld name="Slide 15">
+    <p:bg>
+      <p:bgPr>
+        <a:solidFill>
+          <a:srgbClr val="FFFFFF"/>
+        </a:solidFill>
+      </p:bgPr>
+    </p:bg>
+    <p:spTree>
+      <p:nvGrpSpPr>
+        <p:cNvPr id="1" name=""/>
+        <p:cNvGrpSpPr/>
+        <p:nvPr/>
+      </p:nvGrpSpPr>
+      <p:grpSpPr>
+        <a:xfrm>
+          <a:off x="0" y="0"/>
+          <a:ext cx="0" cy="0"/>
+          <a:chOff x="0" y="0"/>
+          <a:chExt cx="0" cy="0"/>
+        </a:xfrm>
+      </p:grpSpPr>
+      <p:sp>
+        <p:nvSpPr>
+          <p:cNvPr id="2" name="Text 0"/>
+          <p:cNvSpPr/>
+          <p:nvPr/>
+        </p:nvSpPr>
+        <p:spPr>
+          <a:xfrm>
+            <a:off x="0" y="0"/>
+            <a:ext cx="9144000" cy="101501"/>
+          </a:xfrm>
+          <a:prstGeom prst="rect">
+            <a:avLst/>
+          </a:prstGeom>
+          <a:solidFill>
+            <a:srgbClr val="277884"/>
+          </a:solidFill>
+          <a:ln/>
+        </p:spPr>
+        <p:txBody>
+          <a:bodyPr wrap="square" rtlCol="0" anchor="ctr"/>
+          <a:lstStyle/>
+          <a:p>
+            <a:pPr indent="0" marL="0">
+              <a:buNone/>
+            </a:pPr>
+            <a:endParaRPr lang="en-US" dirty="0"/>
+          </a:p>
+        </p:txBody>
+      </p:sp>
+      <p:sp>
+        <p:nvSpPr>
+          <p:cNvPr id="3" name="Text 1"/>
+          <p:cNvSpPr/>
+          <p:nvPr/>
+        </p:nvSpPr>
+        <p:spPr>
+          <a:xfrm>
+            <a:off x="406301" y="457051"/>
+            <a:ext cx="8498026" cy="274290"/>
+          </a:xfrm>
+          <a:prstGeom prst="rect">
+            <a:avLst/>
+          </a:prstGeom>
+          <a:noFill/>
+          <a:ln/>
+        </p:spPr>
+        <p:txBody>
+          <a:bodyPr wrap="square" lIns="0" tIns="0" rIns="0" bIns="0" rtlCol="0" anchor="t"/>
+          <a:lstStyle/>
+          <a:p>
+            <a:pPr algn="l" indent="0" marL="0">
+              <a:lnSpc>
+                <a:spcPts val="2160"/>
+              </a:lnSpc>
+              <a:spcBef>
+                <a:spcPts val="600"/>
+              </a:spcBef>
+              <a:spcAft>
+                <a:spcPts val="800"/>
+              </a:spcAft>
+              <a:buNone/>
+            </a:pPr>
+            <a:r>
+              <a:rPr lang="en-US" sz="1800" b="1" dirty="0">
+                <a:solidFill>
+                  <a:srgbClr val="FE4447"/>
+                </a:solidFill>
+                <a:latin typeface="Georgia" pitchFamily="34" charset="0"/>
+                <a:ea typeface="Georgia" pitchFamily="34" charset="-122"/>
+                <a:cs typeface="Georgia" pitchFamily="34" charset="-120"/>
+              </a:rPr>
+              <a:t>Homework</a:t>
+            </a:r>
+            <a:endParaRPr lang="en-US" sz="1800" dirty="0"/>
+          </a:p>
+        </p:txBody>
+      </p:sp>
+      <p:sp>
+        <p:nvSpPr>
+          <p:cNvPr id="4" name="Text 2"/>
+          <p:cNvSpPr/>
+          <p:nvPr/>
+        </p:nvSpPr>
+        <p:spPr>
+          <a:xfrm>
+            <a:off x="634901" y="883593"/>
+            <a:ext cx="8102798" cy="487561"/>
+          </a:xfrm>
+          <a:prstGeom prst="rect">
+            <a:avLst/>
+          </a:prstGeom>
+          <a:noFill/>
+          <a:ln/>
+        </p:spPr>
+        <p:txBody>
+          <a:bodyPr wrap="square" lIns="0" tIns="0" rIns="0" bIns="0" rtlCol="0" anchor="t"/>
+          <a:lstStyle/>
+          <a:p>
+            <a:pPr algn="l" marL="342900" indent="-342900">
+              <a:lnSpc>
+                <a:spcPts val="1620"/>
+              </a:lnSpc>
+              <a:spcAft>
+                <a:spcPts val="300"/>
+              </a:spcAft>
+              <a:buSzPct val="100000"/>
+              <a:buChar char="•"/>
+            </a:pPr>
+            <a:r>
+              <a:rPr lang="en-US" sz="1200" dirty="0">
+                <a:solidFill>
+                  <a:srgbClr val="1C2833"/>
+                </a:solidFill>
+                <a:latin typeface="Arial" pitchFamily="34" charset="0"/>
+                <a:ea typeface="Arial" pitchFamily="34" charset="-122"/>
+                <a:cs typeface="Arial" pitchFamily="34" charset="-120"/>
+              </a:rPr>
+              <a:t>Keep the worksheet in your notebook. Tonight, redo it in your head AS IF it were yesterday morning. Did your top column shift? Note in one line.</a:t>
+            </a:r>
+            <a:endParaRPr lang="en-US" sz="1200" dirty="0"/>
+          </a:p>
+        </p:txBody>
+      </p:sp>
+      <p:sp>
+        <p:nvSpPr>
+          <p:cNvPr id="5" name="Text 3"/>
+          <p:cNvSpPr/>
+          <p:nvPr/>
+        </p:nvSpPr>
+        <p:spPr>
+          <a:xfrm>
+            <a:off x="406301" y="4434929"/>
+            <a:ext cx="8498026" cy="213271"/>
+          </a:xfrm>
+          <a:prstGeom prst="rect">
+            <a:avLst/>
+          </a:prstGeom>
+          <a:noFill/>
+          <a:ln/>
+        </p:spPr>
+        <p:txBody>
+          <a:bodyPr wrap="square" lIns="0" tIns="0" rIns="0" bIns="0" rtlCol="0" anchor="t"/>
+          <a:lstStyle/>
+          <a:p>
+            <a:pPr algn="l" indent="0" marL="0">
+              <a:lnSpc>
+                <a:spcPts val="1680"/>
+              </a:lnSpc>
+              <a:spcBef>
+                <a:spcPts val="300"/>
+              </a:spcBef>
+              <a:spcAft>
+                <a:spcPts val="300"/>
+              </a:spcAft>
+              <a:buNone/>
+            </a:pPr>
+            <a:r>
+              <a:rPr lang="en-US" sz="1200" dirty="0">
+                <a:solidFill>
+                  <a:srgbClr val="1C2833"/>
+                </a:solidFill>
+                <a:latin typeface="Arial" pitchFamily="34" charset="0"/>
+                <a:ea typeface="Arial" pitchFamily="34" charset="-122"/>
+                <a:cs typeface="Arial" pitchFamily="34" charset="-120"/>
+              </a:rPr>
+              <a:t>Middle ·  · IKS Curriculum</a:t>
+            </a:r>
+            <a:endParaRPr lang="en-US" sz="1200" dirty="0"/>
+          </a:p>
+        </p:txBody>
+      </p:sp>
+    </p:spTree>
+  </p:cSld>
+  <p:clrMapOvr>
+    <a:masterClrMapping/>
+  </p:clrMapOvr>
+</p:sld>
+</file>
+
+<file path=ppt/slides/slide16.xml><?xml version="1.0" encoding="utf-8"?>
+<p:sld xmlns:a="http://schemas.openxmlformats.org/drawingml/2006/main" xmlns:r="http://schemas.openxmlformats.org/officeDocument/2006/relationships" xmlns:p="http://schemas.openxmlformats.org/presentationml/2006/main">
+  <p:cSld name="Slide 16">
+    <p:bg>
+      <p:bgPr>
+        <a:solidFill>
+          <a:srgbClr val="FFFFFF"/>
+        </a:solidFill>
+      </p:bgPr>
+    </p:bg>
+    <p:spTree>
+      <p:nvGrpSpPr>
+        <p:cNvPr id="1" name=""/>
+        <p:cNvGrpSpPr/>
+        <p:nvPr/>
+      </p:nvGrpSpPr>
+      <p:grpSpPr>
+        <a:xfrm>
+          <a:off x="0" y="0"/>
+          <a:ext cx="0" cy="0"/>
+          <a:chOff x="0" y="0"/>
+          <a:chExt cx="0" cy="0"/>
+        </a:xfrm>
+      </p:grpSpPr>
+      <p:sp>
+        <p:nvSpPr>
+          <p:cNvPr id="2" name="Text 0"/>
+          <p:cNvSpPr/>
+          <p:nvPr/>
+        </p:nvSpPr>
+        <p:spPr>
+          <a:xfrm>
+            <a:off x="0" y="0"/>
+            <a:ext cx="9144000" cy="101501"/>
+          </a:xfrm>
+          <a:prstGeom prst="rect">
+            <a:avLst/>
+          </a:prstGeom>
+          <a:solidFill>
+            <a:srgbClr val="277884"/>
+          </a:solidFill>
+          <a:ln/>
+        </p:spPr>
+        <p:txBody>
+          <a:bodyPr wrap="square" rtlCol="0" anchor="ctr"/>
+          <a:lstStyle/>
+          <a:p>
+            <a:pPr indent="0" marL="0">
+              <a:buNone/>
+            </a:pPr>
+            <a:endParaRPr lang="en-US" dirty="0"/>
+          </a:p>
+        </p:txBody>
+      </p:sp>
+      <p:sp>
+        <p:nvSpPr>
+          <p:cNvPr id="3" name="Text 1"/>
+          <p:cNvSpPr/>
+          <p:nvPr/>
+        </p:nvSpPr>
+        <p:spPr>
+          <a:xfrm>
+            <a:off x="406301" y="457051"/>
+            <a:ext cx="8498026" cy="274290"/>
+          </a:xfrm>
+          <a:prstGeom prst="rect">
+            <a:avLst/>
+          </a:prstGeom>
+          <a:noFill/>
+          <a:ln/>
+        </p:spPr>
+        <p:txBody>
+          <a:bodyPr wrap="square" lIns="0" tIns="0" rIns="0" bIns="0" rtlCol="0" anchor="t"/>
+          <a:lstStyle/>
+          <a:p>
+            <a:pPr algn="l" indent="0" marL="0">
+              <a:lnSpc>
+                <a:spcPts val="2160"/>
+              </a:lnSpc>
+              <a:spcBef>
+                <a:spcPts val="600"/>
+              </a:spcBef>
+              <a:spcAft>
+                <a:spcPts val="800"/>
+              </a:spcAft>
+              <a:buNone/>
+            </a:pPr>
+            <a:r>
+              <a:rPr lang="en-US" sz="1800" b="1" dirty="0">
+                <a:solidFill>
+                  <a:srgbClr val="FE4447"/>
+                </a:solidFill>
+                <a:latin typeface="Georgia" pitchFamily="34" charset="0"/>
+                <a:ea typeface="Georgia" pitchFamily="34" charset="-122"/>
+                <a:cs typeface="Georgia" pitchFamily="34" charset="-120"/>
+              </a:rPr>
+              <a:t>Differentiation</a:t>
+            </a:r>
+            <a:endParaRPr lang="en-US" sz="1800" dirty="0"/>
+          </a:p>
+        </p:txBody>
+      </p:sp>
+      <p:sp>
+        <p:nvSpPr>
+          <p:cNvPr id="4" name="Text 2"/>
+          <p:cNvSpPr/>
+          <p:nvPr/>
+        </p:nvSpPr>
+        <p:spPr>
+          <a:xfrm>
+            <a:off x="634901" y="883593"/>
+            <a:ext cx="8102798" cy="731341"/>
+          </a:xfrm>
+          <a:prstGeom prst="rect">
+            <a:avLst/>
+          </a:prstGeom>
+          <a:noFill/>
+          <a:ln/>
+        </p:spPr>
+        <p:txBody>
+          <a:bodyPr wrap="square" lIns="0" tIns="0" rIns="0" bIns="0" rtlCol="0" anchor="t"/>
+          <a:lstStyle/>
+          <a:p>
+            <a:pPr algn="l" marL="342900" indent="-342900">
+              <a:lnSpc>
+                <a:spcPts val="1620"/>
+              </a:lnSpc>
+              <a:spcAft>
+                <a:spcPts val="300"/>
+              </a:spcAft>
+              <a:buSzPct val="100000"/>
+              <a:buChar char="•"/>
+            </a:pPr>
+            <a:r>
+              <a:rPr lang="en-US" sz="1200" b="1" dirty="0">
+                <a:solidFill>
+                  <a:srgbClr val="1C2833"/>
+                </a:solidFill>
+                <a:latin typeface="Arial" pitchFamily="34" charset="0"/>
+                <a:ea typeface="Arial" pitchFamily="34" charset="-122"/>
+                <a:cs typeface="Arial" pitchFamily="34" charset="-120"/>
+              </a:rPr>
+              <a:t>One tier up:</a:t>
+            </a:r>
+            <a:pPr algn="l" indent="0" marL="0">
+              <a:lnSpc>
+                <a:spcPts val="1620"/>
+              </a:lnSpc>
+              <a:spcAft>
+                <a:spcPts val="300"/>
+              </a:spcAft>
+              <a:buNone/>
+            </a:pPr>
+            <a:r>
+              <a:rPr lang="en-US" sz="1200" dirty="0">
+                <a:solidFill>
+                  <a:srgbClr val="1C2833"/>
+                </a:solidFill>
+                <a:latin typeface="Arial" pitchFamily="34" charset="0"/>
+                <a:ea typeface="Arial" pitchFamily="34" charset="-122"/>
+                <a:cs typeface="Arial" pitchFamily="34" charset="-120"/>
+              </a:rPr>
+              <a:t> Try the worksheet from your most calm week of the year vs your most stressed week. Compare. What does that tell you about </a:t>
+            </a:r>
+            <a:pPr algn="l" indent="0" marL="0">
+              <a:lnSpc>
+                <a:spcPts val="1620"/>
+              </a:lnSpc>
+              <a:spcAft>
+                <a:spcPts val="300"/>
+              </a:spcAft>
+              <a:buNone/>
+            </a:pPr>
+            <a:r>
+              <a:rPr lang="en-US" sz="1200" i="1" dirty="0">
+                <a:solidFill>
+                  <a:srgbClr val="1C2833"/>
+                </a:solidFill>
+                <a:latin typeface="Arial" pitchFamily="34" charset="0"/>
+                <a:ea typeface="Arial" pitchFamily="34" charset="-122"/>
+                <a:cs typeface="Arial" pitchFamily="34" charset="-120"/>
+              </a:rPr>
+              <a:t>prakṛti</a:t>
+            </a:r>
+            <a:pPr algn="l" indent="0" marL="0">
+              <a:lnSpc>
+                <a:spcPts val="1620"/>
+              </a:lnSpc>
+              <a:spcAft>
+                <a:spcPts val="300"/>
+              </a:spcAft>
+              <a:buNone/>
+            </a:pPr>
+            <a:r>
+              <a:rPr lang="en-US" sz="1200" dirty="0">
+                <a:solidFill>
+                  <a:srgbClr val="1C2833"/>
+                </a:solidFill>
+                <a:latin typeface="Arial" pitchFamily="34" charset="0"/>
+                <a:ea typeface="Arial" pitchFamily="34" charset="-122"/>
+                <a:cs typeface="Arial" pitchFamily="34" charset="-120"/>
+              </a:rPr>
+              <a:t> vs </a:t>
+            </a:r>
+            <a:pPr algn="l" indent="0" marL="0">
+              <a:lnSpc>
+                <a:spcPts val="1620"/>
+              </a:lnSpc>
+              <a:spcAft>
+                <a:spcPts val="300"/>
+              </a:spcAft>
+              <a:buNone/>
+            </a:pPr>
+            <a:r>
+              <a:rPr lang="en-US" sz="1200" i="1" dirty="0">
+                <a:solidFill>
+                  <a:srgbClr val="1C2833"/>
+                </a:solidFill>
+                <a:latin typeface="Arial" pitchFamily="34" charset="0"/>
+                <a:ea typeface="Arial" pitchFamily="34" charset="-122"/>
+                <a:cs typeface="Arial" pitchFamily="34" charset="-120"/>
+              </a:rPr>
+              <a:t>vikṛti</a:t>
+            </a:r>
+            <a:pPr algn="l" indent="0" marL="0">
+              <a:lnSpc>
+                <a:spcPts val="1620"/>
+              </a:lnSpc>
+              <a:spcAft>
+                <a:spcPts val="300"/>
+              </a:spcAft>
+              <a:buNone/>
+            </a:pPr>
+            <a:r>
+              <a:rPr lang="en-US" sz="1200" dirty="0">
+                <a:solidFill>
+                  <a:srgbClr val="1C2833"/>
+                </a:solidFill>
+                <a:latin typeface="Arial" pitchFamily="34" charset="0"/>
+                <a:ea typeface="Arial" pitchFamily="34" charset="-122"/>
+                <a:cs typeface="Arial" pitchFamily="34" charset="-120"/>
+              </a:rPr>
+              <a:t>?</a:t>
+            </a:r>
+            <a:endParaRPr lang="en-US" sz="1200" dirty="0"/>
+          </a:p>
+          <a:p>
+            <a:pPr algn="l" marL="342900" indent="-342900">
+              <a:lnSpc>
+                <a:spcPts val="1620"/>
+              </a:lnSpc>
+              <a:spcAft>
+                <a:spcPts val="300"/>
+              </a:spcAft>
+              <a:buSzPct val="100000"/>
+              <a:buChar char="•"/>
+            </a:pPr>
+            <a:r>
+              <a:rPr lang="en-US" sz="1200" b="1" dirty="0">
+                <a:solidFill>
+                  <a:srgbClr val="1C2833"/>
+                </a:solidFill>
+                <a:latin typeface="Arial" pitchFamily="34" charset="0"/>
+                <a:ea typeface="Arial" pitchFamily="34" charset="-122"/>
+                <a:cs typeface="Arial" pitchFamily="34" charset="-120"/>
+              </a:rPr>
+              <a:t>One tier down:</a:t>
+            </a:r>
+            <a:pPr algn="l" indent="0" marL="0">
+              <a:lnSpc>
+                <a:spcPts val="1620"/>
+              </a:lnSpc>
+              <a:spcAft>
+                <a:spcPts val="300"/>
+              </a:spcAft>
+              <a:buNone/>
+            </a:pPr>
+            <a:r>
+              <a:rPr lang="en-US" sz="1200" dirty="0">
+                <a:solidFill>
+                  <a:srgbClr val="1C2833"/>
+                </a:solidFill>
+                <a:latin typeface="Arial" pitchFamily="34" charset="0"/>
+                <a:ea typeface="Arial" pitchFamily="34" charset="-122"/>
+                <a:cs typeface="Arial" pitchFamily="34" charset="-120"/>
+              </a:rPr>
+              <a:t> Just complete the worksheet. The </a:t>
+            </a:r>
+            <a:pPr algn="l" indent="0" marL="0">
+              <a:lnSpc>
+                <a:spcPts val="1620"/>
+              </a:lnSpc>
+              <a:spcAft>
+                <a:spcPts val="300"/>
+              </a:spcAft>
+              <a:buNone/>
+            </a:pPr>
+            <a:r>
+              <a:rPr lang="en-US" sz="1200" i="1" dirty="0">
+                <a:solidFill>
+                  <a:srgbClr val="1C2833"/>
+                </a:solidFill>
+                <a:latin typeface="Arial" pitchFamily="34" charset="0"/>
+                <a:ea typeface="Arial" pitchFamily="34" charset="-122"/>
+                <a:cs typeface="Arial" pitchFamily="34" charset="-120"/>
+              </a:rPr>
+              <a:t>prakṛti/vikṛti</a:t>
+            </a:r>
+            <a:pPr algn="l" indent="0" marL="0">
+              <a:lnSpc>
+                <a:spcPts val="1620"/>
+              </a:lnSpc>
+              <a:spcAft>
+                <a:spcPts val="300"/>
+              </a:spcAft>
+              <a:buNone/>
+            </a:pPr>
+            <a:r>
+              <a:rPr lang="en-US" sz="1200" dirty="0">
+                <a:solidFill>
+                  <a:srgbClr val="1C2833"/>
+                </a:solidFill>
+                <a:latin typeface="Arial" pitchFamily="34" charset="0"/>
+                <a:ea typeface="Arial" pitchFamily="34" charset="-122"/>
+                <a:cs typeface="Arial" pitchFamily="34" charset="-120"/>
+              </a:rPr>
+              <a:t> distinction can be revisited on Day 5.</a:t>
+            </a:r>
+            <a:endParaRPr lang="en-US" sz="1200" dirty="0"/>
+          </a:p>
+        </p:txBody>
+      </p:sp>
+      <p:sp>
+        <p:nvSpPr>
+          <p:cNvPr id="5" name="Text 3"/>
+          <p:cNvSpPr/>
+          <p:nvPr/>
+        </p:nvSpPr>
+        <p:spPr>
+          <a:xfrm>
+            <a:off x="406301" y="4434929"/>
+            <a:ext cx="8498026" cy="213271"/>
+          </a:xfrm>
+          <a:prstGeom prst="rect">
+            <a:avLst/>
+          </a:prstGeom>
+          <a:noFill/>
+          <a:ln/>
+        </p:spPr>
+        <p:txBody>
+          <a:bodyPr wrap="square" lIns="0" tIns="0" rIns="0" bIns="0" rtlCol="0" anchor="t"/>
+          <a:lstStyle/>
+          <a:p>
+            <a:pPr algn="l" indent="0" marL="0">
+              <a:lnSpc>
+                <a:spcPts val="1680"/>
+              </a:lnSpc>
+              <a:spcBef>
+                <a:spcPts val="300"/>
+              </a:spcBef>
+              <a:spcAft>
+                <a:spcPts val="300"/>
+              </a:spcAft>
+              <a:buNone/>
+            </a:pPr>
+            <a:r>
+              <a:rPr lang="en-US" sz="1200" dirty="0">
+                <a:solidFill>
+                  <a:srgbClr val="1C2833"/>
+                </a:solidFill>
+                <a:latin typeface="Arial" pitchFamily="34" charset="0"/>
+                <a:ea typeface="Arial" pitchFamily="34" charset="-122"/>
+                <a:cs typeface="Arial" pitchFamily="34" charset="-120"/>
+              </a:rPr>
+              <a:t>Middle ·  · IKS Curriculum</a:t>
+            </a:r>
+            <a:endParaRPr lang="en-US" sz="1200" dirty="0"/>
+          </a:p>
+        </p:txBody>
+      </p:sp>
+    </p:spTree>
+  </p:cSld>
+  <p:clrMapOvr>
+    <a:masterClrMapping/>
+  </p:clrMapOvr>
+</p:sld>
+</file>
+
+<file path=ppt/slides/slide17.xml><?xml version="1.0" encoding="utf-8"?>
+<p:sld xmlns:a="http://schemas.openxmlformats.org/drawingml/2006/main" xmlns:r="http://schemas.openxmlformats.org/officeDocument/2006/relationships" xmlns:p="http://schemas.openxmlformats.org/presentationml/2006/main">
+  <p:cSld name="Slide 17">
+    <p:bg>
+      <p:bgPr>
+        <a:solidFill>
+          <a:srgbClr val="FFFFFF"/>
+        </a:solidFill>
+      </p:bgPr>
+    </p:bg>
+    <p:spTree>
+      <p:nvGrpSpPr>
+        <p:cNvPr id="1" name=""/>
+        <p:cNvGrpSpPr/>
+        <p:nvPr/>
+      </p:nvGrpSpPr>
+      <p:grpSpPr>
+        <a:xfrm>
+          <a:off x="0" y="0"/>
+          <a:ext cx="0" cy="0"/>
+          <a:chOff x="0" y="0"/>
+          <a:chExt cx="0" cy="0"/>
+        </a:xfrm>
+      </p:grpSpPr>
+      <p:sp>
+        <p:nvSpPr>
+          <p:cNvPr id="2" name="Text 0"/>
+          <p:cNvSpPr/>
+          <p:nvPr/>
+        </p:nvSpPr>
+        <p:spPr>
+          <a:xfrm>
+            <a:off x="0" y="0"/>
+            <a:ext cx="9144000" cy="101501"/>
+          </a:xfrm>
+          <a:prstGeom prst="rect">
+            <a:avLst/>
+          </a:prstGeom>
+          <a:solidFill>
+            <a:srgbClr val="277884"/>
+          </a:solidFill>
+          <a:ln/>
+        </p:spPr>
+        <p:txBody>
+          <a:bodyPr wrap="square" rtlCol="0" anchor="ctr"/>
+          <a:lstStyle/>
+          <a:p>
+            <a:pPr indent="0" marL="0">
+              <a:buNone/>
+            </a:pPr>
+            <a:endParaRPr lang="en-US" dirty="0"/>
+          </a:p>
+        </p:txBody>
+      </p:sp>
+      <p:sp>
+        <p:nvSpPr>
+          <p:cNvPr id="3" name="Text 1"/>
+          <p:cNvSpPr/>
+          <p:nvPr/>
+        </p:nvSpPr>
+        <p:spPr>
+          <a:xfrm>
+            <a:off x="406301" y="457051"/>
+            <a:ext cx="8498026" cy="274290"/>
+          </a:xfrm>
+          <a:prstGeom prst="rect">
+            <a:avLst/>
+          </a:prstGeom>
+          <a:noFill/>
+          <a:ln/>
+        </p:spPr>
+        <p:txBody>
+          <a:bodyPr wrap="square" lIns="0" tIns="0" rIns="0" bIns="0" rtlCol="0" anchor="t"/>
+          <a:lstStyle/>
+          <a:p>
+            <a:pPr algn="l" indent="0" marL="0">
+              <a:lnSpc>
+                <a:spcPts val="2160"/>
+              </a:lnSpc>
+              <a:spcBef>
+                <a:spcPts val="600"/>
+              </a:spcBef>
+              <a:spcAft>
+                <a:spcPts val="800"/>
+              </a:spcAft>
+              <a:buNone/>
+            </a:pPr>
+            <a:r>
+              <a:rPr lang="en-US" sz="1800" b="1" dirty="0">
+                <a:solidFill>
+                  <a:srgbClr val="FE4447"/>
+                </a:solidFill>
+                <a:latin typeface="Georgia" pitchFamily="34" charset="0"/>
+                <a:ea typeface="Georgia" pitchFamily="34" charset="-122"/>
+                <a:cs typeface="Georgia" pitchFamily="34" charset="-120"/>
+              </a:rPr>
+              <a:t>Teacher notes</a:t>
+            </a:r>
+            <a:endParaRPr lang="en-US" sz="1800" dirty="0"/>
+          </a:p>
+        </p:txBody>
+      </p:sp>
+      <p:sp>
+        <p:nvSpPr>
+          <p:cNvPr id="4" name="Text 2"/>
+          <p:cNvSpPr/>
+          <p:nvPr/>
+        </p:nvSpPr>
+        <p:spPr>
+          <a:xfrm>
+            <a:off x="634901" y="883593"/>
+            <a:ext cx="8102798" cy="1500783"/>
+          </a:xfrm>
+          <a:prstGeom prst="rect">
+            <a:avLst/>
+          </a:prstGeom>
+          <a:noFill/>
+          <a:ln/>
+        </p:spPr>
+        <p:txBody>
+          <a:bodyPr wrap="square" lIns="0" tIns="0" rIns="0" bIns="0" rtlCol="0" anchor="t"/>
+          <a:lstStyle/>
+          <a:p>
+            <a:pPr algn="l" marL="342900" indent="-342900">
+              <a:lnSpc>
+                <a:spcPts val="1620"/>
+              </a:lnSpc>
+              <a:spcAft>
+                <a:spcPts val="300"/>
+              </a:spcAft>
+              <a:buSzPct val="100000"/>
+              <a:buChar char="•"/>
+            </a:pPr>
+            <a:r>
+              <a:rPr lang="en-US" sz="1200" dirty="0">
+                <a:solidFill>
+                  <a:srgbClr val="1C2833"/>
+                </a:solidFill>
+                <a:latin typeface="Arial" pitchFamily="34" charset="0"/>
+                <a:ea typeface="Arial" pitchFamily="34" charset="-122"/>
+                <a:cs typeface="Arial" pitchFamily="34" charset="-120"/>
+              </a:rPr>
+              <a:t>This is the most ethically sensitive day in the module. Watch for:</a:t>
+            </a:r>
+            <a:endParaRPr lang="en-US" sz="1200" dirty="0"/>
+          </a:p>
+          <a:p>
+            <a:pPr algn="l" marL="342900" indent="-342900">
+              <a:lnSpc>
+                <a:spcPts val="1620"/>
+              </a:lnSpc>
+              <a:spcAft>
+                <a:spcPts val="300"/>
+              </a:spcAft>
+              <a:buSzPct val="100000"/>
+              <a:buChar char="•"/>
+            </a:pPr>
+            <a:r>
+              <a:rPr lang="en-US" sz="1200" dirty="0">
+                <a:solidFill>
+                  <a:srgbClr val="1C2833"/>
+                </a:solidFill>
+                <a:latin typeface="Arial" pitchFamily="34" charset="0"/>
+                <a:ea typeface="Arial" pitchFamily="34" charset="-122"/>
+                <a:cs typeface="Arial" pitchFamily="34" charset="-120"/>
+              </a:rPr>
+              <a:t>Students writing "I am Vāta" or "I am stupid because Kapha is slow" — interrupt these gently.</a:t>
+            </a:r>
+            <a:endParaRPr lang="en-US" sz="1200" dirty="0"/>
+          </a:p>
+          <a:p>
+            <a:pPr algn="l" marL="342900" indent="-342900">
+              <a:lnSpc>
+                <a:spcPts val="1620"/>
+              </a:lnSpc>
+              <a:spcAft>
+                <a:spcPts val="300"/>
+              </a:spcAft>
+              <a:buSzPct val="100000"/>
+              <a:buChar char="•"/>
+            </a:pPr>
+            <a:r>
+              <a:rPr lang="en-US" sz="1200" dirty="0">
+                <a:solidFill>
+                  <a:srgbClr val="1C2833"/>
+                </a:solidFill>
+                <a:latin typeface="Arial" pitchFamily="34" charset="0"/>
+                <a:ea typeface="Arial" pitchFamily="34" charset="-122"/>
+                <a:cs typeface="Arial" pitchFamily="34" charset="-120"/>
+              </a:rPr>
+              <a:t>Students who score heavily on one column and seem distressed — pull aside privately.</a:t>
+            </a:r>
+            <a:endParaRPr lang="en-US" sz="1200" dirty="0"/>
+          </a:p>
+          <a:p>
+            <a:pPr algn="l" marL="342900" indent="-342900">
+              <a:lnSpc>
+                <a:spcPts val="1620"/>
+              </a:lnSpc>
+              <a:spcAft>
+                <a:spcPts val="300"/>
+              </a:spcAft>
+              <a:buSzPct val="100000"/>
+              <a:buChar char="•"/>
+            </a:pPr>
+            <a:r>
+              <a:rPr lang="en-US" sz="1200" dirty="0">
+                <a:solidFill>
+                  <a:srgbClr val="1C2833"/>
+                </a:solidFill>
+                <a:latin typeface="Arial" pitchFamily="34" charset="0"/>
+                <a:ea typeface="Arial" pitchFamily="34" charset="-122"/>
+                <a:cs typeface="Arial" pitchFamily="34" charset="-120"/>
+              </a:rPr>
+              <a:t>Students who refuse to complete the worksheet — accept, no questions asked.</a:t>
+            </a:r>
+            <a:endParaRPr lang="en-US" sz="1200" dirty="0"/>
+          </a:p>
+          <a:p>
+            <a:pPr algn="l" marL="342900" indent="-342900">
+              <a:lnSpc>
+                <a:spcPts val="1620"/>
+              </a:lnSpc>
+              <a:spcAft>
+                <a:spcPts val="300"/>
+              </a:spcAft>
+              <a:buSzPct val="100000"/>
+              <a:buChar char="•"/>
+            </a:pPr>
+            <a:r>
+              <a:rPr lang="en-US" sz="1200" b="1" dirty="0">
+                <a:solidFill>
+                  <a:srgbClr val="1C2833"/>
+                </a:solidFill>
+                <a:latin typeface="Arial" pitchFamily="34" charset="0"/>
+                <a:ea typeface="Arial" pitchFamily="34" charset="-122"/>
+                <a:cs typeface="Arial" pitchFamily="34" charset="-120"/>
+              </a:rPr>
+              <a:t>Do NOT collect or grade</a:t>
+            </a:r>
+            <a:pPr algn="l" indent="0" marL="0">
+              <a:lnSpc>
+                <a:spcPts val="1620"/>
+              </a:lnSpc>
+              <a:spcAft>
+                <a:spcPts val="300"/>
+              </a:spcAft>
+              <a:buNone/>
+            </a:pPr>
+            <a:r>
+              <a:rPr lang="en-US" sz="1200" dirty="0">
+                <a:solidFill>
+                  <a:srgbClr val="1C2833"/>
+                </a:solidFill>
+                <a:latin typeface="Arial" pitchFamily="34" charset="0"/>
+                <a:ea typeface="Arial" pitchFamily="34" charset="-122"/>
+                <a:cs typeface="Arial" pitchFamily="34" charset="-120"/>
+              </a:rPr>
+              <a:t> the worksheets. They stay in the student's notebook, private.</a:t>
+            </a:r>
+            <a:endParaRPr lang="en-US" sz="1200" dirty="0"/>
+          </a:p>
+          <a:p>
+            <a:pPr algn="l" marL="342900" indent="-342900">
+              <a:lnSpc>
+                <a:spcPts val="1620"/>
+              </a:lnSpc>
+              <a:spcAft>
+                <a:spcPts val="300"/>
+              </a:spcAft>
+              <a:buSzPct val="100000"/>
+              <a:buChar char="•"/>
+            </a:pPr>
+            <a:r>
+              <a:rPr lang="en-US" sz="1200" dirty="0">
+                <a:solidFill>
+                  <a:srgbClr val="1C2833"/>
+                </a:solidFill>
+                <a:latin typeface="Arial" pitchFamily="34" charset="0"/>
+                <a:ea typeface="Arial" pitchFamily="34" charset="-122"/>
+                <a:cs typeface="Arial" pitchFamily="34" charset="-120"/>
+              </a:rPr>
+              <a:t>The formative quiz is on the </a:t>
+            </a:r>
+            <a:pPr algn="l" indent="0" marL="0">
+              <a:lnSpc>
+                <a:spcPts val="1620"/>
+              </a:lnSpc>
+              <a:spcAft>
+                <a:spcPts val="300"/>
+              </a:spcAft>
+              <a:buNone/>
+            </a:pPr>
+            <a:r>
+              <a:rPr lang="en-US" sz="1200" i="1" dirty="0">
+                <a:solidFill>
+                  <a:srgbClr val="1C2833"/>
+                </a:solidFill>
+                <a:latin typeface="Arial" pitchFamily="34" charset="0"/>
+                <a:ea typeface="Arial" pitchFamily="34" charset="-122"/>
+                <a:cs typeface="Arial" pitchFamily="34" charset="-120"/>
+              </a:rPr>
+              <a:t>framework concepts</a:t>
+            </a:r>
+            <a:pPr algn="l" indent="0" marL="0">
+              <a:lnSpc>
+                <a:spcPts val="1620"/>
+              </a:lnSpc>
+              <a:spcAft>
+                <a:spcPts val="300"/>
+              </a:spcAft>
+              <a:buNone/>
+            </a:pPr>
+            <a:r>
+              <a:rPr lang="en-US" sz="1200" dirty="0">
+                <a:solidFill>
+                  <a:srgbClr val="1C2833"/>
+                </a:solidFill>
+                <a:latin typeface="Arial" pitchFamily="34" charset="0"/>
+                <a:ea typeface="Arial" pitchFamily="34" charset="-122"/>
+                <a:cs typeface="Arial" pitchFamily="34" charset="-120"/>
+              </a:rPr>
+              <a:t> — not on the worksheet's content.</a:t>
+            </a:r>
+            <a:endParaRPr lang="en-US" sz="1200" dirty="0"/>
+          </a:p>
+        </p:txBody>
+      </p:sp>
+      <p:sp>
+        <p:nvSpPr>
+          <p:cNvPr id="5" name="Text 3"/>
+          <p:cNvSpPr/>
+          <p:nvPr/>
+        </p:nvSpPr>
+        <p:spPr>
+          <a:xfrm>
+            <a:off x="406301" y="4434929"/>
+            <a:ext cx="8498026" cy="213271"/>
+          </a:xfrm>
+          <a:prstGeom prst="rect">
+            <a:avLst/>
+          </a:prstGeom>
+          <a:noFill/>
+          <a:ln/>
+        </p:spPr>
+        <p:txBody>
+          <a:bodyPr wrap="square" lIns="0" tIns="0" rIns="0" bIns="0" rtlCol="0" anchor="t"/>
+          <a:lstStyle/>
+          <a:p>
+            <a:pPr algn="l" indent="0" marL="0">
+              <a:lnSpc>
+                <a:spcPts val="1680"/>
+              </a:lnSpc>
+              <a:spcBef>
+                <a:spcPts val="300"/>
+              </a:spcBef>
+              <a:spcAft>
+                <a:spcPts val="300"/>
+              </a:spcAft>
+              <a:buNone/>
+            </a:pPr>
+            <a:r>
+              <a:rPr lang="en-US" sz="1200" dirty="0">
+                <a:solidFill>
+                  <a:srgbClr val="1C2833"/>
+                </a:solidFill>
+                <a:latin typeface="Arial" pitchFamily="34" charset="0"/>
+                <a:ea typeface="Arial" pitchFamily="34" charset="-122"/>
+                <a:cs typeface="Arial" pitchFamily="34" charset="-120"/>
+              </a:rPr>
+              <a:t>Middle ·  · IKS Curriculum</a:t>
+            </a:r>
+            <a:endParaRPr lang="en-US" sz="1200" dirty="0"/>
+          </a:p>
+        </p:txBody>
+      </p:sp>
+    </p:spTree>
+  </p:cSld>
+  <p:clrMapOvr>
+    <a:masterClrMapping/>
+  </p:clrMapOvr>
+</p:sld>
+</file>
+
+<file path=ppt/slides/slide18.xml><?xml version="1.0" encoding="utf-8"?>
+<p:sld xmlns:a="http://schemas.openxmlformats.org/drawingml/2006/main" xmlns:r="http://schemas.openxmlformats.org/officeDocument/2006/relationships" xmlns:p="http://schemas.openxmlformats.org/presentationml/2006/main">
+  <p:cSld name="Slide 18">
+    <p:bg>
+      <p:bgPr>
+        <a:solidFill>
+          <a:srgbClr val="FFFFFF"/>
+        </a:solidFill>
+      </p:bgPr>
+    </p:bg>
+    <p:spTree>
+      <p:nvGrpSpPr>
+        <p:cNvPr id="1" name=""/>
+        <p:cNvGrpSpPr/>
+        <p:nvPr/>
+      </p:nvGrpSpPr>
+      <p:grpSpPr>
+        <a:xfrm>
+          <a:off x="0" y="0"/>
+          <a:ext cx="0" cy="0"/>
+          <a:chOff x="0" y="0"/>
+          <a:chExt cx="0" cy="0"/>
+        </a:xfrm>
+      </p:grpSpPr>
+      <p:sp>
+        <p:nvSpPr>
+          <p:cNvPr id="2" name="Text 0"/>
+          <p:cNvSpPr/>
+          <p:nvPr/>
+        </p:nvSpPr>
+        <p:spPr>
+          <a:xfrm>
+            <a:off x="0" y="0"/>
+            <a:ext cx="9144000" cy="101501"/>
+          </a:xfrm>
+          <a:prstGeom prst="rect">
+            <a:avLst/>
+          </a:prstGeom>
+          <a:solidFill>
+            <a:srgbClr val="277884"/>
+          </a:solidFill>
+          <a:ln/>
+        </p:spPr>
+        <p:txBody>
+          <a:bodyPr wrap="square" rtlCol="0" anchor="ctr"/>
+          <a:lstStyle/>
+          <a:p>
+            <a:pPr indent="0" marL="0">
+              <a:buNone/>
+            </a:pPr>
+            <a:endParaRPr lang="en-US" dirty="0"/>
+          </a:p>
+        </p:txBody>
+      </p:sp>
+      <p:sp>
+        <p:nvSpPr>
+          <p:cNvPr id="3" name="Text 1"/>
+          <p:cNvSpPr/>
+          <p:nvPr/>
+        </p:nvSpPr>
+        <p:spPr>
+          <a:xfrm>
+            <a:off x="406301" y="457051"/>
+            <a:ext cx="8498026" cy="274290"/>
+          </a:xfrm>
+          <a:prstGeom prst="rect">
+            <a:avLst/>
+          </a:prstGeom>
+          <a:noFill/>
+          <a:ln/>
+        </p:spPr>
+        <p:txBody>
+          <a:bodyPr wrap="square" lIns="0" tIns="0" rIns="0" bIns="0" rtlCol="0" anchor="t"/>
+          <a:lstStyle/>
+          <a:p>
+            <a:pPr algn="l" indent="0" marL="0">
+              <a:lnSpc>
+                <a:spcPts val="2160"/>
+              </a:lnSpc>
+              <a:spcBef>
+                <a:spcPts val="600"/>
+              </a:spcBef>
+              <a:spcAft>
+                <a:spcPts val="800"/>
+              </a:spcAft>
+              <a:buNone/>
+            </a:pPr>
+            <a:r>
+              <a:rPr lang="en-US" sz="1800" b="1" dirty="0">
+                <a:solidFill>
+                  <a:srgbClr val="FE4447"/>
+                </a:solidFill>
+                <a:latin typeface="Georgia" pitchFamily="34" charset="0"/>
+                <a:ea typeface="Georgia" pitchFamily="34" charset="-122"/>
+                <a:cs typeface="Georgia" pitchFamily="34" charset="-120"/>
+              </a:rPr>
+              <a:t>Citation(s) used in this lesson</a:t>
+            </a:r>
+            <a:endParaRPr lang="en-US" sz="1800" dirty="0"/>
+          </a:p>
+        </p:txBody>
+      </p:sp>
+      <p:sp>
+        <p:nvSpPr>
+          <p:cNvPr id="4" name="Text 2"/>
+          <p:cNvSpPr/>
+          <p:nvPr/>
+        </p:nvSpPr>
+        <p:spPr>
+          <a:xfrm>
+            <a:off x="634901" y="883593"/>
+            <a:ext cx="8102798" cy="487561"/>
+          </a:xfrm>
+          <a:prstGeom prst="rect">
+            <a:avLst/>
+          </a:prstGeom>
+          <a:noFill/>
+          <a:ln/>
+        </p:spPr>
+        <p:txBody>
+          <a:bodyPr wrap="square" lIns="0" tIns="0" rIns="0" bIns="0" rtlCol="0" anchor="t"/>
+          <a:lstStyle/>
+          <a:p>
+            <a:pPr algn="l" marL="342900" indent="-342900">
+              <a:lnSpc>
+                <a:spcPts val="1620"/>
+              </a:lnSpc>
+              <a:spcAft>
+                <a:spcPts val="300"/>
+              </a:spcAft>
+              <a:buSzPct val="100000"/>
+              <a:buChar char="•"/>
+            </a:pPr>
+            <a:r>
+              <a:rPr lang="en-US" sz="1200" dirty="0">
+                <a:solidFill>
+                  <a:srgbClr val="1C2833"/>
+                </a:solidFill>
+                <a:latin typeface="Arial" pitchFamily="34" charset="0"/>
+                <a:ea typeface="Arial" pitchFamily="34" charset="-122"/>
+                <a:cs typeface="Arial" pitchFamily="34" charset="-120"/>
+              </a:rPr>
+              <a:t>Caraka Saṁhitā, </a:t>
+            </a:r>
+            <a:pPr algn="l" indent="0" marL="0">
+              <a:lnSpc>
+                <a:spcPts val="1620"/>
+              </a:lnSpc>
+              <a:spcAft>
+                <a:spcPts val="300"/>
+              </a:spcAft>
+              <a:buNone/>
+            </a:pPr>
+            <a:r>
+              <a:rPr lang="en-US" sz="1200" i="1" dirty="0">
+                <a:solidFill>
+                  <a:srgbClr val="1C2833"/>
+                </a:solidFill>
+                <a:latin typeface="Arial" pitchFamily="34" charset="0"/>
+                <a:ea typeface="Arial" pitchFamily="34" charset="-122"/>
+                <a:cs typeface="Arial" pitchFamily="34" charset="-120"/>
+              </a:rPr>
               <a:t>Vimānasthāna</a:t>
             </a:r>
             <a:pPr algn="l" indent="0" marL="0">
               <a:lnSpc>
-                <a:spcPts val="1680"/>
-              </a:lnSpc>
-              <a:spcBef>
-                <a:spcPts val="300"/>
-              </a:spcBef>
+                <a:spcPts val="1620"/>
+              </a:lnSpc>
               <a:spcAft>
                 <a:spcPts val="300"/>
               </a:spcAft>
@@ -2807,11 +5796,8 @@
             </a:r>
             <a:pPr algn="l" indent="0" marL="0">
               <a:lnSpc>
-                <a:spcPts val="1680"/>
-              </a:lnSpc>
-              <a:spcBef>
-                <a:spcPts val="300"/>
-              </a:spcBef>
+                <a:spcPts val="1620"/>
+              </a:lnSpc>
               <a:spcAft>
                 <a:spcPts val="300"/>
               </a:spcAft>
@@ -2830,11 +5816,8 @@
             </a:r>
             <a:pPr algn="l" indent="0" marL="0">
               <a:lnSpc>
-                <a:spcPts val="1680"/>
-              </a:lnSpc>
-              <a:spcBef>
-                <a:spcPts val="300"/>
-              </a:spcBef>
+                <a:spcPts val="1620"/>
+              </a:lnSpc>
               <a:spcAft>
                 <a:spcPts val="300"/>
               </a:spcAft>
@@ -3007,7 +5990,7 @@
                 <a:ea typeface="Georgia" pitchFamily="34" charset="-122"/>
                 <a:cs typeface="Georgia" pitchFamily="34" charset="-120"/>
               </a:rPr>
-              <a:t>Materials</a:t>
+              <a:t>Learning objective</a:t>
             </a:r>
             <a:endParaRPr lang="en-US" sz="1800" dirty="0"/>
           </a:p>
@@ -3055,7 +6038,99 @@
                 <a:ea typeface="Arial" pitchFamily="34" charset="-122"/>
                 <a:cs typeface="Arial" pitchFamily="34" charset="-120"/>
               </a:rPr>
-              <a:t>– Printed self-observation worksheet (one per student) – The Caraka safety paraphrase on a slide or the board – Sticky notes for the exit reflection</a:t>
+              <a:t>By the end of this lesson, students explain the distinction between </a:t>
+            </a:r>
+            <a:pPr algn="l" indent="0" marL="0">
+              <a:lnSpc>
+                <a:spcPts val="1680"/>
+              </a:lnSpc>
+              <a:spcBef>
+                <a:spcPts val="300"/>
+              </a:spcBef>
+              <a:spcAft>
+                <a:spcPts val="300"/>
+              </a:spcAft>
+              <a:buNone/>
+            </a:pPr>
+            <a:r>
+              <a:rPr lang="en-US" sz="1200" i="1" dirty="0">
+                <a:solidFill>
+                  <a:srgbClr val="1C2833"/>
+                </a:solidFill>
+                <a:latin typeface="Arial" pitchFamily="34" charset="0"/>
+                <a:ea typeface="Arial" pitchFamily="34" charset="-122"/>
+                <a:cs typeface="Arial" pitchFamily="34" charset="-120"/>
+              </a:rPr>
+              <a:t>prakṛti</a:t>
+            </a:r>
+            <a:pPr algn="l" indent="0" marL="0">
+              <a:lnSpc>
+                <a:spcPts val="1680"/>
+              </a:lnSpc>
+              <a:spcBef>
+                <a:spcPts val="300"/>
+              </a:spcBef>
+              <a:spcAft>
+                <a:spcPts val="300"/>
+              </a:spcAft>
+              <a:buNone/>
+            </a:pPr>
+            <a:r>
+              <a:rPr lang="en-US" sz="1200" dirty="0">
+                <a:solidFill>
+                  <a:srgbClr val="1C2833"/>
+                </a:solidFill>
+                <a:latin typeface="Arial" pitchFamily="34" charset="0"/>
+                <a:ea typeface="Arial" pitchFamily="34" charset="-122"/>
+                <a:cs typeface="Arial" pitchFamily="34" charset="-120"/>
+              </a:rPr>
+              <a:t> (constitutional baseline) and </a:t>
+            </a:r>
+            <a:pPr algn="l" indent="0" marL="0">
+              <a:lnSpc>
+                <a:spcPts val="1680"/>
+              </a:lnSpc>
+              <a:spcBef>
+                <a:spcPts val="300"/>
+              </a:spcBef>
+              <a:spcAft>
+                <a:spcPts val="300"/>
+              </a:spcAft>
+              <a:buNone/>
+            </a:pPr>
+            <a:r>
+              <a:rPr lang="en-US" sz="1200" i="1" dirty="0">
+                <a:solidFill>
+                  <a:srgbClr val="1C2833"/>
+                </a:solidFill>
+                <a:latin typeface="Arial" pitchFamily="34" charset="0"/>
+                <a:ea typeface="Arial" pitchFamily="34" charset="-122"/>
+                <a:cs typeface="Arial" pitchFamily="34" charset="-120"/>
+              </a:rPr>
+              <a:t>vikṛti</a:t>
+            </a:r>
+            <a:pPr algn="l" indent="0" marL="0">
+              <a:lnSpc>
+                <a:spcPts val="1680"/>
+              </a:lnSpc>
+              <a:spcBef>
+                <a:spcPts val="300"/>
+              </a:spcBef>
+              <a:spcAft>
+                <a:spcPts val="300"/>
+              </a:spcAft>
+              <a:buNone/>
+            </a:pPr>
+            <a:r>
+              <a:rPr lang="en-US" sz="1200" dirty="0">
+                <a:solidFill>
+                  <a:srgbClr val="1C2833"/>
+                </a:solidFill>
+                <a:latin typeface="Arial" pitchFamily="34" charset="0"/>
+                <a:ea typeface="Arial" pitchFamily="34" charset="-122"/>
+                <a:cs typeface="Arial" pitchFamily="34" charset="-120"/>
+              </a:rPr>
+              <a:t> (current state), complete a non-diagnostic self-observation worksheet, and articulate why the framework should be held lightly.</a:t>
             </a:r>
             <a:endParaRPr lang="en-US" sz="1200" dirty="0"/>
           </a:p>
@@ -3213,7 +6288,7 @@
                 <a:ea typeface="Georgia" pitchFamily="34" charset="-122"/>
                 <a:cs typeface="Georgia" pitchFamily="34" charset="-120"/>
               </a:rPr>
-              <a:t>Vocabulary introduced today</a:t>
+              <a:t>Materials</a:t>
             </a:r>
             <a:endParaRPr lang="en-US" sz="1800" dirty="0"/>
           </a:p>
@@ -3228,7 +6303,7 @@
         <p:spPr>
           <a:xfrm>
             <a:off x="634901" y="883593"/>
-            <a:ext cx="8102798" cy="937022"/>
+            <a:ext cx="8102798" cy="769441"/>
           </a:xfrm>
           <a:prstGeom prst="rect">
             <a:avLst/>
@@ -3251,26 +6326,6 @@
               <a:buChar char="•"/>
             </a:pPr>
             <a:r>
-              <a:rPr lang="en-US" sz="1200" i="1" dirty="0">
-                <a:solidFill>
-                  <a:srgbClr val="1C2833"/>
-                </a:solidFill>
-                <a:latin typeface="Arial" pitchFamily="34" charset="0"/>
-                <a:ea typeface="Arial" pitchFamily="34" charset="-122"/>
-                <a:cs typeface="Arial" pitchFamily="34" charset="-120"/>
-              </a:rPr>
-              <a:t>prakṛti</a:t>
-            </a:r>
-            <a:pPr algn="l" indent="0" marL="0">
-              <a:lnSpc>
-                <a:spcPts val="1620"/>
-              </a:lnSpc>
-              <a:spcAft>
-                <a:spcPts val="300"/>
-              </a:spcAft>
-              <a:buNone/>
-            </a:pPr>
-            <a:r>
               <a:rPr lang="en-US" sz="1200" dirty="0">
                 <a:solidFill>
                   <a:srgbClr val="1C2833"/>
@@ -3279,87 +6334,7 @@
                 <a:ea typeface="Arial" pitchFamily="34" charset="-122"/>
                 <a:cs typeface="Arial" pitchFamily="34" charset="-120"/>
               </a:rPr>
-              <a:t> (IAST: pra-kṛti; lit. "nature, primary disposition") — in Ayurveda, the constitutional baseline you are born with: a particular </a:t>
-            </a:r>
-            <a:pPr algn="l" indent="0" marL="0">
-              <a:lnSpc>
-                <a:spcPts val="1620"/>
-              </a:lnSpc>
-              <a:spcAft>
-                <a:spcPts val="300"/>
-              </a:spcAft>
-              <a:buNone/>
-            </a:pPr>
-            <a:r>
-              <a:rPr lang="en-US" sz="1200" i="1" dirty="0">
-                <a:solidFill>
-                  <a:srgbClr val="1C2833"/>
-                </a:solidFill>
-                <a:latin typeface="Arial" pitchFamily="34" charset="0"/>
-                <a:ea typeface="Arial" pitchFamily="34" charset="-122"/>
-                <a:cs typeface="Arial" pitchFamily="34" charset="-120"/>
-              </a:rPr>
-              <a:t>proportion</a:t>
-            </a:r>
-            <a:pPr algn="l" indent="0" marL="0">
-              <a:lnSpc>
-                <a:spcPts val="1620"/>
-              </a:lnSpc>
-              <a:spcAft>
-                <a:spcPts val="300"/>
-              </a:spcAft>
-              <a:buNone/>
-            </a:pPr>
-            <a:r>
-              <a:rPr lang="en-US" sz="1200" dirty="0">
-                <a:solidFill>
-                  <a:srgbClr val="1C2833"/>
-                </a:solidFill>
-                <a:latin typeface="Arial" pitchFamily="34" charset="0"/>
-                <a:ea typeface="Arial" pitchFamily="34" charset="-122"/>
-                <a:cs typeface="Arial" pitchFamily="34" charset="-120"/>
-              </a:rPr>
-              <a:t> of </a:t>
-            </a:r>
-            <a:pPr algn="l" indent="0" marL="0">
-              <a:lnSpc>
-                <a:spcPts val="1620"/>
-              </a:lnSpc>
-              <a:spcAft>
-                <a:spcPts val="300"/>
-              </a:spcAft>
-              <a:buNone/>
-            </a:pPr>
-            <a:r>
-              <a:rPr lang="en-US" sz="1200" i="1" dirty="0">
-                <a:solidFill>
-                  <a:srgbClr val="1C2833"/>
-                </a:solidFill>
-                <a:latin typeface="Arial" pitchFamily="34" charset="0"/>
-                <a:ea typeface="Arial" pitchFamily="34" charset="-122"/>
-                <a:cs typeface="Arial" pitchFamily="34" charset="-120"/>
-              </a:rPr>
-              <a:t>vāta : pitta : kapha</a:t>
-            </a:r>
-            <a:pPr algn="l" indent="0" marL="0">
-              <a:lnSpc>
-                <a:spcPts val="1620"/>
-              </a:lnSpc>
-              <a:spcAft>
-                <a:spcPts val="300"/>
-              </a:spcAft>
-              <a:buNone/>
-            </a:pPr>
-            <a:r>
-              <a:rPr lang="en-US" sz="1200" dirty="0">
-                <a:solidFill>
-                  <a:srgbClr val="1C2833"/>
-                </a:solidFill>
-                <a:latin typeface="Arial" pitchFamily="34" charset="0"/>
-                <a:ea typeface="Arial" pitchFamily="34" charset="-122"/>
-                <a:cs typeface="Arial" pitchFamily="34" charset="-120"/>
-              </a:rPr>
-              <a:t>.</a:t>
+              <a:t>Printed self-observation worksheet (one per student)</a:t>
             </a:r>
             <a:endParaRPr lang="en-US" sz="1200" dirty="0"/>
           </a:p>
@@ -3375,26 +6350,6 @@
               <a:buChar char="•"/>
             </a:pPr>
             <a:r>
-              <a:rPr lang="en-US" sz="1200" i="1" dirty="0">
-                <a:solidFill>
-                  <a:srgbClr val="1C2833"/>
-                </a:solidFill>
-                <a:latin typeface="Arial" pitchFamily="34" charset="0"/>
-                <a:ea typeface="Arial" pitchFamily="34" charset="-122"/>
-                <a:cs typeface="Arial" pitchFamily="34" charset="-120"/>
-              </a:rPr>
-              <a:t>vikṛti</a:t>
-            </a:r>
-            <a:pPr algn="l" indent="0" marL="0">
-              <a:lnSpc>
-                <a:spcPts val="1620"/>
-              </a:lnSpc>
-              <a:spcAft>
-                <a:spcPts val="300"/>
-              </a:spcAft>
-              <a:buNone/>
-            </a:pPr>
-            <a:r>
               <a:rPr lang="en-US" sz="1200" dirty="0">
                 <a:solidFill>
                   <a:srgbClr val="1C2833"/>
@@ -3403,36 +6358,20 @@
                 <a:ea typeface="Arial" pitchFamily="34" charset="-122"/>
                 <a:cs typeface="Arial" pitchFamily="34" charset="-120"/>
               </a:rPr>
-              <a:t> (IAST: vi-kṛti; lit. "deviation, modification") — your </a:t>
-            </a:r>
-            <a:pPr algn="l" indent="0" marL="0">
-              <a:lnSpc>
-                <a:spcPts val="1620"/>
-              </a:lnSpc>
-              <a:spcAft>
-                <a:spcPts val="300"/>
-              </a:spcAft>
-              <a:buNone/>
-            </a:pPr>
-            <a:r>
-              <a:rPr lang="en-US" sz="1200" i="1" dirty="0">
-                <a:solidFill>
-                  <a:srgbClr val="1C2833"/>
-                </a:solidFill>
-                <a:latin typeface="Arial" pitchFamily="34" charset="0"/>
-                <a:ea typeface="Arial" pitchFamily="34" charset="-122"/>
-                <a:cs typeface="Arial" pitchFamily="34" charset="-120"/>
-              </a:rPr>
-              <a:t>current</a:t>
-            </a:r>
-            <a:pPr algn="l" indent="0" marL="0">
-              <a:lnSpc>
-                <a:spcPts val="1620"/>
-              </a:lnSpc>
-              <a:spcAft>
-                <a:spcPts val="300"/>
-              </a:spcAft>
-              <a:buNone/>
+              <a:t>The Caraka safety paraphrase on a slide or the board</a:t>
+            </a:r>
+            <a:endParaRPr lang="en-US" sz="1200" dirty="0"/>
+          </a:p>
+          <a:p>
+            <a:pPr algn="l" marL="342900" indent="-342900">
+              <a:lnSpc>
+                <a:spcPts val="1620"/>
+              </a:lnSpc>
+              <a:spcAft>
+                <a:spcPts val="300"/>
+              </a:spcAft>
+              <a:buSzPct val="100000"/>
+              <a:buChar char="•"/>
             </a:pPr>
             <a:r>
               <a:rPr lang="en-US" sz="1200" dirty="0">
@@ -3443,47 +6382,7 @@
                 <a:ea typeface="Arial" pitchFamily="34" charset="-122"/>
                 <a:cs typeface="Arial" pitchFamily="34" charset="-120"/>
               </a:rPr>
-              <a:t> state. Can drift from </a:t>
-            </a:r>
-            <a:pPr algn="l" indent="0" marL="0">
-              <a:lnSpc>
-                <a:spcPts val="1620"/>
-              </a:lnSpc>
-              <a:spcAft>
-                <a:spcPts val="300"/>
-              </a:spcAft>
-              <a:buNone/>
-            </a:pPr>
-            <a:r>
-              <a:rPr lang="en-US" sz="1200" i="1" dirty="0">
-                <a:solidFill>
-                  <a:srgbClr val="1C2833"/>
-                </a:solidFill>
-                <a:latin typeface="Arial" pitchFamily="34" charset="0"/>
-                <a:ea typeface="Arial" pitchFamily="34" charset="-122"/>
-                <a:cs typeface="Arial" pitchFamily="34" charset="-120"/>
-              </a:rPr>
-              <a:t>prakṛti</a:t>
-            </a:r>
-            <a:pPr algn="l" indent="0" marL="0">
-              <a:lnSpc>
-                <a:spcPts val="1620"/>
-              </a:lnSpc>
-              <a:spcAft>
-                <a:spcPts val="300"/>
-              </a:spcAft>
-              <a:buNone/>
-            </a:pPr>
-            <a:r>
-              <a:rPr lang="en-US" sz="1200" dirty="0">
-                <a:solidFill>
-                  <a:srgbClr val="1C2833"/>
-                </a:solidFill>
-                <a:latin typeface="Arial" pitchFamily="34" charset="0"/>
-                <a:ea typeface="Arial" pitchFamily="34" charset="-122"/>
-                <a:cs typeface="Arial" pitchFamily="34" charset="-120"/>
-              </a:rPr>
-              <a:t> due to season, food, stress, sleep.</a:t>
+              <a:t>Sticky notes for the exit reflection</a:t>
             </a:r>
             <a:endParaRPr lang="en-US" sz="1200" dirty="0"/>
           </a:p>
@@ -3641,7 +6540,7 @@
                 <a:ea typeface="Georgia" pitchFamily="34" charset="-122"/>
                 <a:cs typeface="Georgia" pitchFamily="34" charset="-120"/>
               </a:rPr>
-              <a:t>Lesson flow</a:t>
+              <a:t>Vocabulary introduced today</a:t>
             </a:r>
             <a:endParaRPr lang="en-US" sz="1800" dirty="0"/>
           </a:p>
@@ -3650,6 +6549,276 @@
       <p:sp>
         <p:nvSpPr>
           <p:cNvPr id="4" name="Text 2"/>
+          <p:cNvSpPr/>
+          <p:nvPr/>
+        </p:nvSpPr>
+        <p:spPr>
+          <a:xfrm>
+            <a:off x="634901" y="883593"/>
+            <a:ext cx="8102798" cy="937022"/>
+          </a:xfrm>
+          <a:prstGeom prst="rect">
+            <a:avLst/>
+          </a:prstGeom>
+          <a:noFill/>
+          <a:ln/>
+        </p:spPr>
+        <p:txBody>
+          <a:bodyPr wrap="square" lIns="0" tIns="0" rIns="0" bIns="0" rtlCol="0" anchor="t"/>
+          <a:lstStyle/>
+          <a:p>
+            <a:pPr algn="l" marL="342900" indent="-342900">
+              <a:lnSpc>
+                <a:spcPts val="1620"/>
+              </a:lnSpc>
+              <a:spcAft>
+                <a:spcPts val="300"/>
+              </a:spcAft>
+              <a:buSzPct val="100000"/>
+              <a:buChar char="•"/>
+            </a:pPr>
+            <a:r>
+              <a:rPr lang="en-US" sz="1200" i="1" dirty="0">
+                <a:solidFill>
+                  <a:srgbClr val="1C2833"/>
+                </a:solidFill>
+                <a:latin typeface="Arial" pitchFamily="34" charset="0"/>
+                <a:ea typeface="Arial" pitchFamily="34" charset="-122"/>
+                <a:cs typeface="Arial" pitchFamily="34" charset="-120"/>
+              </a:rPr>
+              <a:t>prakṛti</a:t>
+            </a:r>
+            <a:pPr algn="l" indent="0" marL="0">
+              <a:lnSpc>
+                <a:spcPts val="1620"/>
+              </a:lnSpc>
+              <a:spcAft>
+                <a:spcPts val="300"/>
+              </a:spcAft>
+              <a:buNone/>
+            </a:pPr>
+            <a:r>
+              <a:rPr lang="en-US" sz="1200" dirty="0">
+                <a:solidFill>
+                  <a:srgbClr val="1C2833"/>
+                </a:solidFill>
+                <a:latin typeface="Arial" pitchFamily="34" charset="0"/>
+                <a:ea typeface="Arial" pitchFamily="34" charset="-122"/>
+                <a:cs typeface="Arial" pitchFamily="34" charset="-120"/>
+              </a:rPr>
+              <a:t> (IAST: pra-kṛti; lit. "nature, primary disposition") — in Ayurveda, the constitutional baseline you are born with: a particular </a:t>
+            </a:r>
+            <a:pPr algn="l" indent="0" marL="0">
+              <a:lnSpc>
+                <a:spcPts val="1620"/>
+              </a:lnSpc>
+              <a:spcAft>
+                <a:spcPts val="300"/>
+              </a:spcAft>
+              <a:buNone/>
+            </a:pPr>
+            <a:r>
+              <a:rPr lang="en-US" sz="1200" i="1" dirty="0">
+                <a:solidFill>
+                  <a:srgbClr val="1C2833"/>
+                </a:solidFill>
+                <a:latin typeface="Arial" pitchFamily="34" charset="0"/>
+                <a:ea typeface="Arial" pitchFamily="34" charset="-122"/>
+                <a:cs typeface="Arial" pitchFamily="34" charset="-120"/>
+              </a:rPr>
+              <a:t>proportion</a:t>
+            </a:r>
+            <a:pPr algn="l" indent="0" marL="0">
+              <a:lnSpc>
+                <a:spcPts val="1620"/>
+              </a:lnSpc>
+              <a:spcAft>
+                <a:spcPts val="300"/>
+              </a:spcAft>
+              <a:buNone/>
+            </a:pPr>
+            <a:r>
+              <a:rPr lang="en-US" sz="1200" dirty="0">
+                <a:solidFill>
+                  <a:srgbClr val="1C2833"/>
+                </a:solidFill>
+                <a:latin typeface="Arial" pitchFamily="34" charset="0"/>
+                <a:ea typeface="Arial" pitchFamily="34" charset="-122"/>
+                <a:cs typeface="Arial" pitchFamily="34" charset="-120"/>
+              </a:rPr>
+              <a:t> of </a:t>
+            </a:r>
+            <a:pPr algn="l" indent="0" marL="0">
+              <a:lnSpc>
+                <a:spcPts val="1620"/>
+              </a:lnSpc>
+              <a:spcAft>
+                <a:spcPts val="300"/>
+              </a:spcAft>
+              <a:buNone/>
+            </a:pPr>
+            <a:r>
+              <a:rPr lang="en-US" sz="1200" i="1" dirty="0">
+                <a:solidFill>
+                  <a:srgbClr val="1C2833"/>
+                </a:solidFill>
+                <a:latin typeface="Arial" pitchFamily="34" charset="0"/>
+                <a:ea typeface="Arial" pitchFamily="34" charset="-122"/>
+                <a:cs typeface="Arial" pitchFamily="34" charset="-120"/>
+              </a:rPr>
+              <a:t>vāta : pitta : kapha</a:t>
+            </a:r>
+            <a:pPr algn="l" indent="0" marL="0">
+              <a:lnSpc>
+                <a:spcPts val="1620"/>
+              </a:lnSpc>
+              <a:spcAft>
+                <a:spcPts val="300"/>
+              </a:spcAft>
+              <a:buNone/>
+            </a:pPr>
+            <a:r>
+              <a:rPr lang="en-US" sz="1200" dirty="0">
+                <a:solidFill>
+                  <a:srgbClr val="1C2833"/>
+                </a:solidFill>
+                <a:latin typeface="Arial" pitchFamily="34" charset="0"/>
+                <a:ea typeface="Arial" pitchFamily="34" charset="-122"/>
+                <a:cs typeface="Arial" pitchFamily="34" charset="-120"/>
+              </a:rPr>
+              <a:t>.</a:t>
+            </a:r>
+            <a:endParaRPr lang="en-US" sz="1200" dirty="0"/>
+          </a:p>
+          <a:p>
+            <a:pPr algn="l" marL="342900" indent="-342900">
+              <a:lnSpc>
+                <a:spcPts val="1620"/>
+              </a:lnSpc>
+              <a:spcAft>
+                <a:spcPts val="300"/>
+              </a:spcAft>
+              <a:buSzPct val="100000"/>
+              <a:buChar char="•"/>
+            </a:pPr>
+            <a:r>
+              <a:rPr lang="en-US" sz="1200" i="1" dirty="0">
+                <a:solidFill>
+                  <a:srgbClr val="1C2833"/>
+                </a:solidFill>
+                <a:latin typeface="Arial" pitchFamily="34" charset="0"/>
+                <a:ea typeface="Arial" pitchFamily="34" charset="-122"/>
+                <a:cs typeface="Arial" pitchFamily="34" charset="-120"/>
+              </a:rPr>
+              <a:t>vikṛti</a:t>
+            </a:r>
+            <a:pPr algn="l" indent="0" marL="0">
+              <a:lnSpc>
+                <a:spcPts val="1620"/>
+              </a:lnSpc>
+              <a:spcAft>
+                <a:spcPts val="300"/>
+              </a:spcAft>
+              <a:buNone/>
+            </a:pPr>
+            <a:r>
+              <a:rPr lang="en-US" sz="1200" dirty="0">
+                <a:solidFill>
+                  <a:srgbClr val="1C2833"/>
+                </a:solidFill>
+                <a:latin typeface="Arial" pitchFamily="34" charset="0"/>
+                <a:ea typeface="Arial" pitchFamily="34" charset="-122"/>
+                <a:cs typeface="Arial" pitchFamily="34" charset="-120"/>
+              </a:rPr>
+              <a:t> (IAST: vi-kṛti; lit. "deviation, modification") — your </a:t>
+            </a:r>
+            <a:pPr algn="l" indent="0" marL="0">
+              <a:lnSpc>
+                <a:spcPts val="1620"/>
+              </a:lnSpc>
+              <a:spcAft>
+                <a:spcPts val="300"/>
+              </a:spcAft>
+              <a:buNone/>
+            </a:pPr>
+            <a:r>
+              <a:rPr lang="en-US" sz="1200" i="1" dirty="0">
+                <a:solidFill>
+                  <a:srgbClr val="1C2833"/>
+                </a:solidFill>
+                <a:latin typeface="Arial" pitchFamily="34" charset="0"/>
+                <a:ea typeface="Arial" pitchFamily="34" charset="-122"/>
+                <a:cs typeface="Arial" pitchFamily="34" charset="-120"/>
+              </a:rPr>
+              <a:t>current</a:t>
+            </a:r>
+            <a:pPr algn="l" indent="0" marL="0">
+              <a:lnSpc>
+                <a:spcPts val="1620"/>
+              </a:lnSpc>
+              <a:spcAft>
+                <a:spcPts val="300"/>
+              </a:spcAft>
+              <a:buNone/>
+            </a:pPr>
+            <a:r>
+              <a:rPr lang="en-US" sz="1200" dirty="0">
+                <a:solidFill>
+                  <a:srgbClr val="1C2833"/>
+                </a:solidFill>
+                <a:latin typeface="Arial" pitchFamily="34" charset="0"/>
+                <a:ea typeface="Arial" pitchFamily="34" charset="-122"/>
+                <a:cs typeface="Arial" pitchFamily="34" charset="-120"/>
+              </a:rPr>
+              <a:t> state. Can drift from </a:t>
+            </a:r>
+            <a:pPr algn="l" indent="0" marL="0">
+              <a:lnSpc>
+                <a:spcPts val="1620"/>
+              </a:lnSpc>
+              <a:spcAft>
+                <a:spcPts val="300"/>
+              </a:spcAft>
+              <a:buNone/>
+            </a:pPr>
+            <a:r>
+              <a:rPr lang="en-US" sz="1200" i="1" dirty="0">
+                <a:solidFill>
+                  <a:srgbClr val="1C2833"/>
+                </a:solidFill>
+                <a:latin typeface="Arial" pitchFamily="34" charset="0"/>
+                <a:ea typeface="Arial" pitchFamily="34" charset="-122"/>
+                <a:cs typeface="Arial" pitchFamily="34" charset="-120"/>
+              </a:rPr>
+              <a:t>prakṛti</a:t>
+            </a:r>
+            <a:pPr algn="l" indent="0" marL="0">
+              <a:lnSpc>
+                <a:spcPts val="1620"/>
+              </a:lnSpc>
+              <a:spcAft>
+                <a:spcPts val="300"/>
+              </a:spcAft>
+              <a:buNone/>
+            </a:pPr>
+            <a:r>
+              <a:rPr lang="en-US" sz="1200" dirty="0">
+                <a:solidFill>
+                  <a:srgbClr val="1C2833"/>
+                </a:solidFill>
+                <a:latin typeface="Arial" pitchFamily="34" charset="0"/>
+                <a:ea typeface="Arial" pitchFamily="34" charset="-122"/>
+                <a:cs typeface="Arial" pitchFamily="34" charset="-120"/>
+              </a:rPr>
+              <a:t> due to season, food, stress, sleep.</a:t>
+            </a:r>
+            <a:endParaRPr lang="en-US" sz="1200" dirty="0"/>
+          </a:p>
+        </p:txBody>
+      </p:sp>
+      <p:sp>
+        <p:nvSpPr>
+          <p:cNvPr id="5" name="Text 3"/>
           <p:cNvSpPr/>
           <p:nvPr/>
         </p:nvSpPr>
@@ -3799,7 +6968,7 @@
                 <a:ea typeface="Georgia" pitchFamily="34" charset="-122"/>
                 <a:cs typeface="Georgia" pitchFamily="34" charset="-120"/>
               </a:rPr>
-              <a:t>Warm-up (5 min)</a:t>
+              <a:t>Lesson flow</a:t>
             </a:r>
             <a:endParaRPr lang="en-US" sz="1800" dirty="0"/>
           </a:p>
@@ -3808,146 +6977,6 @@
       <p:sp>
         <p:nvSpPr>
           <p:cNvPr id="4" name="Text 2"/>
-          <p:cNvSpPr/>
-          <p:nvPr/>
-        </p:nvSpPr>
-        <p:spPr>
-          <a:xfrm>
-            <a:off x="406301" y="870942"/>
-            <a:ext cx="8498026" cy="213271"/>
-          </a:xfrm>
-          <a:prstGeom prst="rect">
-            <a:avLst/>
-          </a:prstGeom>
-          <a:noFill/>
-          <a:ln/>
-        </p:spPr>
-        <p:txBody>
-          <a:bodyPr wrap="square" lIns="0" tIns="0" rIns="0" bIns="0" rtlCol="0" anchor="t"/>
-          <a:lstStyle/>
-          <a:p>
-            <a:pPr algn="l" indent="0" marL="0">
-              <a:lnSpc>
-                <a:spcPts val="1680"/>
-              </a:lnSpc>
-              <a:spcBef>
-                <a:spcPts val="300"/>
-              </a:spcBef>
-              <a:spcAft>
-                <a:spcPts val="300"/>
-              </a:spcAft>
-              <a:buNone/>
-            </a:pPr>
-            <a:r>
-              <a:rPr lang="en-US" sz="1200" dirty="0">
-                <a:solidFill>
-                  <a:srgbClr val="1C2833"/>
-                </a:solidFill>
-                <a:latin typeface="Arial" pitchFamily="34" charset="0"/>
-                <a:ea typeface="Arial" pitchFamily="34" charset="-122"/>
-                <a:cs typeface="Arial" pitchFamily="34" charset="-120"/>
-              </a:rPr>
-              <a:t>– Daily prompt: </a:t>
-            </a:r>
-            <a:pPr algn="l" indent="0" marL="0">
-              <a:lnSpc>
-                <a:spcPts val="1680"/>
-              </a:lnSpc>
-              <a:spcBef>
-                <a:spcPts val="300"/>
-              </a:spcBef>
-              <a:spcAft>
-                <a:spcPts val="300"/>
-              </a:spcAft>
-              <a:buNone/>
-            </a:pPr>
-            <a:r>
-              <a:rPr lang="en-US" sz="1200" i="1" dirty="0">
-                <a:solidFill>
-                  <a:srgbClr val="1C2833"/>
-                </a:solidFill>
-                <a:latin typeface="Arial" pitchFamily="34" charset="0"/>
-                <a:ea typeface="Arial" pitchFamily="34" charset="-122"/>
-                <a:cs typeface="Arial" pitchFamily="34" charset="-120"/>
-              </a:rPr>
-              <a:t>"What did your body notice yesterday?"</a:t>
-            </a:r>
-            <a:pPr algn="l" indent="0" marL="0">
-              <a:lnSpc>
-                <a:spcPts val="1680"/>
-              </a:lnSpc>
-              <a:spcBef>
-                <a:spcPts val="300"/>
-              </a:spcBef>
-              <a:spcAft>
-                <a:spcPts val="300"/>
-              </a:spcAft>
-              <a:buNone/>
-            </a:pPr>
-            <a:r>
-              <a:rPr lang="en-US" sz="1200" dirty="0">
-                <a:solidFill>
-                  <a:srgbClr val="1C2833"/>
-                </a:solidFill>
-                <a:latin typeface="Arial" pitchFamily="34" charset="0"/>
-                <a:ea typeface="Arial" pitchFamily="34" charset="-122"/>
-                <a:cs typeface="Arial" pitchFamily="34" charset="-120"/>
-              </a:rPr>
-              <a:t> — 2 students share.</a:t>
-            </a:r>
-            <a:endParaRPr lang="en-US" sz="1200" dirty="0"/>
-          </a:p>
-        </p:txBody>
-      </p:sp>
-      <p:sp>
-        <p:nvSpPr>
-          <p:cNvPr id="5" name="Text 3"/>
-          <p:cNvSpPr/>
-          <p:nvPr/>
-        </p:nvSpPr>
-        <p:spPr>
-          <a:xfrm>
-            <a:off x="634901" y="1173063"/>
-            <a:ext cx="8102798" cy="281880"/>
-          </a:xfrm>
-          <a:prstGeom prst="rect">
-            <a:avLst/>
-          </a:prstGeom>
-          <a:noFill/>
-          <a:ln/>
-        </p:spPr>
-        <p:txBody>
-          <a:bodyPr wrap="square" lIns="0" tIns="0" rIns="0" bIns="0" rtlCol="0" anchor="t"/>
-          <a:lstStyle/>
-          <a:p>
-            <a:pPr algn="l" marL="342900" indent="-342900">
-              <a:lnSpc>
-                <a:spcPts val="1620"/>
-              </a:lnSpc>
-              <a:spcAft>
-                <a:spcPts val="300"/>
-              </a:spcAft>
-              <a:buSzPct val="100000"/>
-              <a:buChar char="•"/>
-            </a:pPr>
-            <a:r>
-              <a:rPr lang="en-US" sz="1200" i="1" dirty="0">
-                <a:solidFill>
-                  <a:srgbClr val="1C2833"/>
-                </a:solidFill>
-                <a:latin typeface="Arial" pitchFamily="34" charset="0"/>
-                <a:ea typeface="Arial" pitchFamily="34" charset="-122"/>
-                <a:cs typeface="Arial" pitchFamily="34" charset="-120"/>
-              </a:rPr>
-              <a:t>"Yesterday we learned the three doṣas in detail. Today we ask: which one tends to be loudest in you? Carefully."</a:t>
-            </a:r>
-            <a:endParaRPr lang="en-US" sz="1200" dirty="0"/>
-          </a:p>
-        </p:txBody>
-      </p:sp>
-      <p:sp>
-        <p:nvSpPr>
-          <p:cNvPr id="6" name="Text 4"/>
           <p:cNvSpPr/>
           <p:nvPr/>
         </p:nvSpPr>
@@ -4097,7 +7126,7 @@
                 <a:ea typeface="Georgia" pitchFamily="34" charset="-122"/>
                 <a:cs typeface="Georgia" pitchFamily="34" charset="-120"/>
               </a:rPr>
-              <a:t>Core (15 min)</a:t>
+              <a:t>Warm-up (5 min)</a:t>
             </a:r>
             <a:endParaRPr lang="en-US" sz="1800" dirty="0"/>
           </a:p>
@@ -4112,7 +7141,7 @@
         <p:spPr>
           <a:xfrm>
             <a:off x="634901" y="883593"/>
-            <a:ext cx="8102798" cy="281880"/>
+            <a:ext cx="8102798" cy="525661"/>
           </a:xfrm>
           <a:prstGeom prst="rect">
             <a:avLst/>
@@ -4134,6 +7163,17 @@
               <a:buSzPct val="100000"/>
               <a:buChar char="•"/>
             </a:pPr>
+            <a:r>
+              <a:rPr lang="en-US" sz="1200" dirty="0">
+                <a:solidFill>
+                  <a:srgbClr val="1C2833"/>
+                </a:solidFill>
+                <a:latin typeface="Arial" pitchFamily="34" charset="0"/>
+                <a:ea typeface="Arial" pitchFamily="34" charset="-122"/>
+                <a:cs typeface="Arial" pitchFamily="34" charset="-120"/>
+              </a:rPr>
+              <a:t>Daily prompt: </a:t>
+            </a:r>
             <a:pPr algn="l" indent="0" marL="0">
               <a:lnSpc>
                 <a:spcPts val="1620"/>
@@ -4152,7 +7192,7 @@
                 <a:ea typeface="Arial" pitchFamily="34" charset="-122"/>
                 <a:cs typeface="Arial" pitchFamily="34" charset="-120"/>
               </a:rPr>
-              <a:t>The</a:t>
+              <a:t>"What did your body notice yesterday?"</a:t>
             </a:r>
             <a:pPr algn="l" indent="0" marL="0">
               <a:lnSpc>
@@ -4172,16 +7212,20 @@
                 <a:ea typeface="Arial" pitchFamily="34" charset="-122"/>
                 <a:cs typeface="Arial" pitchFamily="34" charset="-120"/>
               </a:rPr>
-              <a:t>prakṛti</a:t>
-            </a:r>
-            <a:pPr algn="l" indent="0" marL="0">
-              <a:lnSpc>
-                <a:spcPts val="1620"/>
-              </a:lnSpc>
-              <a:spcAft>
-                <a:spcPts val="300"/>
-              </a:spcAft>
-              <a:buNone/>
+              <a:t> — 2 students share.</a:t>
+            </a:r>
+            <a:endParaRPr lang="en-US" sz="1200" dirty="0"/>
+          </a:p>
+          <a:p>
+            <a:pPr algn="l" marL="342900" indent="-342900">
+              <a:lnSpc>
+                <a:spcPts val="1620"/>
+              </a:lnSpc>
+              <a:spcAft>
+                <a:spcPts val="300"/>
+              </a:spcAft>
+              <a:buSzPct val="100000"/>
+              <a:buChar char="•"/>
             </a:pPr>
             <a:r>
               <a:rPr lang="en-US" sz="1200" i="1" dirty="0">
@@ -4192,67 +7236,7 @@
                 <a:ea typeface="Arial" pitchFamily="34" charset="-122"/>
                 <a:cs typeface="Arial" pitchFamily="34" charset="-120"/>
               </a:rPr>
-              <a:t> vs</a:t>
-            </a:r>
-            <a:pPr algn="l" indent="0" marL="0">
-              <a:lnSpc>
-                <a:spcPts val="1620"/>
-              </a:lnSpc>
-              <a:spcAft>
-                <a:spcPts val="300"/>
-              </a:spcAft>
-              <a:buNone/>
-            </a:pPr>
-            <a:r>
-              <a:rPr lang="en-US" sz="1200" dirty="0">
-                <a:solidFill>
-                  <a:srgbClr val="1C2833"/>
-                </a:solidFill>
-                <a:latin typeface="Arial" pitchFamily="34" charset="0"/>
-                <a:ea typeface="Arial" pitchFamily="34" charset="-122"/>
-                <a:cs typeface="Arial" pitchFamily="34" charset="-120"/>
-              </a:rPr>
-              <a:t>vikṛti</a:t>
-            </a:r>
-            <a:pPr algn="l" indent="0" marL="0">
-              <a:lnSpc>
-                <a:spcPts val="1620"/>
-              </a:lnSpc>
-              <a:spcAft>
-                <a:spcPts val="300"/>
-              </a:spcAft>
-              <a:buNone/>
-            </a:pPr>
-            <a:r>
-              <a:rPr lang="en-US" sz="1200" i="1" dirty="0">
-                <a:solidFill>
-                  <a:srgbClr val="1C2833"/>
-                </a:solidFill>
-                <a:latin typeface="Arial" pitchFamily="34" charset="0"/>
-                <a:ea typeface="Arial" pitchFamily="34" charset="-122"/>
-                <a:cs typeface="Arial" pitchFamily="34" charset="-120"/>
-              </a:rPr>
-              <a:t> distinction — write the analogy on the board.</a:t>
-            </a:r>
-            <a:pPr algn="l" indent="0" marL="0">
-              <a:lnSpc>
-                <a:spcPts val="1620"/>
-              </a:lnSpc>
-              <a:spcAft>
-                <a:spcPts val="300"/>
-              </a:spcAft>
-              <a:buNone/>
-            </a:pPr>
-            <a:r>
-              <a:rPr lang="en-US" sz="1200" dirty="0">
-                <a:solidFill>
-                  <a:srgbClr val="1C2833"/>
-                </a:solidFill>
-                <a:latin typeface="Arial" pitchFamily="34" charset="0"/>
-                <a:ea typeface="Arial" pitchFamily="34" charset="-122"/>
-                <a:cs typeface="Arial" pitchFamily="34" charset="-120"/>
-              </a:rPr>
-              <a:t>*</a:t>
+              <a:t>"Yesterday we learned the three doṣas in detail. Today we ask: which one tends to be loudest in you? Carefully."</a:t>
             </a:r>
             <a:endParaRPr lang="en-US" sz="1200" dirty="0"/>
           </a:p>
@@ -4266,1060 +7250,7 @@
         </p:nvSpPr>
         <p:spPr>
           <a:xfrm>
-            <a:off x="406301" y="1254323"/>
-            <a:ext cx="8498026" cy="426541"/>
-          </a:xfrm>
-          <a:prstGeom prst="rect">
-            <a:avLst/>
-          </a:prstGeom>
-          <a:noFill/>
-          <a:ln/>
-        </p:spPr>
-        <p:txBody>
-          <a:bodyPr wrap="square" lIns="0" tIns="0" rIns="0" bIns="0" rtlCol="0" anchor="t"/>
-          <a:lstStyle/>
-          <a:p>
-            <a:pPr algn="l" indent="0" marL="0">
-              <a:lnSpc>
-                <a:spcPts val="1680"/>
-              </a:lnSpc>
-              <a:spcBef>
-                <a:spcPts val="300"/>
-              </a:spcBef>
-              <a:spcAft>
-                <a:spcPts val="300"/>
-              </a:spcAft>
-              <a:buNone/>
-            </a:pPr>
-            <a:r>
-              <a:rPr lang="en-US" sz="1200" dirty="0">
-                <a:solidFill>
-                  <a:srgbClr val="1C2833"/>
-                </a:solidFill>
-                <a:latin typeface="Arial" pitchFamily="34" charset="0"/>
-                <a:ea typeface="Arial" pitchFamily="34" charset="-122"/>
-                <a:cs typeface="Arial" pitchFamily="34" charset="-120"/>
-              </a:rPr>
-              <a:t>&gt; Think of yourself like a song. </a:t>
-            </a:r>
-            <a:pPr algn="l" indent="0" marL="0">
-              <a:lnSpc>
-                <a:spcPts val="1680"/>
-              </a:lnSpc>
-              <a:spcBef>
-                <a:spcPts val="300"/>
-              </a:spcBef>
-              <a:spcAft>
-                <a:spcPts val="300"/>
-              </a:spcAft>
-              <a:buNone/>
-            </a:pPr>
-            <a:r>
-              <a:rPr lang="en-US" sz="1200" i="1" dirty="0">
-                <a:solidFill>
-                  <a:srgbClr val="1C2833"/>
-                </a:solidFill>
-                <a:latin typeface="Arial" pitchFamily="34" charset="0"/>
-                <a:ea typeface="Arial" pitchFamily="34" charset="-122"/>
-                <a:cs typeface="Arial" pitchFamily="34" charset="-120"/>
-              </a:rPr>
-              <a:t>Prakṛti</a:t>
-            </a:r>
-            <a:pPr algn="l" indent="0" marL="0">
-              <a:lnSpc>
-                <a:spcPts val="1680"/>
-              </a:lnSpc>
-              <a:spcBef>
-                <a:spcPts val="300"/>
-              </a:spcBef>
-              <a:spcAft>
-                <a:spcPts val="300"/>
-              </a:spcAft>
-              <a:buNone/>
-            </a:pPr>
-            <a:r>
-              <a:rPr lang="en-US" sz="1200" dirty="0">
-                <a:solidFill>
-                  <a:srgbClr val="1C2833"/>
-                </a:solidFill>
-                <a:latin typeface="Arial" pitchFamily="34" charset="0"/>
-                <a:ea typeface="Arial" pitchFamily="34" charset="-122"/>
-                <a:cs typeface="Arial" pitchFamily="34" charset="-120"/>
-              </a:rPr>
-              <a:t> is the </a:t>
-            </a:r>
-            <a:pPr algn="l" indent="0" marL="0">
-              <a:lnSpc>
-                <a:spcPts val="1680"/>
-              </a:lnSpc>
-              <a:spcBef>
-                <a:spcPts val="300"/>
-              </a:spcBef>
-              <a:spcAft>
-                <a:spcPts val="300"/>
-              </a:spcAft>
-              <a:buNone/>
-            </a:pPr>
-            <a:r>
-              <a:rPr lang="en-US" sz="1200" b="1" dirty="0">
-                <a:solidFill>
-                  <a:srgbClr val="1C2833"/>
-                </a:solidFill>
-                <a:latin typeface="Arial" pitchFamily="34" charset="0"/>
-                <a:ea typeface="Arial" pitchFamily="34" charset="-122"/>
-                <a:cs typeface="Arial" pitchFamily="34" charset="-120"/>
-              </a:rPr>
-              <a:t>key</a:t>
-            </a:r>
-            <a:pPr algn="l" indent="0" marL="0">
-              <a:lnSpc>
-                <a:spcPts val="1680"/>
-              </a:lnSpc>
-              <a:spcBef>
-                <a:spcPts val="300"/>
-              </a:spcBef>
-              <a:spcAft>
-                <a:spcPts val="300"/>
-              </a:spcAft>
-              <a:buNone/>
-            </a:pPr>
-            <a:r>
-              <a:rPr lang="en-US" sz="1200" dirty="0">
-                <a:solidFill>
-                  <a:srgbClr val="1C2833"/>
-                </a:solidFill>
-                <a:latin typeface="Arial" pitchFamily="34" charset="0"/>
-                <a:ea typeface="Arial" pitchFamily="34" charset="-122"/>
-                <a:cs typeface="Arial" pitchFamily="34" charset="-120"/>
-              </a:rPr>
-              <a:t> — the underlying note your life is set in. </a:t>
-            </a:r>
-            <a:pPr algn="l" indent="0" marL="0">
-              <a:lnSpc>
-                <a:spcPts val="1680"/>
-              </a:lnSpc>
-              <a:spcBef>
-                <a:spcPts val="300"/>
-              </a:spcBef>
-              <a:spcAft>
-                <a:spcPts val="300"/>
-              </a:spcAft>
-              <a:buNone/>
-            </a:pPr>
-            <a:r>
-              <a:rPr lang="en-US" sz="1200" i="1" dirty="0">
-                <a:solidFill>
-                  <a:srgbClr val="1C2833"/>
-                </a:solidFill>
-                <a:latin typeface="Arial" pitchFamily="34" charset="0"/>
-                <a:ea typeface="Arial" pitchFamily="34" charset="-122"/>
-                <a:cs typeface="Arial" pitchFamily="34" charset="-120"/>
-              </a:rPr>
-              <a:t>Vikṛti</a:t>
-            </a:r>
-            <a:pPr algn="l" indent="0" marL="0">
-              <a:lnSpc>
-                <a:spcPts val="1680"/>
-              </a:lnSpc>
-              <a:spcBef>
-                <a:spcPts val="300"/>
-              </a:spcBef>
-              <a:spcAft>
-                <a:spcPts val="300"/>
-              </a:spcAft>
-              <a:buNone/>
-            </a:pPr>
-            <a:r>
-              <a:rPr lang="en-US" sz="1200" dirty="0">
-                <a:solidFill>
-                  <a:srgbClr val="1C2833"/>
-                </a:solidFill>
-                <a:latin typeface="Arial" pitchFamily="34" charset="0"/>
-                <a:ea typeface="Arial" pitchFamily="34" charset="-122"/>
-                <a:cs typeface="Arial" pitchFamily="34" charset="-120"/>
-              </a:rPr>
-              <a:t> is </a:t>
-            </a:r>
-            <a:pPr algn="l" indent="0" marL="0">
-              <a:lnSpc>
-                <a:spcPts val="1680"/>
-              </a:lnSpc>
-              <a:spcBef>
-                <a:spcPts val="300"/>
-              </a:spcBef>
-              <a:spcAft>
-                <a:spcPts val="300"/>
-              </a:spcAft>
-              <a:buNone/>
-            </a:pPr>
-            <a:r>
-              <a:rPr lang="en-US" sz="1200" b="1" dirty="0">
-                <a:solidFill>
-                  <a:srgbClr val="1C2833"/>
-                </a:solidFill>
-                <a:latin typeface="Arial" pitchFamily="34" charset="0"/>
-                <a:ea typeface="Arial" pitchFamily="34" charset="-122"/>
-                <a:cs typeface="Arial" pitchFamily="34" charset="-120"/>
-              </a:rPr>
-              <a:t>today's notes</a:t>
-            </a:r>
-            <a:pPr algn="l" indent="0" marL="0">
-              <a:lnSpc>
-                <a:spcPts val="1680"/>
-              </a:lnSpc>
-              <a:spcBef>
-                <a:spcPts val="300"/>
-              </a:spcBef>
-              <a:spcAft>
-                <a:spcPts val="300"/>
-              </a:spcAft>
-              <a:buNone/>
-            </a:pPr>
-            <a:r>
-              <a:rPr lang="en-US" sz="1200" dirty="0">
-                <a:solidFill>
-                  <a:srgbClr val="1C2833"/>
-                </a:solidFill>
-                <a:latin typeface="Arial" pitchFamily="34" charset="0"/>
-                <a:ea typeface="Arial" pitchFamily="34" charset="-122"/>
-                <a:cs typeface="Arial" pitchFamily="34" charset="-120"/>
-              </a:rPr>
-              <a:t> — what you're actually playing right now. The same song can be played calmly or frantically. The key doesn't change. The notes do.</a:t>
-            </a:r>
-            <a:endParaRPr lang="en-US" sz="1200" dirty="0"/>
-          </a:p>
-        </p:txBody>
-      </p:sp>
-      <p:sp>
-        <p:nvSpPr>
-          <p:cNvPr id="6" name="Text 4"/>
-          <p:cNvSpPr/>
-          <p:nvPr/>
-        </p:nvSpPr>
-        <p:spPr>
-          <a:xfrm>
-            <a:off x="634901" y="1769715"/>
-            <a:ext cx="8102798" cy="281880"/>
-          </a:xfrm>
-          <a:prstGeom prst="rect">
-            <a:avLst/>
-          </a:prstGeom>
-          <a:noFill/>
-          <a:ln/>
-        </p:spPr>
-        <p:txBody>
-          <a:bodyPr wrap="square" lIns="0" tIns="0" rIns="0" bIns="0" rtlCol="0" anchor="t"/>
-          <a:lstStyle/>
-          <a:p>
-            <a:pPr algn="l" marL="342900" indent="-342900">
-              <a:lnSpc>
-                <a:spcPts val="1620"/>
-              </a:lnSpc>
-              <a:spcAft>
-                <a:spcPts val="300"/>
-              </a:spcAft>
-              <a:buSzPct val="100000"/>
-              <a:buChar char="•"/>
-            </a:pPr>
-            <a:r>
-              <a:rPr lang="en-US" sz="1200" b="1" dirty="0">
-                <a:solidFill>
-                  <a:srgbClr val="1C2833"/>
-                </a:solidFill>
-                <a:latin typeface="Arial" pitchFamily="34" charset="0"/>
-                <a:ea typeface="Arial" pitchFamily="34" charset="-122"/>
-                <a:cs typeface="Arial" pitchFamily="34" charset="-120"/>
-              </a:rPr>
-              <a:t>Two things this distinction does:</a:t>
-            </a:r>
-            <a:endParaRPr lang="en-US" sz="1200" dirty="0"/>
-          </a:p>
-        </p:txBody>
-      </p:sp>
-      <p:sp>
-        <p:nvSpPr>
-          <p:cNvPr id="7" name="Text 5"/>
-          <p:cNvSpPr/>
-          <p:nvPr/>
-        </p:nvSpPr>
-        <p:spPr>
-          <a:xfrm>
-            <a:off x="406301" y="2140446"/>
-            <a:ext cx="8498026" cy="426541"/>
-          </a:xfrm>
-          <a:prstGeom prst="rect">
-            <a:avLst/>
-          </a:prstGeom>
-          <a:noFill/>
-          <a:ln/>
-        </p:spPr>
-        <p:txBody>
-          <a:bodyPr wrap="square" lIns="0" tIns="0" rIns="0" bIns="0" rtlCol="0" anchor="t"/>
-          <a:lstStyle/>
-          <a:p>
-            <a:pPr algn="l" indent="0" marL="0">
-              <a:lnSpc>
-                <a:spcPts val="1680"/>
-              </a:lnSpc>
-              <a:spcBef>
-                <a:spcPts val="300"/>
-              </a:spcBef>
-              <a:spcAft>
-                <a:spcPts val="300"/>
-              </a:spcAft>
-              <a:buNone/>
-            </a:pPr>
-            <a:r>
-              <a:rPr lang="en-US" sz="1200" dirty="0">
-                <a:solidFill>
-                  <a:srgbClr val="1C2833"/>
-                </a:solidFill>
-                <a:latin typeface="Arial" pitchFamily="34" charset="0"/>
-                <a:ea typeface="Arial" pitchFamily="34" charset="-122"/>
-                <a:cs typeface="Arial" pitchFamily="34" charset="-120"/>
-              </a:rPr>
-              <a:t>– It prevents the "I AM vāta" trap. You're not a </a:t>
-            </a:r>
-            <a:pPr algn="l" indent="0" marL="0">
-              <a:lnSpc>
-                <a:spcPts val="1680"/>
-              </a:lnSpc>
-              <a:spcBef>
-                <a:spcPts val="300"/>
-              </a:spcBef>
-              <a:spcAft>
-                <a:spcPts val="300"/>
-              </a:spcAft>
-              <a:buNone/>
-            </a:pPr>
-            <a:r>
-              <a:rPr lang="en-US" sz="1200" i="1" dirty="0">
-                <a:solidFill>
-                  <a:srgbClr val="1C2833"/>
-                </a:solidFill>
-                <a:latin typeface="Arial" pitchFamily="34" charset="0"/>
-                <a:ea typeface="Arial" pitchFamily="34" charset="-122"/>
-                <a:cs typeface="Arial" pitchFamily="34" charset="-120"/>
-              </a:rPr>
-              <a:t>doṣa</a:t>
-            </a:r>
-            <a:pPr algn="l" indent="0" marL="0">
-              <a:lnSpc>
-                <a:spcPts val="1680"/>
-              </a:lnSpc>
-              <a:spcBef>
-                <a:spcPts val="300"/>
-              </a:spcBef>
-              <a:spcAft>
-                <a:spcPts val="300"/>
-              </a:spcAft>
-              <a:buNone/>
-            </a:pPr>
-            <a:r>
-              <a:rPr lang="en-US" sz="1200" dirty="0">
-                <a:solidFill>
-                  <a:srgbClr val="1C2833"/>
-                </a:solidFill>
-                <a:latin typeface="Arial" pitchFamily="34" charset="0"/>
-                <a:ea typeface="Arial" pitchFamily="34" charset="-122"/>
-                <a:cs typeface="Arial" pitchFamily="34" charset="-120"/>
-              </a:rPr>
-              <a:t>. You have a </a:t>
-            </a:r>
-            <a:pPr algn="l" indent="0" marL="0">
-              <a:lnSpc>
-                <a:spcPts val="1680"/>
-              </a:lnSpc>
-              <a:spcBef>
-                <a:spcPts val="300"/>
-              </a:spcBef>
-              <a:spcAft>
-                <a:spcPts val="300"/>
-              </a:spcAft>
-              <a:buNone/>
-            </a:pPr>
-            <a:r>
-              <a:rPr lang="en-US" sz="1200" i="1" dirty="0">
-                <a:solidFill>
-                  <a:srgbClr val="1C2833"/>
-                </a:solidFill>
-                <a:latin typeface="Arial" pitchFamily="34" charset="0"/>
-                <a:ea typeface="Arial" pitchFamily="34" charset="-122"/>
-                <a:cs typeface="Arial" pitchFamily="34" charset="-120"/>
-              </a:rPr>
-              <a:t>tendency</a:t>
-            </a:r>
-            <a:pPr algn="l" indent="0" marL="0">
-              <a:lnSpc>
-                <a:spcPts val="1680"/>
-              </a:lnSpc>
-              <a:spcBef>
-                <a:spcPts val="300"/>
-              </a:spcBef>
-              <a:spcAft>
-                <a:spcPts val="300"/>
-              </a:spcAft>
-              <a:buNone/>
-            </a:pPr>
-            <a:r>
-              <a:rPr lang="en-US" sz="1200" dirty="0">
-                <a:solidFill>
-                  <a:srgbClr val="1C2833"/>
-                </a:solidFill>
-                <a:latin typeface="Arial" pitchFamily="34" charset="0"/>
-                <a:ea typeface="Arial" pitchFamily="34" charset="-122"/>
-                <a:cs typeface="Arial" pitchFamily="34" charset="-120"/>
-              </a:rPr>
-              <a:t>. – It explains why "you have a cold today" doesn't change your constitution — it changes your </a:t>
-            </a:r>
-            <a:pPr algn="l" indent="0" marL="0">
-              <a:lnSpc>
-                <a:spcPts val="1680"/>
-              </a:lnSpc>
-              <a:spcBef>
-                <a:spcPts val="300"/>
-              </a:spcBef>
-              <a:spcAft>
-                <a:spcPts val="300"/>
-              </a:spcAft>
-              <a:buNone/>
-            </a:pPr>
-            <a:r>
-              <a:rPr lang="en-US" sz="1200" i="1" dirty="0">
-                <a:solidFill>
-                  <a:srgbClr val="1C2833"/>
-                </a:solidFill>
-                <a:latin typeface="Arial" pitchFamily="34" charset="0"/>
-                <a:ea typeface="Arial" pitchFamily="34" charset="-122"/>
-                <a:cs typeface="Arial" pitchFamily="34" charset="-120"/>
-              </a:rPr>
-              <a:t>vikṛti</a:t>
-            </a:r>
-            <a:pPr algn="l" indent="0" marL="0">
-              <a:lnSpc>
-                <a:spcPts val="1680"/>
-              </a:lnSpc>
-              <a:spcBef>
-                <a:spcPts val="300"/>
-              </a:spcBef>
-              <a:spcAft>
-                <a:spcPts val="300"/>
-              </a:spcAft>
-              <a:buNone/>
-            </a:pPr>
-            <a:r>
-              <a:rPr lang="en-US" sz="1200" dirty="0">
-                <a:solidFill>
-                  <a:srgbClr val="1C2833"/>
-                </a:solidFill>
-                <a:latin typeface="Arial" pitchFamily="34" charset="0"/>
-                <a:ea typeface="Arial" pitchFamily="34" charset="-122"/>
-                <a:cs typeface="Arial" pitchFamily="34" charset="-120"/>
-              </a:rPr>
-              <a:t>.</a:t>
-            </a:r>
-            <a:endParaRPr lang="en-US" sz="1200" dirty="0"/>
-          </a:p>
-        </p:txBody>
-      </p:sp>
-      <p:sp>
-        <p:nvSpPr>
-          <p:cNvPr id="8" name="Text 6"/>
-          <p:cNvSpPr/>
-          <p:nvPr/>
-        </p:nvSpPr>
-        <p:spPr>
-          <a:xfrm>
-            <a:off x="634901" y="2655838"/>
-            <a:ext cx="8102798" cy="487561"/>
-          </a:xfrm>
-          <a:prstGeom prst="rect">
-            <a:avLst/>
-          </a:prstGeom>
-          <a:noFill/>
-          <a:ln/>
-        </p:spPr>
-        <p:txBody>
-          <a:bodyPr wrap="square" lIns="0" tIns="0" rIns="0" bIns="0" rtlCol="0" anchor="t"/>
-          <a:lstStyle/>
-          <a:p>
-            <a:pPr algn="l" marL="342900" indent="-342900">
-              <a:lnSpc>
-                <a:spcPts val="1620"/>
-              </a:lnSpc>
-              <a:spcAft>
-                <a:spcPts val="300"/>
-              </a:spcAft>
-              <a:buSzPct val="100000"/>
-              <a:buChar char="•"/>
-            </a:pPr>
-            <a:r>
-              <a:rPr lang="en-US" sz="1200" b="1" dirty="0">
-                <a:solidFill>
-                  <a:srgbClr val="1C2833"/>
-                </a:solidFill>
-                <a:latin typeface="Arial" pitchFamily="34" charset="0"/>
-                <a:ea typeface="Arial" pitchFamily="34" charset="-122"/>
-                <a:cs typeface="Arial" pitchFamily="34" charset="-120"/>
-              </a:rPr>
-              <a:t>Most people are dual-dominant.</a:t>
-            </a:r>
-            <a:pPr algn="l" indent="0" marL="0">
-              <a:lnSpc>
-                <a:spcPts val="1620"/>
-              </a:lnSpc>
-              <a:spcAft>
-                <a:spcPts val="300"/>
-              </a:spcAft>
-              <a:buNone/>
-            </a:pPr>
-            <a:r>
-              <a:rPr lang="en-US" sz="1200" dirty="0">
-                <a:solidFill>
-                  <a:srgbClr val="1C2833"/>
-                </a:solidFill>
-                <a:latin typeface="Arial" pitchFamily="34" charset="0"/>
-                <a:ea typeface="Arial" pitchFamily="34" charset="-122"/>
-                <a:cs typeface="Arial" pitchFamily="34" charset="-120"/>
-              </a:rPr>
-              <a:t> Pure single-</a:t>
-            </a:r>
-            <a:pPr algn="l" indent="0" marL="0">
-              <a:lnSpc>
-                <a:spcPts val="1620"/>
-              </a:lnSpc>
-              <a:spcAft>
-                <a:spcPts val="300"/>
-              </a:spcAft>
-              <a:buNone/>
-            </a:pPr>
-            <a:r>
-              <a:rPr lang="en-US" sz="1200" i="1" dirty="0">
-                <a:solidFill>
-                  <a:srgbClr val="1C2833"/>
-                </a:solidFill>
-                <a:latin typeface="Arial" pitchFamily="34" charset="0"/>
-                <a:ea typeface="Arial" pitchFamily="34" charset="-122"/>
-                <a:cs typeface="Arial" pitchFamily="34" charset="-120"/>
-              </a:rPr>
-              <a:t>doṣa</a:t>
-            </a:r>
-            <a:pPr algn="l" indent="0" marL="0">
-              <a:lnSpc>
-                <a:spcPts val="1620"/>
-              </a:lnSpc>
-              <a:spcAft>
-                <a:spcPts val="300"/>
-              </a:spcAft>
-              <a:buNone/>
-            </a:pPr>
-            <a:r>
-              <a:rPr lang="en-US" sz="1200" dirty="0">
-                <a:solidFill>
-                  <a:srgbClr val="1C2833"/>
-                </a:solidFill>
-                <a:latin typeface="Arial" pitchFamily="34" charset="0"/>
-                <a:ea typeface="Arial" pitchFamily="34" charset="-122"/>
-                <a:cs typeface="Arial" pitchFamily="34" charset="-120"/>
-              </a:rPr>
-              <a:t> </a:t>
-            </a:r>
-            <a:pPr algn="l" indent="0" marL="0">
-              <a:lnSpc>
-                <a:spcPts val="1620"/>
-              </a:lnSpc>
-              <a:spcAft>
-                <a:spcPts val="300"/>
-              </a:spcAft>
-              <a:buNone/>
-            </a:pPr>
-            <a:r>
-              <a:rPr lang="en-US" sz="1200" i="1" dirty="0">
-                <a:solidFill>
-                  <a:srgbClr val="1C2833"/>
-                </a:solidFill>
-                <a:latin typeface="Arial" pitchFamily="34" charset="0"/>
-                <a:ea typeface="Arial" pitchFamily="34" charset="-122"/>
-                <a:cs typeface="Arial" pitchFamily="34" charset="-120"/>
-              </a:rPr>
-              <a:t>prakṛti</a:t>
-            </a:r>
-            <a:pPr algn="l" indent="0" marL="0">
-              <a:lnSpc>
-                <a:spcPts val="1620"/>
-              </a:lnSpc>
-              <a:spcAft>
-                <a:spcPts val="300"/>
-              </a:spcAft>
-              <a:buNone/>
-            </a:pPr>
-            <a:r>
-              <a:rPr lang="en-US" sz="1200" dirty="0">
-                <a:solidFill>
-                  <a:srgbClr val="1C2833"/>
-                </a:solidFill>
-                <a:latin typeface="Arial" pitchFamily="34" charset="0"/>
-                <a:ea typeface="Arial" pitchFamily="34" charset="-122"/>
-                <a:cs typeface="Arial" pitchFamily="34" charset="-120"/>
-              </a:rPr>
-              <a:t> is rare. Most people are </a:t>
-            </a:r>
-            <a:pPr algn="l" indent="0" marL="0">
-              <a:lnSpc>
-                <a:spcPts val="1620"/>
-              </a:lnSpc>
-              <a:spcAft>
-                <a:spcPts val="300"/>
-              </a:spcAft>
-              <a:buNone/>
-            </a:pPr>
-            <a:r>
-              <a:rPr lang="en-US" sz="1200" i="1" dirty="0">
-                <a:solidFill>
-                  <a:srgbClr val="1C2833"/>
-                </a:solidFill>
-                <a:latin typeface="Arial" pitchFamily="34" charset="0"/>
-                <a:ea typeface="Arial" pitchFamily="34" charset="-122"/>
-                <a:cs typeface="Arial" pitchFamily="34" charset="-120"/>
-              </a:rPr>
-              <a:t>vāta-pitta</a:t>
-            </a:r>
-            <a:pPr algn="l" indent="0" marL="0">
-              <a:lnSpc>
-                <a:spcPts val="1620"/>
-              </a:lnSpc>
-              <a:spcAft>
-                <a:spcPts val="300"/>
-              </a:spcAft>
-              <a:buNone/>
-            </a:pPr>
-            <a:r>
-              <a:rPr lang="en-US" sz="1200" dirty="0">
-                <a:solidFill>
-                  <a:srgbClr val="1C2833"/>
-                </a:solidFill>
-                <a:latin typeface="Arial" pitchFamily="34" charset="0"/>
-                <a:ea typeface="Arial" pitchFamily="34" charset="-122"/>
-                <a:cs typeface="Arial" pitchFamily="34" charset="-120"/>
-              </a:rPr>
-              <a:t>, </a:t>
-            </a:r>
-            <a:pPr algn="l" indent="0" marL="0">
-              <a:lnSpc>
-                <a:spcPts val="1620"/>
-              </a:lnSpc>
-              <a:spcAft>
-                <a:spcPts val="300"/>
-              </a:spcAft>
-              <a:buNone/>
-            </a:pPr>
-            <a:r>
-              <a:rPr lang="en-US" sz="1200" i="1" dirty="0">
-                <a:solidFill>
-                  <a:srgbClr val="1C2833"/>
-                </a:solidFill>
-                <a:latin typeface="Arial" pitchFamily="34" charset="0"/>
-                <a:ea typeface="Arial" pitchFamily="34" charset="-122"/>
-                <a:cs typeface="Arial" pitchFamily="34" charset="-120"/>
-              </a:rPr>
-              <a:t>pitta-kapha</a:t>
-            </a:r>
-            <a:pPr algn="l" indent="0" marL="0">
-              <a:lnSpc>
-                <a:spcPts val="1620"/>
-              </a:lnSpc>
-              <a:spcAft>
-                <a:spcPts val="300"/>
-              </a:spcAft>
-              <a:buNone/>
-            </a:pPr>
-            <a:r>
-              <a:rPr lang="en-US" sz="1200" dirty="0">
-                <a:solidFill>
-                  <a:srgbClr val="1C2833"/>
-                </a:solidFill>
-                <a:latin typeface="Arial" pitchFamily="34" charset="0"/>
-                <a:ea typeface="Arial" pitchFamily="34" charset="-122"/>
-                <a:cs typeface="Arial" pitchFamily="34" charset="-120"/>
-              </a:rPr>
-              <a:t>, or </a:t>
-            </a:r>
-            <a:pPr algn="l" indent="0" marL="0">
-              <a:lnSpc>
-                <a:spcPts val="1620"/>
-              </a:lnSpc>
-              <a:spcAft>
-                <a:spcPts val="300"/>
-              </a:spcAft>
-              <a:buNone/>
-            </a:pPr>
-            <a:r>
-              <a:rPr lang="en-US" sz="1200" i="1" dirty="0">
-                <a:solidFill>
-                  <a:srgbClr val="1C2833"/>
-                </a:solidFill>
-                <a:latin typeface="Arial" pitchFamily="34" charset="0"/>
-                <a:ea typeface="Arial" pitchFamily="34" charset="-122"/>
-                <a:cs typeface="Arial" pitchFamily="34" charset="-120"/>
-              </a:rPr>
-              <a:t>vāta-kapha</a:t>
-            </a:r>
-            <a:pPr algn="l" indent="0" marL="0">
-              <a:lnSpc>
-                <a:spcPts val="1620"/>
-              </a:lnSpc>
-              <a:spcAft>
-                <a:spcPts val="300"/>
-              </a:spcAft>
-              <a:buNone/>
-            </a:pPr>
-            <a:r>
-              <a:rPr lang="en-US" sz="1200" dirty="0">
-                <a:solidFill>
-                  <a:srgbClr val="1C2833"/>
-                </a:solidFill>
-                <a:latin typeface="Arial" pitchFamily="34" charset="0"/>
-                <a:ea typeface="Arial" pitchFamily="34" charset="-122"/>
-                <a:cs typeface="Arial" pitchFamily="34" charset="-120"/>
-              </a:rPr>
-              <a:t>. A few are roughly balanced across all three (</a:t>
-            </a:r>
-            <a:pPr algn="l" indent="0" marL="0">
-              <a:lnSpc>
-                <a:spcPts val="1620"/>
-              </a:lnSpc>
-              <a:spcAft>
-                <a:spcPts val="300"/>
-              </a:spcAft>
-              <a:buNone/>
-            </a:pPr>
-            <a:r>
-              <a:rPr lang="en-US" sz="1200" i="1" dirty="0">
-                <a:solidFill>
-                  <a:srgbClr val="1C2833"/>
-                </a:solidFill>
-                <a:latin typeface="Arial" pitchFamily="34" charset="0"/>
-                <a:ea typeface="Arial" pitchFamily="34" charset="-122"/>
-                <a:cs typeface="Arial" pitchFamily="34" charset="-120"/>
-              </a:rPr>
-              <a:t>sama-prakṛti</a:t>
-            </a:r>
-            <a:pPr algn="l" indent="0" marL="0">
-              <a:lnSpc>
-                <a:spcPts val="1620"/>
-              </a:lnSpc>
-              <a:spcAft>
-                <a:spcPts val="300"/>
-              </a:spcAft>
-              <a:buNone/>
-            </a:pPr>
-            <a:r>
-              <a:rPr lang="en-US" sz="1200" dirty="0">
-                <a:solidFill>
-                  <a:srgbClr val="1C2833"/>
-                </a:solidFill>
-                <a:latin typeface="Arial" pitchFamily="34" charset="0"/>
-                <a:ea typeface="Arial" pitchFamily="34" charset="-122"/>
-                <a:cs typeface="Arial" pitchFamily="34" charset="-120"/>
-              </a:rPr>
-              <a:t> — rarest).</a:t>
-            </a:r>
-            <a:endParaRPr lang="en-US" sz="1200" dirty="0"/>
-          </a:p>
-        </p:txBody>
-      </p:sp>
-      <p:sp>
-        <p:nvSpPr>
-          <p:cNvPr id="9" name="Text 7"/>
-          <p:cNvSpPr/>
-          <p:nvPr/>
-        </p:nvSpPr>
-        <p:spPr>
-          <a:xfrm>
-            <a:off x="634901" y="3244900"/>
-            <a:ext cx="8102798" cy="693241"/>
-          </a:xfrm>
-          <a:prstGeom prst="rect">
-            <a:avLst/>
-          </a:prstGeom>
-          <a:noFill/>
-          <a:ln/>
-        </p:spPr>
-        <p:txBody>
-          <a:bodyPr wrap="square" lIns="0" tIns="0" rIns="0" bIns="0" rtlCol="0" anchor="t"/>
-          <a:lstStyle/>
-          <a:p>
-            <a:pPr algn="l" marL="342900" indent="-342900">
-              <a:lnSpc>
-                <a:spcPts val="1620"/>
-              </a:lnSpc>
-              <a:spcAft>
-                <a:spcPts val="300"/>
-              </a:spcAft>
-              <a:buSzPct val="100000"/>
-              <a:buChar char="•"/>
-            </a:pPr>
-            <a:r>
-              <a:rPr lang="en-US" sz="1200" b="1" dirty="0">
-                <a:solidFill>
-                  <a:srgbClr val="1C2833"/>
-                </a:solidFill>
-                <a:latin typeface="Arial" pitchFamily="34" charset="0"/>
-                <a:ea typeface="Arial" pitchFamily="34" charset="-122"/>
-                <a:cs typeface="Arial" pitchFamily="34" charset="-120"/>
-              </a:rPr>
-              <a:t>Source paraphrase.</a:t>
-            </a:r>
-            <a:pPr algn="l" indent="0" marL="0">
-              <a:lnSpc>
-                <a:spcPts val="1620"/>
-              </a:lnSpc>
-              <a:spcAft>
-                <a:spcPts val="300"/>
-              </a:spcAft>
-              <a:buNone/>
-            </a:pPr>
-            <a:r>
-              <a:rPr lang="en-US" sz="1200" dirty="0">
-                <a:solidFill>
-                  <a:srgbClr val="1C2833"/>
-                </a:solidFill>
-                <a:latin typeface="Arial" pitchFamily="34" charset="0"/>
-                <a:ea typeface="Arial" pitchFamily="34" charset="-122"/>
-                <a:cs typeface="Arial" pitchFamily="34" charset="-120"/>
-              </a:rPr>
-              <a:t> </a:t>
-            </a:r>
-            <a:pPr algn="l" indent="0" marL="0">
-              <a:lnSpc>
-                <a:spcPts val="1620"/>
-              </a:lnSpc>
-              <a:spcAft>
-                <a:spcPts val="300"/>
-              </a:spcAft>
-              <a:buNone/>
-            </a:pPr>
-            <a:r>
-              <a:rPr lang="en-US" sz="1200" i="1" dirty="0">
-                <a:solidFill>
-                  <a:srgbClr val="1C2833"/>
-                </a:solidFill>
-                <a:latin typeface="Arial" pitchFamily="34" charset="0"/>
-                <a:ea typeface="Arial" pitchFamily="34" charset="-122"/>
-                <a:cs typeface="Arial" pitchFamily="34" charset="-120"/>
-              </a:rPr>
-              <a:t>"Classical Ayurveda holds that prakṛti is set at conception by the relative balance of the doṣas at that time, with influences from the mother's diet and lifestyle during pregnancy."</a:t>
-            </a:r>
-            <a:pPr algn="l" indent="0" marL="0">
-              <a:lnSpc>
-                <a:spcPts val="1620"/>
-              </a:lnSpc>
-              <a:spcAft>
-                <a:spcPts val="300"/>
-              </a:spcAft>
-              <a:buNone/>
-            </a:pPr>
-            <a:r>
-              <a:rPr lang="en-US" sz="1200" dirty="0">
-                <a:solidFill>
-                  <a:srgbClr val="1C2833"/>
-                </a:solidFill>
-                <a:latin typeface="Arial" pitchFamily="34" charset="0"/>
-                <a:ea typeface="Arial" pitchFamily="34" charset="-122"/>
-                <a:cs typeface="Arial" pitchFamily="34" charset="-120"/>
-              </a:rPr>
-              <a:t> (Paraphrased from Caraka Saṁhitā, </a:t>
-            </a:r>
-            <a:pPr algn="l" indent="0" marL="0">
-              <a:lnSpc>
-                <a:spcPts val="1620"/>
-              </a:lnSpc>
-              <a:spcAft>
-                <a:spcPts val="300"/>
-              </a:spcAft>
-              <a:buNone/>
-            </a:pPr>
-            <a:r>
-              <a:rPr lang="en-US" sz="1200" i="1" dirty="0">
-                <a:solidFill>
-                  <a:srgbClr val="1C2833"/>
-                </a:solidFill>
-                <a:latin typeface="Arial" pitchFamily="34" charset="0"/>
-                <a:ea typeface="Arial" pitchFamily="34" charset="-122"/>
-                <a:cs typeface="Arial" pitchFamily="34" charset="-120"/>
-              </a:rPr>
-              <a:t>Vimānasthāna</a:t>
-            </a:r>
-            <a:pPr algn="l" indent="0" marL="0">
-              <a:lnSpc>
-                <a:spcPts val="1620"/>
-              </a:lnSpc>
-              <a:spcAft>
-                <a:spcPts val="300"/>
-              </a:spcAft>
-              <a:buNone/>
-            </a:pPr>
-            <a:r>
-              <a:rPr lang="en-US" sz="1200" dirty="0">
-                <a:solidFill>
-                  <a:srgbClr val="1C2833"/>
-                </a:solidFill>
-                <a:latin typeface="Arial" pitchFamily="34" charset="0"/>
-                <a:ea typeface="Arial" pitchFamily="34" charset="-122"/>
-                <a:cs typeface="Arial" pitchFamily="34" charset="-120"/>
-              </a:rPr>
-              <a:t> 8 — discussed in fuller detail at Senior band.)</a:t>
-            </a:r>
-            <a:endParaRPr lang="en-US" sz="1200" dirty="0"/>
-          </a:p>
-        </p:txBody>
-      </p:sp>
-      <p:sp>
-        <p:nvSpPr>
-          <p:cNvPr id="10" name="Text 8"/>
-          <p:cNvSpPr/>
-          <p:nvPr/>
-        </p:nvSpPr>
-        <p:spPr>
-          <a:xfrm>
-            <a:off x="634901" y="4039642"/>
-            <a:ext cx="8102798" cy="281880"/>
-          </a:xfrm>
-          <a:prstGeom prst="rect">
-            <a:avLst/>
-          </a:prstGeom>
-          <a:noFill/>
-          <a:ln/>
-        </p:spPr>
-        <p:txBody>
-          <a:bodyPr wrap="square" lIns="0" tIns="0" rIns="0" bIns="0" rtlCol="0" anchor="t"/>
-          <a:lstStyle/>
-          <a:p>
-            <a:pPr algn="l" marL="342900" indent="-342900">
-              <a:lnSpc>
-                <a:spcPts val="1620"/>
-              </a:lnSpc>
-              <a:spcAft>
-                <a:spcPts val="300"/>
-              </a:spcAft>
-              <a:buSzPct val="100000"/>
-              <a:buChar char="•"/>
-            </a:pPr>
-            <a:r>
-              <a:rPr lang="en-US" sz="1200" b="1" dirty="0">
-                <a:solidFill>
-                  <a:srgbClr val="1C2833"/>
-                </a:solidFill>
-                <a:latin typeface="Arial" pitchFamily="34" charset="0"/>
-                <a:ea typeface="Arial" pitchFamily="34" charset="-122"/>
-                <a:cs typeface="Arial" pitchFamily="34" charset="-120"/>
-              </a:rPr>
-              <a:t>The safety statement</a:t>
-            </a:r>
-            <a:pPr algn="l" indent="0" marL="0">
-              <a:lnSpc>
-                <a:spcPts val="1620"/>
-              </a:lnSpc>
-              <a:spcAft>
-                <a:spcPts val="300"/>
-              </a:spcAft>
-              <a:buNone/>
-            </a:pPr>
-            <a:r>
-              <a:rPr lang="en-US" sz="1200" dirty="0">
-                <a:solidFill>
-                  <a:srgbClr val="1C2833"/>
-                </a:solidFill>
-                <a:latin typeface="Arial" pitchFamily="34" charset="0"/>
-                <a:ea typeface="Arial" pitchFamily="34" charset="-122"/>
-                <a:cs typeface="Arial" pitchFamily="34" charset="-120"/>
-              </a:rPr>
-              <a:t> (read aloud, every student copies into notebook):</a:t>
-            </a:r>
-            <a:endParaRPr lang="en-US" sz="1200" dirty="0"/>
-          </a:p>
-        </p:txBody>
-      </p:sp>
-      <p:sp>
-        <p:nvSpPr>
-          <p:cNvPr id="11" name="Text 9"/>
-          <p:cNvSpPr/>
-          <p:nvPr/>
-        </p:nvSpPr>
-        <p:spPr>
-          <a:xfrm>
-            <a:off x="406301" y="4410373"/>
-            <a:ext cx="8498026" cy="426541"/>
-          </a:xfrm>
-          <a:prstGeom prst="rect">
-            <a:avLst/>
-          </a:prstGeom>
-          <a:noFill/>
-          <a:ln/>
-        </p:spPr>
-        <p:txBody>
-          <a:bodyPr wrap="square" lIns="0" tIns="0" rIns="0" bIns="0" rtlCol="0" anchor="t"/>
-          <a:lstStyle/>
-          <a:p>
-            <a:pPr algn="l" indent="0" marL="0">
-              <a:lnSpc>
-                <a:spcPts val="1680"/>
-              </a:lnSpc>
-              <a:spcBef>
-                <a:spcPts val="300"/>
-              </a:spcBef>
-              <a:spcAft>
-                <a:spcPts val="300"/>
-              </a:spcAft>
-              <a:buNone/>
-            </a:pPr>
-            <a:r>
-              <a:rPr lang="en-US" sz="1200" dirty="0">
-                <a:solidFill>
-                  <a:srgbClr val="1C2833"/>
-                </a:solidFill>
-                <a:latin typeface="Arial" pitchFamily="34" charset="0"/>
-                <a:ea typeface="Arial" pitchFamily="34" charset="-122"/>
-                <a:cs typeface="Arial" pitchFamily="34" charset="-120"/>
-              </a:rPr>
-              <a:t>&gt; </a:t>
-            </a:r>
-            <a:pPr algn="l" indent="0" marL="0">
-              <a:lnSpc>
-                <a:spcPts val="1680"/>
-              </a:lnSpc>
-              <a:spcBef>
-                <a:spcPts val="300"/>
-              </a:spcBef>
-              <a:spcAft>
-                <a:spcPts val="300"/>
-              </a:spcAft>
-              <a:buNone/>
-            </a:pPr>
-            <a:r>
-              <a:rPr lang="en-US" sz="1200" b="1" dirty="0">
-                <a:solidFill>
-                  <a:srgbClr val="1C2833"/>
-                </a:solidFill>
-                <a:latin typeface="Arial" pitchFamily="34" charset="0"/>
-                <a:ea typeface="Arial" pitchFamily="34" charset="-122"/>
-                <a:cs typeface="Arial" pitchFamily="34" charset="-120"/>
-              </a:rPr>
-              <a:t>This worksheet is for noticing, not diagnosis. I am not "a Vāta" or "a Pitta." I have tendencies. If I have a medical concern, I will see a doctor — not my notebook.</a:t>
-            </a:r>
-            <a:endParaRPr lang="en-US" sz="1200" dirty="0"/>
-          </a:p>
-        </p:txBody>
-      </p:sp>
-      <p:sp>
-        <p:nvSpPr>
-          <p:cNvPr id="12" name="Text 10"/>
-          <p:cNvSpPr/>
-          <p:nvPr/>
-        </p:nvSpPr>
-        <p:spPr>
-          <a:xfrm>
-            <a:off x="406301" y="4989314"/>
+            <a:off x="406301" y="4434929"/>
             <a:ext cx="8498026" cy="213271"/>
           </a:xfrm>
           <a:prstGeom prst="rect">
@@ -5463,7 +7394,7 @@
                 <a:ea typeface="Georgia" pitchFamily="34" charset="-122"/>
                 <a:cs typeface="Georgia" pitchFamily="34" charset="-120"/>
               </a:rPr>
-              <a:t>Wrap-up (5 min)</a:t>
+              <a:t>Core (15 min)</a:t>
             </a:r>
             <a:endParaRPr lang="en-US" sz="1800" dirty="0"/>
           </a:p>
@@ -5478,7 +7409,7 @@
         <p:spPr>
           <a:xfrm>
             <a:off x="634901" y="883593"/>
-            <a:ext cx="8102798" cy="300930"/>
+            <a:ext cx="8102798" cy="281880"/>
           </a:xfrm>
           <a:prstGeom prst="rect">
             <a:avLst/>
@@ -5500,16 +7431,25 @@
               <a:buSzPct val="100000"/>
               <a:buChar char="•"/>
             </a:pPr>
-            <a:r>
-              <a:rPr lang="en-US" sz="1200" b="1" dirty="0">
-                <a:solidFill>
-                  <a:srgbClr val="1C2833"/>
-                </a:solidFill>
-                <a:latin typeface="Arial" pitchFamily="34" charset="0"/>
-                <a:ea typeface="Arial" pitchFamily="34" charset="-122"/>
-                <a:cs typeface="Arial" pitchFamily="34" charset="-120"/>
-              </a:rPr>
-              <a:t>Formative quiz on a slip of paper (5 questions, 3 min)</a:t>
+            <a:pPr algn="l" indent="0" marL="0">
+              <a:lnSpc>
+                <a:spcPts val="1620"/>
+              </a:lnSpc>
+              <a:spcAft>
+                <a:spcPts val="300"/>
+              </a:spcAft>
+              <a:buNone/>
+            </a:pPr>
+            <a:r>
+              <a:rPr lang="en-US" sz="1200" i="1" dirty="0">
+                <a:solidFill>
+                  <a:srgbClr val="1C2833"/>
+                </a:solidFill>
+                <a:latin typeface="Arial" pitchFamily="34" charset="0"/>
+                <a:ea typeface="Arial" pitchFamily="34" charset="-122"/>
+                <a:cs typeface="Arial" pitchFamily="34" charset="-120"/>
+              </a:rPr>
+              <a:t>The</a:t>
             </a:r>
             <a:pPr algn="l" indent="0" marL="0">
               <a:lnSpc>
@@ -5529,7 +7469,27 @@
                 <a:ea typeface="Arial" pitchFamily="34" charset="-122"/>
                 <a:cs typeface="Arial" pitchFamily="34" charset="-120"/>
               </a:rPr>
-              <a:t> — see </a:t>
+              <a:t>prakṛti</a:t>
+            </a:r>
+            <a:pPr algn="l" indent="0" marL="0">
+              <a:lnSpc>
+                <a:spcPts val="1620"/>
+              </a:lnSpc>
+              <a:spcAft>
+                <a:spcPts val="300"/>
+              </a:spcAft>
+              <a:buNone/>
+            </a:pPr>
+            <a:r>
+              <a:rPr lang="en-US" sz="1200" i="1" dirty="0">
+                <a:solidFill>
+                  <a:srgbClr val="1C2833"/>
+                </a:solidFill>
+                <a:latin typeface="Arial" pitchFamily="34" charset="0"/>
+                <a:ea typeface="Arial" pitchFamily="34" charset="-122"/>
+                <a:cs typeface="Arial" pitchFamily="34" charset="-120"/>
+              </a:rPr>
+              <a:t> vs</a:t>
             </a:r>
             <a:pPr algn="l" indent="0" marL="0">
               <a:lnSpc>
@@ -5549,7 +7509,27 @@
                 <a:ea typeface="Arial" pitchFamily="34" charset="-122"/>
                 <a:cs typeface="Arial" pitchFamily="34" charset="-120"/>
               </a:rPr>
-              <a:t>quizzes/formative.md</a:t>
+              <a:t>vikṛti</a:t>
+            </a:r>
+            <a:pPr algn="l" indent="0" marL="0">
+              <a:lnSpc>
+                <a:spcPts val="1620"/>
+              </a:lnSpc>
+              <a:spcAft>
+                <a:spcPts val="300"/>
+              </a:spcAft>
+              <a:buNone/>
+            </a:pPr>
+            <a:r>
+              <a:rPr lang="en-US" sz="1200" i="1" dirty="0">
+                <a:solidFill>
+                  <a:srgbClr val="1C2833"/>
+                </a:solidFill>
+                <a:latin typeface="Arial" pitchFamily="34" charset="0"/>
+                <a:ea typeface="Arial" pitchFamily="34" charset="-122"/>
+                <a:cs typeface="Arial" pitchFamily="34" charset="-120"/>
+              </a:rPr>
+              <a:t> distinction — write the analogy on the board.</a:t>
             </a:r>
             <a:pPr algn="l" indent="0" marL="0">
               <a:lnSpc>
@@ -5569,7 +7549,7 @@
                 <a:ea typeface="Arial" pitchFamily="34" charset="-122"/>
                 <a:cs typeface="Arial" pitchFamily="34" charset="-120"/>
               </a:rPr>
-              <a:t> Part A.</a:t>
+              <a:t>*</a:t>
             </a:r>
             <a:endParaRPr lang="en-US" sz="1200" dirty="0"/>
           </a:p>
@@ -5583,8 +7563,61 @@
         </p:nvSpPr>
         <p:spPr>
           <a:xfrm>
-            <a:off x="406301" y="1273373"/>
-            <a:ext cx="8498026" cy="213271"/>
+            <a:off x="406301" y="1266974"/>
+            <a:ext cx="8331398" cy="1073944"/>
+          </a:xfrm>
+          <a:prstGeom prst="rect">
+            <a:avLst/>
+          </a:prstGeom>
+          <a:solidFill>
+            <a:srgbClr val="F4F8F9"/>
+          </a:solidFill>
+          <a:ln/>
+        </p:spPr>
+        <p:txBody>
+          <a:bodyPr wrap="square" rtlCol="0" anchor="ctr"/>
+          <a:lstStyle/>
+          <a:p>
+            <a:pPr indent="0" marL="0">
+              <a:buNone/>
+            </a:pPr>
+            <a:endParaRPr lang="en-US" dirty="0"/>
+          </a:p>
+        </p:txBody>
+      </p:sp>
+      <p:sp>
+        <p:nvSpPr>
+          <p:cNvPr id="6" name="Shape 4"/>
+          <p:cNvSpPr/>
+          <p:nvPr/>
+        </p:nvSpPr>
+        <p:spPr>
+          <a:xfrm>
+            <a:off x="434876" y="1266974"/>
+            <a:ext cx="0" cy="1073944"/>
+          </a:xfrm>
+          <a:prstGeom prst="line">
+            <a:avLst/>
+          </a:prstGeom>
+          <a:noFill/>
+          <a:ln w="57150">
+            <a:solidFill>
+              <a:srgbClr val="FE4447"/>
+            </a:solidFill>
+            <a:prstDash val="solid"/>
+          </a:ln>
+        </p:spPr>
+      </p:sp>
+      <p:sp>
+        <p:nvSpPr>
+          <p:cNvPr id="7" name="Text 5"/>
+          <p:cNvSpPr/>
+          <p:nvPr/>
+        </p:nvSpPr>
+        <p:spPr>
+          <a:xfrm>
+            <a:off x="692051" y="1457474"/>
+            <a:ext cx="7973389" cy="692944"/>
           </a:xfrm>
           <a:prstGeom prst="rect">
             <a:avLst/>
@@ -5598,7 +7631,7 @@
           <a:p>
             <a:pPr algn="l" indent="0" marL="0">
               <a:lnSpc>
-                <a:spcPts val="1680"/>
+                <a:spcPts val="1820"/>
               </a:lnSpc>
               <a:spcBef>
                 <a:spcPts val="300"/>
@@ -5609,19 +7642,19 @@
               <a:buNone/>
             </a:pPr>
             <a:r>
-              <a:rPr lang="en-US" sz="1200" dirty="0">
-                <a:solidFill>
-                  <a:srgbClr val="1C2833"/>
-                </a:solidFill>
-                <a:latin typeface="Arial" pitchFamily="34" charset="0"/>
-                <a:ea typeface="Arial" pitchFamily="34" charset="-122"/>
-                <a:cs typeface="Arial" pitchFamily="34" charset="-120"/>
-              </a:rPr>
-              <a:t>– Collect. – Preview Day 4: </a:t>
-            </a:r>
-            <a:pPr algn="l" indent="0" marL="0">
-              <a:lnSpc>
-                <a:spcPts val="1680"/>
+              <a:rPr lang="en-US" sz="1300" dirty="0">
+                <a:solidFill>
+                  <a:srgbClr val="1C2833"/>
+                </a:solidFill>
+                <a:latin typeface="Georgia" pitchFamily="34" charset="0"/>
+                <a:ea typeface="Georgia" pitchFamily="34" charset="-122"/>
+                <a:cs typeface="Georgia" pitchFamily="34" charset="-120"/>
+              </a:rPr>
+              <a:t>Think of yourself like a song. </a:t>
+            </a:r>
+            <a:pPr algn="l" indent="0" marL="0">
+              <a:lnSpc>
+                <a:spcPts val="1820"/>
               </a:lnSpc>
               <a:spcBef>
                 <a:spcPts val="300"/>
@@ -5632,23 +7665,184 @@
               <a:buNone/>
             </a:pPr>
             <a:r>
-              <a:rPr lang="en-US" sz="1200" i="1" dirty="0">
-                <a:solidFill>
-                  <a:srgbClr val="1C2833"/>
-                </a:solidFill>
-                <a:latin typeface="Arial" pitchFamily="34" charset="0"/>
-                <a:ea typeface="Arial" pitchFamily="34" charset="-122"/>
-                <a:cs typeface="Arial" pitchFamily="34" charset="-120"/>
-              </a:rPr>
-              <a:t>"Tomorrow — sort 30 qualities into three buckets in a hands-on game."</a:t>
-            </a:r>
-            <a:endParaRPr lang="en-US" sz="1200" dirty="0"/>
-          </a:p>
-        </p:txBody>
-      </p:sp>
-      <p:sp>
-        <p:nvSpPr>
-          <p:cNvPr id="6" name="Text 4"/>
+              <a:rPr lang="en-US" sz="1300" i="1" dirty="0">
+                <a:solidFill>
+                  <a:srgbClr val="1C2833"/>
+                </a:solidFill>
+                <a:latin typeface="Georgia" pitchFamily="34" charset="0"/>
+                <a:ea typeface="Georgia" pitchFamily="34" charset="-122"/>
+                <a:cs typeface="Georgia" pitchFamily="34" charset="-120"/>
+              </a:rPr>
+              <a:t>Prakṛti</a:t>
+            </a:r>
+            <a:pPr algn="l" indent="0" marL="0">
+              <a:lnSpc>
+                <a:spcPts val="1820"/>
+              </a:lnSpc>
+              <a:spcBef>
+                <a:spcPts val="300"/>
+              </a:spcBef>
+              <a:spcAft>
+                <a:spcPts val="300"/>
+              </a:spcAft>
+              <a:buNone/>
+            </a:pPr>
+            <a:r>
+              <a:rPr lang="en-US" sz="1300" dirty="0">
+                <a:solidFill>
+                  <a:srgbClr val="1C2833"/>
+                </a:solidFill>
+                <a:latin typeface="Georgia" pitchFamily="34" charset="0"/>
+                <a:ea typeface="Georgia" pitchFamily="34" charset="-122"/>
+                <a:cs typeface="Georgia" pitchFamily="34" charset="-120"/>
+              </a:rPr>
+              <a:t> is the </a:t>
+            </a:r>
+            <a:pPr algn="l" indent="0" marL="0">
+              <a:lnSpc>
+                <a:spcPts val="1820"/>
+              </a:lnSpc>
+              <a:spcBef>
+                <a:spcPts val="300"/>
+              </a:spcBef>
+              <a:spcAft>
+                <a:spcPts val="300"/>
+              </a:spcAft>
+              <a:buNone/>
+            </a:pPr>
+            <a:r>
+              <a:rPr lang="en-US" sz="1300" b="1" i="1" dirty="0">
+                <a:solidFill>
+                  <a:srgbClr val="1C2833"/>
+                </a:solidFill>
+                <a:latin typeface="Georgia" pitchFamily="34" charset="0"/>
+                <a:ea typeface="Georgia" pitchFamily="34" charset="-122"/>
+                <a:cs typeface="Georgia" pitchFamily="34" charset="-120"/>
+              </a:rPr>
+              <a:t>key</a:t>
+            </a:r>
+            <a:pPr algn="l" indent="0" marL="0">
+              <a:lnSpc>
+                <a:spcPts val="1820"/>
+              </a:lnSpc>
+              <a:spcBef>
+                <a:spcPts val="300"/>
+              </a:spcBef>
+              <a:spcAft>
+                <a:spcPts val="300"/>
+              </a:spcAft>
+              <a:buNone/>
+            </a:pPr>
+            <a:r>
+              <a:rPr lang="en-US" sz="1300" dirty="0">
+                <a:solidFill>
+                  <a:srgbClr val="1C2833"/>
+                </a:solidFill>
+                <a:latin typeface="Georgia" pitchFamily="34" charset="0"/>
+                <a:ea typeface="Georgia" pitchFamily="34" charset="-122"/>
+                <a:cs typeface="Georgia" pitchFamily="34" charset="-120"/>
+              </a:rPr>
+              <a:t> — the underlying note your life is set in. </a:t>
+            </a:r>
+            <a:pPr algn="l" indent="0" marL="0">
+              <a:lnSpc>
+                <a:spcPts val="1820"/>
+              </a:lnSpc>
+              <a:spcBef>
+                <a:spcPts val="300"/>
+              </a:spcBef>
+              <a:spcAft>
+                <a:spcPts val="300"/>
+              </a:spcAft>
+              <a:buNone/>
+            </a:pPr>
+            <a:r>
+              <a:rPr lang="en-US" sz="1300" i="1" dirty="0">
+                <a:solidFill>
+                  <a:srgbClr val="1C2833"/>
+                </a:solidFill>
+                <a:latin typeface="Georgia" pitchFamily="34" charset="0"/>
+                <a:ea typeface="Georgia" pitchFamily="34" charset="-122"/>
+                <a:cs typeface="Georgia" pitchFamily="34" charset="-120"/>
+              </a:rPr>
+              <a:t>Vikṛti</a:t>
+            </a:r>
+            <a:pPr algn="l" indent="0" marL="0">
+              <a:lnSpc>
+                <a:spcPts val="1820"/>
+              </a:lnSpc>
+              <a:spcBef>
+                <a:spcPts val="300"/>
+              </a:spcBef>
+              <a:spcAft>
+                <a:spcPts val="300"/>
+              </a:spcAft>
+              <a:buNone/>
+            </a:pPr>
+            <a:r>
+              <a:rPr lang="en-US" sz="1300" dirty="0">
+                <a:solidFill>
+                  <a:srgbClr val="1C2833"/>
+                </a:solidFill>
+                <a:latin typeface="Georgia" pitchFamily="34" charset="0"/>
+                <a:ea typeface="Georgia" pitchFamily="34" charset="-122"/>
+                <a:cs typeface="Georgia" pitchFamily="34" charset="-120"/>
+              </a:rPr>
+              <a:t> is </a:t>
+            </a:r>
+            <a:pPr algn="l" indent="0" marL="0">
+              <a:lnSpc>
+                <a:spcPts val="1820"/>
+              </a:lnSpc>
+              <a:spcBef>
+                <a:spcPts val="300"/>
+              </a:spcBef>
+              <a:spcAft>
+                <a:spcPts val="300"/>
+              </a:spcAft>
+              <a:buNone/>
+            </a:pPr>
+            <a:r>
+              <a:rPr lang="en-US" sz="1300" b="1" i="1" dirty="0">
+                <a:solidFill>
+                  <a:srgbClr val="1C2833"/>
+                </a:solidFill>
+                <a:latin typeface="Georgia" pitchFamily="34" charset="0"/>
+                <a:ea typeface="Georgia" pitchFamily="34" charset="-122"/>
+                <a:cs typeface="Georgia" pitchFamily="34" charset="-120"/>
+              </a:rPr>
+              <a:t>today's notes</a:t>
+            </a:r>
+            <a:pPr algn="l" indent="0" marL="0">
+              <a:lnSpc>
+                <a:spcPts val="1820"/>
+              </a:lnSpc>
+              <a:spcBef>
+                <a:spcPts val="300"/>
+              </a:spcBef>
+              <a:spcAft>
+                <a:spcPts val="300"/>
+              </a:spcAft>
+              <a:buNone/>
+            </a:pPr>
+            <a:r>
+              <a:rPr lang="en-US" sz="1300" dirty="0">
+                <a:solidFill>
+                  <a:srgbClr val="1C2833"/>
+                </a:solidFill>
+                <a:latin typeface="Georgia" pitchFamily="34" charset="0"/>
+                <a:ea typeface="Georgia" pitchFamily="34" charset="-122"/>
+                <a:cs typeface="Georgia" pitchFamily="34" charset="-120"/>
+              </a:rPr>
+              <a:t> — what you're actually playing right now. The same song can be played calmly or frantically. The key doesn't change. The notes do.</a:t>
+            </a:r>
+            <a:endParaRPr lang="en-US" sz="1300" dirty="0"/>
+          </a:p>
+        </p:txBody>
+      </p:sp>
+      <p:sp>
+        <p:nvSpPr>
+          <p:cNvPr id="8" name="Text 6"/>
           <p:cNvSpPr/>
           <p:nvPr/>
         </p:nvSpPr>
@@ -5798,7 +7992,7 @@
                 <a:ea typeface="Georgia" pitchFamily="34" charset="-122"/>
                 <a:cs typeface="Georgia" pitchFamily="34" charset="-120"/>
               </a:rPr>
-              <a:t>Homework</a:t>
+              <a:t>Core (15 min) (cont.)</a:t>
             </a:r>
             <a:endParaRPr lang="en-US" sz="1800" dirty="0"/>
           </a:p>
@@ -5812,8 +8006,8 @@
         </p:nvSpPr>
         <p:spPr>
           <a:xfrm>
-            <a:off x="406301" y="870942"/>
-            <a:ext cx="8498026" cy="426541"/>
+            <a:off x="634901" y="883593"/>
+            <a:ext cx="8102798" cy="281880"/>
           </a:xfrm>
           <a:prstGeom prst="rect">
             <a:avLst/>
@@ -5825,17 +8019,61 @@
           <a:bodyPr wrap="square" lIns="0" tIns="0" rIns="0" bIns="0" rtlCol="0" anchor="t"/>
           <a:lstStyle/>
           <a:p>
-            <a:pPr algn="l" indent="0" marL="0">
-              <a:lnSpc>
-                <a:spcPts val="1680"/>
-              </a:lnSpc>
-              <a:spcBef>
-                <a:spcPts val="300"/>
-              </a:spcBef>
-              <a:spcAft>
-                <a:spcPts val="300"/>
-              </a:spcAft>
-              <a:buNone/>
+            <a:pPr algn="l" marL="342900" indent="-342900">
+              <a:lnSpc>
+                <a:spcPts val="1620"/>
+              </a:lnSpc>
+              <a:spcAft>
+                <a:spcPts val="300"/>
+              </a:spcAft>
+              <a:buSzPct val="100000"/>
+              <a:buChar char="•"/>
+            </a:pPr>
+            <a:r>
+              <a:rPr lang="en-US" sz="1200" b="1" dirty="0">
+                <a:solidFill>
+                  <a:srgbClr val="1C2833"/>
+                </a:solidFill>
+                <a:latin typeface="Arial" pitchFamily="34" charset="0"/>
+                <a:ea typeface="Arial" pitchFamily="34" charset="-122"/>
+                <a:cs typeface="Arial" pitchFamily="34" charset="-120"/>
+              </a:rPr>
+              <a:t>Two things this distinction does:</a:t>
+            </a:r>
+            <a:endParaRPr lang="en-US" sz="1200" dirty="0"/>
+          </a:p>
+        </p:txBody>
+      </p:sp>
+      <p:sp>
+        <p:nvSpPr>
+          <p:cNvPr id="5" name="Text 3"/>
+          <p:cNvSpPr/>
+          <p:nvPr/>
+        </p:nvSpPr>
+        <p:spPr>
+          <a:xfrm>
+            <a:off x="634901" y="1266974"/>
+            <a:ext cx="8102798" cy="525661"/>
+          </a:xfrm>
+          <a:prstGeom prst="rect">
+            <a:avLst/>
+          </a:prstGeom>
+          <a:noFill/>
+          <a:ln/>
+        </p:spPr>
+        <p:txBody>
+          <a:bodyPr wrap="square" lIns="0" tIns="0" rIns="0" bIns="0" rtlCol="0" anchor="t"/>
+          <a:lstStyle/>
+          <a:p>
+            <a:pPr algn="l" marL="342900" indent="-342900">
+              <a:lnSpc>
+                <a:spcPts val="1620"/>
+              </a:lnSpc>
+              <a:spcAft>
+                <a:spcPts val="300"/>
+              </a:spcAft>
+              <a:buSzPct val="100000"/>
+              <a:buChar char="•"/>
             </a:pPr>
             <a:r>
               <a:rPr lang="en-US" sz="1200" dirty="0">
@@ -5846,15 +8084,159 @@
                 <a:ea typeface="Arial" pitchFamily="34" charset="-122"/>
                 <a:cs typeface="Arial" pitchFamily="34" charset="-120"/>
               </a:rPr>
-              <a:t>– Keep the worksheet in your notebook. Tonight, redo it in your head AS IF it were yesterday morning. Did your top column shift? Note in one line.</a:t>
+              <a:t>It prevents the "I AM vāta" trap. You're not a </a:t>
+            </a:r>
+            <a:pPr algn="l" indent="0" marL="0">
+              <a:lnSpc>
+                <a:spcPts val="1620"/>
+              </a:lnSpc>
+              <a:spcAft>
+                <a:spcPts val="300"/>
+              </a:spcAft>
+              <a:buNone/>
+            </a:pPr>
+            <a:r>
+              <a:rPr lang="en-US" sz="1200" i="1" dirty="0">
+                <a:solidFill>
+                  <a:srgbClr val="1C2833"/>
+                </a:solidFill>
+                <a:latin typeface="Arial" pitchFamily="34" charset="0"/>
+                <a:ea typeface="Arial" pitchFamily="34" charset="-122"/>
+                <a:cs typeface="Arial" pitchFamily="34" charset="-120"/>
+              </a:rPr>
+              <a:t>doṣa</a:t>
+            </a:r>
+            <a:pPr algn="l" indent="0" marL="0">
+              <a:lnSpc>
+                <a:spcPts val="1620"/>
+              </a:lnSpc>
+              <a:spcAft>
+                <a:spcPts val="300"/>
+              </a:spcAft>
+              <a:buNone/>
+            </a:pPr>
+            <a:r>
+              <a:rPr lang="en-US" sz="1200" dirty="0">
+                <a:solidFill>
+                  <a:srgbClr val="1C2833"/>
+                </a:solidFill>
+                <a:latin typeface="Arial" pitchFamily="34" charset="0"/>
+                <a:ea typeface="Arial" pitchFamily="34" charset="-122"/>
+                <a:cs typeface="Arial" pitchFamily="34" charset="-120"/>
+              </a:rPr>
+              <a:t>. You have a </a:t>
+            </a:r>
+            <a:pPr algn="l" indent="0" marL="0">
+              <a:lnSpc>
+                <a:spcPts val="1620"/>
+              </a:lnSpc>
+              <a:spcAft>
+                <a:spcPts val="300"/>
+              </a:spcAft>
+              <a:buNone/>
+            </a:pPr>
+            <a:r>
+              <a:rPr lang="en-US" sz="1200" i="1" dirty="0">
+                <a:solidFill>
+                  <a:srgbClr val="1C2833"/>
+                </a:solidFill>
+                <a:latin typeface="Arial" pitchFamily="34" charset="0"/>
+                <a:ea typeface="Arial" pitchFamily="34" charset="-122"/>
+                <a:cs typeface="Arial" pitchFamily="34" charset="-120"/>
+              </a:rPr>
+              <a:t>tendency</a:t>
+            </a:r>
+            <a:pPr algn="l" indent="0" marL="0">
+              <a:lnSpc>
+                <a:spcPts val="1620"/>
+              </a:lnSpc>
+              <a:spcAft>
+                <a:spcPts val="300"/>
+              </a:spcAft>
+              <a:buNone/>
+            </a:pPr>
+            <a:r>
+              <a:rPr lang="en-US" sz="1200" dirty="0">
+                <a:solidFill>
+                  <a:srgbClr val="1C2833"/>
+                </a:solidFill>
+                <a:latin typeface="Arial" pitchFamily="34" charset="0"/>
+                <a:ea typeface="Arial" pitchFamily="34" charset="-122"/>
+                <a:cs typeface="Arial" pitchFamily="34" charset="-120"/>
+              </a:rPr>
+              <a:t>.</a:t>
             </a:r>
             <a:endParaRPr lang="en-US" sz="1200" dirty="0"/>
           </a:p>
-        </p:txBody>
-      </p:sp>
-      <p:sp>
-        <p:nvSpPr>
-          <p:cNvPr id="5" name="Text 3"/>
+          <a:p>
+            <a:pPr algn="l" marL="342900" indent="-342900">
+              <a:lnSpc>
+                <a:spcPts val="1620"/>
+              </a:lnSpc>
+              <a:spcAft>
+                <a:spcPts val="300"/>
+              </a:spcAft>
+              <a:buSzPct val="100000"/>
+              <a:buChar char="•"/>
+            </a:pPr>
+            <a:r>
+              <a:rPr lang="en-US" sz="1200" dirty="0">
+                <a:solidFill>
+                  <a:srgbClr val="1C2833"/>
+                </a:solidFill>
+                <a:latin typeface="Arial" pitchFamily="34" charset="0"/>
+                <a:ea typeface="Arial" pitchFamily="34" charset="-122"/>
+                <a:cs typeface="Arial" pitchFamily="34" charset="-120"/>
+              </a:rPr>
+              <a:t>It explains why "you have a cold today" doesn't change your constitution — it changes your </a:t>
+            </a:r>
+            <a:pPr algn="l" indent="0" marL="0">
+              <a:lnSpc>
+                <a:spcPts val="1620"/>
+              </a:lnSpc>
+              <a:spcAft>
+                <a:spcPts val="300"/>
+              </a:spcAft>
+              <a:buNone/>
+            </a:pPr>
+            <a:r>
+              <a:rPr lang="en-US" sz="1200" i="1" dirty="0">
+                <a:solidFill>
+                  <a:srgbClr val="1C2833"/>
+                </a:solidFill>
+                <a:latin typeface="Arial" pitchFamily="34" charset="0"/>
+                <a:ea typeface="Arial" pitchFamily="34" charset="-122"/>
+                <a:cs typeface="Arial" pitchFamily="34" charset="-120"/>
+              </a:rPr>
+              <a:t>vikṛti</a:t>
+            </a:r>
+            <a:pPr algn="l" indent="0" marL="0">
+              <a:lnSpc>
+                <a:spcPts val="1620"/>
+              </a:lnSpc>
+              <a:spcAft>
+                <a:spcPts val="300"/>
+              </a:spcAft>
+              <a:buNone/>
+            </a:pPr>
+            <a:r>
+              <a:rPr lang="en-US" sz="1200" dirty="0">
+                <a:solidFill>
+                  <a:srgbClr val="1C2833"/>
+                </a:solidFill>
+                <a:latin typeface="Arial" pitchFamily="34" charset="0"/>
+                <a:ea typeface="Arial" pitchFamily="34" charset="-122"/>
+                <a:cs typeface="Arial" pitchFamily="34" charset="-120"/>
+              </a:rPr>
+              <a:t>.</a:t>
+            </a:r>
+            <a:endParaRPr lang="en-US" sz="1200" dirty="0"/>
+          </a:p>
+        </p:txBody>
+      </p:sp>
+      <p:sp>
+        <p:nvSpPr>
+          <p:cNvPr id="6" name="Text 4"/>
           <p:cNvSpPr/>
           <p:nvPr/>
         </p:nvSpPr>
@@ -6004,7 +8386,7 @@
                 <a:ea typeface="Georgia" pitchFamily="34" charset="-122"/>
                 <a:cs typeface="Georgia" pitchFamily="34" charset="-120"/>
               </a:rPr>
-              <a:t>Differentiation</a:t>
+              <a:t>Core (15 min) (cont.)</a:t>
             </a:r>
             <a:endParaRPr lang="en-US" sz="1800" dirty="0"/>
           </a:p>
@@ -6019,7 +8401,7 @@
         <p:spPr>
           <a:xfrm>
             <a:off x="634901" y="883593"/>
-            <a:ext cx="8102798" cy="731341"/>
+            <a:ext cx="8102798" cy="487561"/>
           </a:xfrm>
           <a:prstGeom prst="rect">
             <a:avLst/>
@@ -6050,7 +8432,7 @@
                 <a:ea typeface="Arial" pitchFamily="34" charset="-122"/>
                 <a:cs typeface="Arial" pitchFamily="34" charset="-120"/>
               </a:rPr>
-              <a:t>One tier up:</a:t>
+              <a:t>Most people are dual-dominant.</a:t>
             </a:r>
             <a:pPr algn="l" indent="0" marL="0">
               <a:lnSpc>
@@ -6070,7 +8452,7 @@
                 <a:ea typeface="Arial" pitchFamily="34" charset="-122"/>
                 <a:cs typeface="Arial" pitchFamily="34" charset="-120"/>
               </a:rPr>
-              <a:t> Try the worksheet from your most calm week of the year vs your most stressed week. Compare. What does that tell you about </a:t>
+              <a:t> Pure single-</a:t>
             </a:r>
             <a:pPr algn="l" indent="0" marL="0">
               <a:lnSpc>
@@ -6090,6 +8472,46 @@
                 <a:ea typeface="Arial" pitchFamily="34" charset="-122"/>
                 <a:cs typeface="Arial" pitchFamily="34" charset="-120"/>
               </a:rPr>
+              <a:t>doṣa</a:t>
+            </a:r>
+            <a:pPr algn="l" indent="0" marL="0">
+              <a:lnSpc>
+                <a:spcPts val="1620"/>
+              </a:lnSpc>
+              <a:spcAft>
+                <a:spcPts val="300"/>
+              </a:spcAft>
+              <a:buNone/>
+            </a:pPr>
+            <a:r>
+              <a:rPr lang="en-US" sz="1200" dirty="0">
+                <a:solidFill>
+                  <a:srgbClr val="1C2833"/>
+                </a:solidFill>
+                <a:latin typeface="Arial" pitchFamily="34" charset="0"/>
+                <a:ea typeface="Arial" pitchFamily="34" charset="-122"/>
+                <a:cs typeface="Arial" pitchFamily="34" charset="-120"/>
+              </a:rPr>
+              <a:t> </a:t>
+            </a:r>
+            <a:pPr algn="l" indent="0" marL="0">
+              <a:lnSpc>
+                <a:spcPts val="1620"/>
+              </a:lnSpc>
+              <a:spcAft>
+                <a:spcPts val="300"/>
+              </a:spcAft>
+              <a:buNone/>
+            </a:pPr>
+            <a:r>
+              <a:rPr lang="en-US" sz="1200" i="1" dirty="0">
+                <a:solidFill>
+                  <a:srgbClr val="1C2833"/>
+                </a:solidFill>
+                <a:latin typeface="Arial" pitchFamily="34" charset="0"/>
+                <a:ea typeface="Arial" pitchFamily="34" charset="-122"/>
+                <a:cs typeface="Arial" pitchFamily="34" charset="-120"/>
+              </a:rPr>
               <a:t>prakṛti</a:t>
             </a:r>
             <a:pPr algn="l" indent="0" marL="0">
@@ -6110,7 +8532,7 @@
                 <a:ea typeface="Arial" pitchFamily="34" charset="-122"/>
                 <a:cs typeface="Arial" pitchFamily="34" charset="-120"/>
               </a:rPr>
-              <a:t> vs </a:t>
+              <a:t> is rare. Most people are </a:t>
             </a:r>
             <a:pPr algn="l" indent="0" marL="0">
               <a:lnSpc>
@@ -6130,7 +8552,7 @@
                 <a:ea typeface="Arial" pitchFamily="34" charset="-122"/>
                 <a:cs typeface="Arial" pitchFamily="34" charset="-120"/>
               </a:rPr>
-              <a:t>vikṛti</a:t>
+              <a:t>vāta-pitta</a:t>
             </a:r>
             <a:pPr algn="l" indent="0" marL="0">
               <a:lnSpc>
@@ -6150,10 +8572,152 @@
                 <a:ea typeface="Arial" pitchFamily="34" charset="-122"/>
                 <a:cs typeface="Arial" pitchFamily="34" charset="-120"/>
               </a:rPr>
-              <a:t>?</a:t>
+              <a:t>, </a:t>
+            </a:r>
+            <a:pPr algn="l" indent="0" marL="0">
+              <a:lnSpc>
+                <a:spcPts val="1620"/>
+              </a:lnSpc>
+              <a:spcAft>
+                <a:spcPts val="300"/>
+              </a:spcAft>
+              <a:buNone/>
+            </a:pPr>
+            <a:r>
+              <a:rPr lang="en-US" sz="1200" i="1" dirty="0">
+                <a:solidFill>
+                  <a:srgbClr val="1C2833"/>
+                </a:solidFill>
+                <a:latin typeface="Arial" pitchFamily="34" charset="0"/>
+                <a:ea typeface="Arial" pitchFamily="34" charset="-122"/>
+                <a:cs typeface="Arial" pitchFamily="34" charset="-120"/>
+              </a:rPr>
+              <a:t>pitta-kapha</a:t>
+            </a:r>
+            <a:pPr algn="l" indent="0" marL="0">
+              <a:lnSpc>
+                <a:spcPts val="1620"/>
+              </a:lnSpc>
+              <a:spcAft>
+                <a:spcPts val="300"/>
+              </a:spcAft>
+              <a:buNone/>
+            </a:pPr>
+            <a:r>
+              <a:rPr lang="en-US" sz="1200" dirty="0">
+                <a:solidFill>
+                  <a:srgbClr val="1C2833"/>
+                </a:solidFill>
+                <a:latin typeface="Arial" pitchFamily="34" charset="0"/>
+                <a:ea typeface="Arial" pitchFamily="34" charset="-122"/>
+                <a:cs typeface="Arial" pitchFamily="34" charset="-120"/>
+              </a:rPr>
+              <a:t>, or </a:t>
+            </a:r>
+            <a:pPr algn="l" indent="0" marL="0">
+              <a:lnSpc>
+                <a:spcPts val="1620"/>
+              </a:lnSpc>
+              <a:spcAft>
+                <a:spcPts val="300"/>
+              </a:spcAft>
+              <a:buNone/>
+            </a:pPr>
+            <a:r>
+              <a:rPr lang="en-US" sz="1200" i="1" dirty="0">
+                <a:solidFill>
+                  <a:srgbClr val="1C2833"/>
+                </a:solidFill>
+                <a:latin typeface="Arial" pitchFamily="34" charset="0"/>
+                <a:ea typeface="Arial" pitchFamily="34" charset="-122"/>
+                <a:cs typeface="Arial" pitchFamily="34" charset="-120"/>
+              </a:rPr>
+              <a:t>vāta-kapha</a:t>
+            </a:r>
+            <a:pPr algn="l" indent="0" marL="0">
+              <a:lnSpc>
+                <a:spcPts val="1620"/>
+              </a:lnSpc>
+              <a:spcAft>
+                <a:spcPts val="300"/>
+              </a:spcAft>
+              <a:buNone/>
+            </a:pPr>
+            <a:r>
+              <a:rPr lang="en-US" sz="1200" dirty="0">
+                <a:solidFill>
+                  <a:srgbClr val="1C2833"/>
+                </a:solidFill>
+                <a:latin typeface="Arial" pitchFamily="34" charset="0"/>
+                <a:ea typeface="Arial" pitchFamily="34" charset="-122"/>
+                <a:cs typeface="Arial" pitchFamily="34" charset="-120"/>
+              </a:rPr>
+              <a:t>. A few are roughly balanced across all three (</a:t>
+            </a:r>
+            <a:pPr algn="l" indent="0" marL="0">
+              <a:lnSpc>
+                <a:spcPts val="1620"/>
+              </a:lnSpc>
+              <a:spcAft>
+                <a:spcPts val="300"/>
+              </a:spcAft>
+              <a:buNone/>
+            </a:pPr>
+            <a:r>
+              <a:rPr lang="en-US" sz="1200" i="1" dirty="0">
+                <a:solidFill>
+                  <a:srgbClr val="1C2833"/>
+                </a:solidFill>
+                <a:latin typeface="Arial" pitchFamily="34" charset="0"/>
+                <a:ea typeface="Arial" pitchFamily="34" charset="-122"/>
+                <a:cs typeface="Arial" pitchFamily="34" charset="-120"/>
+              </a:rPr>
+              <a:t>sama-prakṛti</a:t>
+            </a:r>
+            <a:pPr algn="l" indent="0" marL="0">
+              <a:lnSpc>
+                <a:spcPts val="1620"/>
+              </a:lnSpc>
+              <a:spcAft>
+                <a:spcPts val="300"/>
+              </a:spcAft>
+              <a:buNone/>
+            </a:pPr>
+            <a:r>
+              <a:rPr lang="en-US" sz="1200" dirty="0">
+                <a:solidFill>
+                  <a:srgbClr val="1C2833"/>
+                </a:solidFill>
+                <a:latin typeface="Arial" pitchFamily="34" charset="0"/>
+                <a:ea typeface="Arial" pitchFamily="34" charset="-122"/>
+                <a:cs typeface="Arial" pitchFamily="34" charset="-120"/>
+              </a:rPr>
+              <a:t> — rarest).</a:t>
             </a:r>
             <a:endParaRPr lang="en-US" sz="1200" dirty="0"/>
           </a:p>
+        </p:txBody>
+      </p:sp>
+      <p:sp>
+        <p:nvSpPr>
+          <p:cNvPr id="5" name="Text 3"/>
+          <p:cNvSpPr/>
+          <p:nvPr/>
+        </p:nvSpPr>
+        <p:spPr>
+          <a:xfrm>
+            <a:off x="634901" y="1472654"/>
+            <a:ext cx="8102798" cy="693241"/>
+          </a:xfrm>
+          <a:prstGeom prst="rect">
+            <a:avLst/>
+          </a:prstGeom>
+          <a:noFill/>
+          <a:ln/>
+        </p:spPr>
+        <p:txBody>
+          <a:bodyPr wrap="square" lIns="0" tIns="0" rIns="0" bIns="0" rtlCol="0" anchor="t"/>
+          <a:lstStyle/>
           <a:p>
             <a:pPr algn="l" marL="342900" indent="-342900">
               <a:lnSpc>
@@ -6174,7 +8738,7 @@
                 <a:ea typeface="Arial" pitchFamily="34" charset="-122"/>
                 <a:cs typeface="Arial" pitchFamily="34" charset="-120"/>
               </a:rPr>
-              <a:t>One tier down:</a:t>
+              <a:t>Source paraphrase.</a:t>
             </a:r>
             <a:pPr algn="l" indent="0" marL="0">
               <a:lnSpc>
@@ -6194,7 +8758,7 @@
                 <a:ea typeface="Arial" pitchFamily="34" charset="-122"/>
                 <a:cs typeface="Arial" pitchFamily="34" charset="-120"/>
               </a:rPr>
-              <a:t> Just complete the worksheet. The </a:t>
+              <a:t> </a:t>
             </a:r>
             <a:pPr algn="l" indent="0" marL="0">
               <a:lnSpc>
@@ -6214,7 +8778,7 @@
                 <a:ea typeface="Arial" pitchFamily="34" charset="-122"/>
                 <a:cs typeface="Arial" pitchFamily="34" charset="-120"/>
               </a:rPr>
-              <a:t>prakṛti/vikṛti</a:t>
+              <a:t>"Classical Ayurveda holds that prakṛti is set at conception by the relative balance of the doṣas at that time, with influences from the mother's diet and lifestyle during pregnancy."</a:t>
             </a:r>
             <a:pPr algn="l" indent="0" marL="0">
               <a:lnSpc>
@@ -6234,7 +8798,47 @@
                 <a:ea typeface="Arial" pitchFamily="34" charset="-122"/>
                 <a:cs typeface="Arial" pitchFamily="34" charset="-120"/>
               </a:rPr>
-              <a:t> distinction can be revisited on Day 5.</a:t>
+              <a:t> (Paraphrased from Caraka Saṁhitā, </a:t>
+            </a:r>
+            <a:pPr algn="l" indent="0" marL="0">
+              <a:lnSpc>
+                <a:spcPts val="1620"/>
+              </a:lnSpc>
+              <a:spcAft>
+                <a:spcPts val="300"/>
+              </a:spcAft>
+              <a:buNone/>
+            </a:pPr>
+            <a:r>
+              <a:rPr lang="en-US" sz="1200" i="1" dirty="0">
+                <a:solidFill>
+                  <a:srgbClr val="1C2833"/>
+                </a:solidFill>
+                <a:latin typeface="Arial" pitchFamily="34" charset="0"/>
+                <a:ea typeface="Arial" pitchFamily="34" charset="-122"/>
+                <a:cs typeface="Arial" pitchFamily="34" charset="-120"/>
+              </a:rPr>
+              <a:t>Vimānasthāna</a:t>
+            </a:r>
+            <a:pPr algn="l" indent="0" marL="0">
+              <a:lnSpc>
+                <a:spcPts val="1620"/>
+              </a:lnSpc>
+              <a:spcAft>
+                <a:spcPts val="300"/>
+              </a:spcAft>
+              <a:buNone/>
+            </a:pPr>
+            <a:r>
+              <a:rPr lang="en-US" sz="1200" dirty="0">
+                <a:solidFill>
+                  <a:srgbClr val="1C2833"/>
+                </a:solidFill>
+                <a:latin typeface="Arial" pitchFamily="34" charset="0"/>
+                <a:ea typeface="Arial" pitchFamily="34" charset="-122"/>
+                <a:cs typeface="Arial" pitchFamily="34" charset="-120"/>
+              </a:rPr>
+              <a:t> 8 — discussed in fuller detail at Senior band.)</a:t>
             </a:r>
             <a:endParaRPr lang="en-US" sz="1200" dirty="0"/>
           </a:p>
@@ -6242,7 +8846,7 @@
       </p:sp>
       <p:sp>
         <p:nvSpPr>
-          <p:cNvPr id="5" name="Text 3"/>
+          <p:cNvPr id="6" name="Text 4"/>
           <p:cNvSpPr/>
           <p:nvPr/>
         </p:nvSpPr>
